--- a/media/module2/slides.pptx
+++ b/media/module2/slides.pptx
@@ -41,6 +41,19 @@
     <p:sldId id="289" r:id="rId41"/>
     <p:sldId id="290" r:id="rId42"/>
     <p:sldId id="291" r:id="rId43"/>
+    <p:sldId id="292" r:id="rId44"/>
+    <p:sldId id="293" r:id="rId45"/>
+    <p:sldId id="294" r:id="rId46"/>
+    <p:sldId id="295" r:id="rId47"/>
+    <p:sldId id="296" r:id="rId48"/>
+    <p:sldId id="297" r:id="rId49"/>
+    <p:sldId id="298" r:id="rId50"/>
+    <p:sldId id="299" r:id="rId51"/>
+    <p:sldId id="300" r:id="rId52"/>
+    <p:sldId id="301" r:id="rId53"/>
+    <p:sldId id="302" r:id="rId54"/>
+    <p:sldId id="303" r:id="rId55"/>
+    <p:sldId id="304" r:id="rId56"/>
   </p:sldIdLst>
   <p:sldSz cx="12191695" cy="6858000" type="screen4x3"/>
   <p:notesSz cx="6858000" cy="9144000"/>
@@ -607,7 +620,7 @@
           <a:lstStyle/>
           <a:p>
             <a:r>
-              <a:t>From MODULE2 Topics Covered.</a:t>
+              <a:t>From MODULE2 Verification &amp; Testing Methods.</a:t>
             </a:r>
           </a:p>
         </p:txBody>
@@ -677,7 +690,7 @@
           <a:lstStyle/>
           <a:p>
             <a:r>
-              <a:t>Full detail in docs/MODULE2.md command reference.</a:t>
+              <a:t>From MODULE2 Verification &amp; Testing Methods.</a:t>
             </a:r>
           </a:p>
         </p:txBody>
@@ -747,7 +760,7 @@
           <a:lstStyle/>
           <a:p>
             <a:r>
-              <a:t>Full detail in docs/MODULE2.md command reference.</a:t>
+              <a:t>From MODULE2 Verification &amp; Testing Methods.</a:t>
             </a:r>
           </a:p>
         </p:txBody>
@@ -817,7 +830,7 @@
           <a:lstStyle/>
           <a:p>
             <a:r>
-              <a:t>Full detail in docs/MODULE2.md command reference.</a:t>
+              <a:t>From MODULE2 Topics Covered.</a:t>
             </a:r>
           </a:p>
         </p:txBody>
@@ -887,7 +900,7 @@
           <a:lstStyle/>
           <a:p>
             <a:r>
-              <a:t>Run from course repository root.</a:t>
+              <a:t>From MODULE2 Topics Covered.</a:t>
             </a:r>
           </a:p>
         </p:txBody>
@@ -957,7 +970,7 @@
           <a:lstStyle/>
           <a:p>
             <a:r>
-              <a:t>module2/examples/examples/uvm_smoke/README.md</a:t>
+              <a:t>From MODULE2 Topics Covered.</a:t>
             </a:r>
           </a:p>
         </p:txBody>
@@ -1027,7 +1040,7 @@
           <a:lstStyle/>
           <a:p>
             <a:r>
-              <a:t>Hands-on: module2/examples/examples/uvm_smoke/</a:t>
+              <a:t>Full detail in docs/MODULE2.md command reference.</a:t>
             </a:r>
           </a:p>
         </p:txBody>
@@ -1097,7 +1110,147 @@
           <a:lstStyle/>
           <a:p>
             <a:r>
-              <a:t>From MODULE2 Learning Outcomes.</a:t>
+              <a:t>Full detail in docs/MODULE2.md command reference.</a:t>
+            </a:r>
+          </a:p>
+        </p:txBody>
+      </p:sp>
+      <p:sp>
+        <p:nvSpPr>
+          <p:cNvPr id="4" name="Slide Number Placeholder 3"/>
+          <p:cNvSpPr>
+            <a:spLocks noGrp="1"/>
+          </p:cNvSpPr>
+          <p:nvPr>
+            <p:ph type="sldNum" idx="5" sz="quarter"/>
+          </p:nvPr>
+        </p:nvSpPr>
+        <p:spPr/>
+      </p:sp>
+    </p:spTree>
+  </p:cSld>
+  <p:clrMapOvr>
+    <a:masterClrMapping/>
+  </p:clrMapOvr>
+</p:notes>
+</file>
+
+<file path=ppt/notesSlides/notesSlide18.xml><?xml version="1.0" encoding="utf-8"?>
+<p:notes xmlns:a="http://schemas.openxmlformats.org/drawingml/2006/main" xmlns:p="http://schemas.openxmlformats.org/presentationml/2006/main" xmlns:r="http://schemas.openxmlformats.org/officeDocument/2006/relationships">
+  <p:cSld>
+    <p:spTree>
+      <p:nvGrpSpPr>
+        <p:cNvPr id="1" name=""/>
+        <p:cNvGrpSpPr/>
+        <p:nvPr/>
+      </p:nvGrpSpPr>
+      <p:grpSpPr>
+        <a:xfrm>
+          <a:off x="0" y="0"/>
+          <a:ext cx="0" cy="0"/>
+          <a:chOff x="0" y="0"/>
+          <a:chExt cx="0" cy="0"/>
+        </a:xfrm>
+      </p:grpSpPr>
+      <p:sp>
+        <p:nvSpPr>
+          <p:cNvPr id="2" name="Slide Image Placeholder 1"/>
+          <p:cNvSpPr>
+            <a:spLocks noGrp="1"/>
+          </p:cNvSpPr>
+          <p:nvPr>
+            <p:ph type="sldImg" idx="2"/>
+          </p:nvPr>
+        </p:nvSpPr>
+        <p:spPr/>
+      </p:sp>
+      <p:sp>
+        <p:nvSpPr>
+          <p:cNvPr id="3" name="Notes Placeholder 2"/>
+          <p:cNvSpPr>
+            <a:spLocks noGrp="1"/>
+          </p:cNvSpPr>
+          <p:nvPr>
+            <p:ph type="body" idx="3" sz="quarter"/>
+          </p:nvPr>
+        </p:nvSpPr>
+        <p:spPr/>
+        <p:txBody>
+          <a:bodyPr/>
+          <a:lstStyle/>
+          <a:p>
+            <a:r>
+              <a:t>Full detail in docs/MODULE2.md command reference.</a:t>
+            </a:r>
+          </a:p>
+        </p:txBody>
+      </p:sp>
+      <p:sp>
+        <p:nvSpPr>
+          <p:cNvPr id="4" name="Slide Number Placeholder 3"/>
+          <p:cNvSpPr>
+            <a:spLocks noGrp="1"/>
+          </p:cNvSpPr>
+          <p:nvPr>
+            <p:ph type="sldNum" idx="5" sz="quarter"/>
+          </p:nvPr>
+        </p:nvSpPr>
+        <p:spPr/>
+      </p:sp>
+    </p:spTree>
+  </p:cSld>
+  <p:clrMapOvr>
+    <a:masterClrMapping/>
+  </p:clrMapOvr>
+</p:notes>
+</file>
+
+<file path=ppt/notesSlides/notesSlide19.xml><?xml version="1.0" encoding="utf-8"?>
+<p:notes xmlns:a="http://schemas.openxmlformats.org/drawingml/2006/main" xmlns:p="http://schemas.openxmlformats.org/presentationml/2006/main" xmlns:r="http://schemas.openxmlformats.org/officeDocument/2006/relationships">
+  <p:cSld>
+    <p:spTree>
+      <p:nvGrpSpPr>
+        <p:cNvPr id="1" name=""/>
+        <p:cNvGrpSpPr/>
+        <p:nvPr/>
+      </p:nvGrpSpPr>
+      <p:grpSpPr>
+        <a:xfrm>
+          <a:off x="0" y="0"/>
+          <a:ext cx="0" cy="0"/>
+          <a:chOff x="0" y="0"/>
+          <a:chExt cx="0" cy="0"/>
+        </a:xfrm>
+      </p:grpSpPr>
+      <p:sp>
+        <p:nvSpPr>
+          <p:cNvPr id="2" name="Slide Image Placeholder 1"/>
+          <p:cNvSpPr>
+            <a:spLocks noGrp="1"/>
+          </p:cNvSpPr>
+          <p:nvPr>
+            <p:ph type="sldImg" idx="2"/>
+          </p:nvPr>
+        </p:nvSpPr>
+        <p:spPr/>
+      </p:sp>
+      <p:sp>
+        <p:nvSpPr>
+          <p:cNvPr id="3" name="Notes Placeholder 2"/>
+          <p:cNvSpPr>
+            <a:spLocks noGrp="1"/>
+          </p:cNvSpPr>
+          <p:nvPr>
+            <p:ph type="body" idx="3" sz="quarter"/>
+          </p:nvPr>
+        </p:nvSpPr>
+        <p:spPr/>
+        <p:txBody>
+          <a:bodyPr/>
+          <a:lstStyle/>
+          <a:p>
+            <a:r>
+              <a:t>Run from course repository root.</a:t>
             </a:r>
           </a:p>
         </p:txBody>
@@ -1192,6 +1345,496 @@
 </p:notes>
 </file>
 
+<file path=ppt/notesSlides/notesSlide20.xml><?xml version="1.0" encoding="utf-8"?>
+<p:notes xmlns:a="http://schemas.openxmlformats.org/drawingml/2006/main" xmlns:p="http://schemas.openxmlformats.org/presentationml/2006/main" xmlns:r="http://schemas.openxmlformats.org/officeDocument/2006/relationships">
+  <p:cSld>
+    <p:spTree>
+      <p:nvGrpSpPr>
+        <p:cNvPr id="1" name=""/>
+        <p:cNvGrpSpPr/>
+        <p:nvPr/>
+      </p:nvGrpSpPr>
+      <p:grpSpPr>
+        <a:xfrm>
+          <a:off x="0" y="0"/>
+          <a:ext cx="0" cy="0"/>
+          <a:chOff x="0" y="0"/>
+          <a:chExt cx="0" cy="0"/>
+        </a:xfrm>
+      </p:grpSpPr>
+      <p:sp>
+        <p:nvSpPr>
+          <p:cNvPr id="2" name="Slide Image Placeholder 1"/>
+          <p:cNvSpPr>
+            <a:spLocks noGrp="1"/>
+          </p:cNvSpPr>
+          <p:nvPr>
+            <p:ph type="sldImg" idx="2"/>
+          </p:nvPr>
+        </p:nvSpPr>
+        <p:spPr/>
+      </p:sp>
+      <p:sp>
+        <p:nvSpPr>
+          <p:cNvPr id="3" name="Notes Placeholder 2"/>
+          <p:cNvSpPr>
+            <a:spLocks noGrp="1"/>
+          </p:cNvSpPr>
+          <p:nvPr>
+            <p:ph type="body" idx="3" sz="quarter"/>
+          </p:nvPr>
+        </p:nvSpPr>
+        <p:spPr/>
+        <p:txBody>
+          <a:bodyPr/>
+          <a:lstStyle/>
+          <a:p>
+            <a:r>
+              <a:t>module2/examples/uvm_smoke/README.md</a:t>
+            </a:r>
+          </a:p>
+        </p:txBody>
+      </p:sp>
+      <p:sp>
+        <p:nvSpPr>
+          <p:cNvPr id="4" name="Slide Number Placeholder 3"/>
+          <p:cNvSpPr>
+            <a:spLocks noGrp="1"/>
+          </p:cNvSpPr>
+          <p:nvPr>
+            <p:ph type="sldNum" idx="5" sz="quarter"/>
+          </p:nvPr>
+        </p:nvSpPr>
+        <p:spPr/>
+      </p:sp>
+    </p:spTree>
+  </p:cSld>
+  <p:clrMapOvr>
+    <a:masterClrMapping/>
+  </p:clrMapOvr>
+</p:notes>
+</file>
+
+<file path=ppt/notesSlides/notesSlide21.xml><?xml version="1.0" encoding="utf-8"?>
+<p:notes xmlns:a="http://schemas.openxmlformats.org/drawingml/2006/main" xmlns:p="http://schemas.openxmlformats.org/presentationml/2006/main" xmlns:r="http://schemas.openxmlformats.org/officeDocument/2006/relationships">
+  <p:cSld>
+    <p:spTree>
+      <p:nvGrpSpPr>
+        <p:cNvPr id="1" name=""/>
+        <p:cNvGrpSpPr/>
+        <p:nvPr/>
+      </p:nvGrpSpPr>
+      <p:grpSpPr>
+        <a:xfrm>
+          <a:off x="0" y="0"/>
+          <a:ext cx="0" cy="0"/>
+          <a:chOff x="0" y="0"/>
+          <a:chExt cx="0" cy="0"/>
+        </a:xfrm>
+      </p:grpSpPr>
+      <p:sp>
+        <p:nvSpPr>
+          <p:cNvPr id="2" name="Slide Image Placeholder 1"/>
+          <p:cNvSpPr>
+            <a:spLocks noGrp="1"/>
+          </p:cNvSpPr>
+          <p:nvPr>
+            <p:ph type="sldImg" idx="2"/>
+          </p:nvPr>
+        </p:nvSpPr>
+        <p:spPr/>
+      </p:sp>
+      <p:sp>
+        <p:nvSpPr>
+          <p:cNvPr id="3" name="Notes Placeholder 2"/>
+          <p:cNvSpPr>
+            <a:spLocks noGrp="1"/>
+          </p:cNvSpPr>
+          <p:nvPr>
+            <p:ph type="body" idx="3" sz="quarter"/>
+          </p:nvPr>
+        </p:nvSpPr>
+        <p:spPr/>
+        <p:txBody>
+          <a:bodyPr/>
+          <a:lstStyle/>
+          <a:p>
+            <a:r>
+              <a:t>Hands-on: module2/examples/uvm_smoke/</a:t>
+            </a:r>
+          </a:p>
+        </p:txBody>
+      </p:sp>
+      <p:sp>
+        <p:nvSpPr>
+          <p:cNvPr id="4" name="Slide Number Placeholder 3"/>
+          <p:cNvSpPr>
+            <a:spLocks noGrp="1"/>
+          </p:cNvSpPr>
+          <p:nvPr>
+            <p:ph type="sldNum" idx="5" sz="quarter"/>
+          </p:nvPr>
+        </p:nvSpPr>
+        <p:spPr/>
+      </p:sp>
+    </p:spTree>
+  </p:cSld>
+  <p:clrMapOvr>
+    <a:masterClrMapping/>
+  </p:clrMapOvr>
+</p:notes>
+</file>
+
+<file path=ppt/notesSlides/notesSlide22.xml><?xml version="1.0" encoding="utf-8"?>
+<p:notes xmlns:a="http://schemas.openxmlformats.org/drawingml/2006/main" xmlns:p="http://schemas.openxmlformats.org/presentationml/2006/main" xmlns:r="http://schemas.openxmlformats.org/officeDocument/2006/relationships">
+  <p:cSld>
+    <p:spTree>
+      <p:nvGrpSpPr>
+        <p:cNvPr id="1" name=""/>
+        <p:cNvGrpSpPr/>
+        <p:nvPr/>
+      </p:nvGrpSpPr>
+      <p:grpSpPr>
+        <a:xfrm>
+          <a:off x="0" y="0"/>
+          <a:ext cx="0" cy="0"/>
+          <a:chOff x="0" y="0"/>
+          <a:chExt cx="0" cy="0"/>
+        </a:xfrm>
+      </p:grpSpPr>
+      <p:sp>
+        <p:nvSpPr>
+          <p:cNvPr id="2" name="Slide Image Placeholder 1"/>
+          <p:cNvSpPr>
+            <a:spLocks noGrp="1"/>
+          </p:cNvSpPr>
+          <p:nvPr>
+            <p:ph type="sldImg" idx="2"/>
+          </p:nvPr>
+        </p:nvSpPr>
+        <p:spPr/>
+      </p:sp>
+      <p:sp>
+        <p:nvSpPr>
+          <p:cNvPr id="3" name="Notes Placeholder 2"/>
+          <p:cNvSpPr>
+            <a:spLocks noGrp="1"/>
+          </p:cNvSpPr>
+          <p:nvPr>
+            <p:ph type="body" idx="3" sz="quarter"/>
+          </p:nvPr>
+        </p:nvSpPr>
+        <p:spPr/>
+        <p:txBody>
+          <a:bodyPr/>
+          <a:lstStyle/>
+          <a:p>
+            <a:r>
+              <a:t>From MODULE2 Key Concepts.</a:t>
+            </a:r>
+          </a:p>
+        </p:txBody>
+      </p:sp>
+      <p:sp>
+        <p:nvSpPr>
+          <p:cNvPr id="4" name="Slide Number Placeholder 3"/>
+          <p:cNvSpPr>
+            <a:spLocks noGrp="1"/>
+          </p:cNvSpPr>
+          <p:nvPr>
+            <p:ph type="sldNum" idx="5" sz="quarter"/>
+          </p:nvPr>
+        </p:nvSpPr>
+        <p:spPr/>
+      </p:sp>
+    </p:spTree>
+  </p:cSld>
+  <p:clrMapOvr>
+    <a:masterClrMapping/>
+  </p:clrMapOvr>
+</p:notes>
+</file>
+
+<file path=ppt/notesSlides/notesSlide23.xml><?xml version="1.0" encoding="utf-8"?>
+<p:notes xmlns:a="http://schemas.openxmlformats.org/drawingml/2006/main" xmlns:p="http://schemas.openxmlformats.org/presentationml/2006/main" xmlns:r="http://schemas.openxmlformats.org/officeDocument/2006/relationships">
+  <p:cSld>
+    <p:spTree>
+      <p:nvGrpSpPr>
+        <p:cNvPr id="1" name=""/>
+        <p:cNvGrpSpPr/>
+        <p:nvPr/>
+      </p:nvGrpSpPr>
+      <p:grpSpPr>
+        <a:xfrm>
+          <a:off x="0" y="0"/>
+          <a:ext cx="0" cy="0"/>
+          <a:chOff x="0" y="0"/>
+          <a:chExt cx="0" cy="0"/>
+        </a:xfrm>
+      </p:grpSpPr>
+      <p:sp>
+        <p:nvSpPr>
+          <p:cNvPr id="2" name="Slide Image Placeholder 1"/>
+          <p:cNvSpPr>
+            <a:spLocks noGrp="1"/>
+          </p:cNvSpPr>
+          <p:nvPr>
+            <p:ph type="sldImg" idx="2"/>
+          </p:nvPr>
+        </p:nvSpPr>
+        <p:spPr/>
+      </p:sp>
+      <p:sp>
+        <p:nvSpPr>
+          <p:cNvPr id="3" name="Notes Placeholder 2"/>
+          <p:cNvSpPr>
+            <a:spLocks noGrp="1"/>
+          </p:cNvSpPr>
+          <p:nvPr>
+            <p:ph type="body" idx="3" sz="quarter"/>
+          </p:nvPr>
+        </p:nvSpPr>
+        <p:spPr/>
+        <p:txBody>
+          <a:bodyPr/>
+          <a:lstStyle/>
+          <a:p>
+            <a:r>
+              <a:t>From MODULE2 Key Concepts.</a:t>
+            </a:r>
+          </a:p>
+        </p:txBody>
+      </p:sp>
+      <p:sp>
+        <p:nvSpPr>
+          <p:cNvPr id="4" name="Slide Number Placeholder 3"/>
+          <p:cNvSpPr>
+            <a:spLocks noGrp="1"/>
+          </p:cNvSpPr>
+          <p:nvPr>
+            <p:ph type="sldNum" idx="5" sz="quarter"/>
+          </p:nvPr>
+        </p:nvSpPr>
+        <p:spPr/>
+      </p:sp>
+    </p:spTree>
+  </p:cSld>
+  <p:clrMapOvr>
+    <a:masterClrMapping/>
+  </p:clrMapOvr>
+</p:notes>
+</file>
+
+<file path=ppt/notesSlides/notesSlide24.xml><?xml version="1.0" encoding="utf-8"?>
+<p:notes xmlns:a="http://schemas.openxmlformats.org/drawingml/2006/main" xmlns:p="http://schemas.openxmlformats.org/presentationml/2006/main" xmlns:r="http://schemas.openxmlformats.org/officeDocument/2006/relationships">
+  <p:cSld>
+    <p:spTree>
+      <p:nvGrpSpPr>
+        <p:cNvPr id="1" name=""/>
+        <p:cNvGrpSpPr/>
+        <p:nvPr/>
+      </p:nvGrpSpPr>
+      <p:grpSpPr>
+        <a:xfrm>
+          <a:off x="0" y="0"/>
+          <a:ext cx="0" cy="0"/>
+          <a:chOff x="0" y="0"/>
+          <a:chExt cx="0" cy="0"/>
+        </a:xfrm>
+      </p:grpSpPr>
+      <p:sp>
+        <p:nvSpPr>
+          <p:cNvPr id="2" name="Slide Image Placeholder 1"/>
+          <p:cNvSpPr>
+            <a:spLocks noGrp="1"/>
+          </p:cNvSpPr>
+          <p:nvPr>
+            <p:ph type="sldImg" idx="2"/>
+          </p:nvPr>
+        </p:nvSpPr>
+        <p:spPr/>
+      </p:sp>
+      <p:sp>
+        <p:nvSpPr>
+          <p:cNvPr id="3" name="Notes Placeholder 2"/>
+          <p:cNvSpPr>
+            <a:spLocks noGrp="1"/>
+          </p:cNvSpPr>
+          <p:nvPr>
+            <p:ph type="body" idx="3" sz="quarter"/>
+          </p:nvPr>
+        </p:nvSpPr>
+        <p:spPr/>
+        <p:txBody>
+          <a:bodyPr/>
+          <a:lstStyle/>
+          <a:p>
+            <a:r>
+              <a:t>From MODULE2 Common Pitfalls.</a:t>
+            </a:r>
+          </a:p>
+        </p:txBody>
+      </p:sp>
+      <p:sp>
+        <p:nvSpPr>
+          <p:cNvPr id="4" name="Slide Number Placeholder 3"/>
+          <p:cNvSpPr>
+            <a:spLocks noGrp="1"/>
+          </p:cNvSpPr>
+          <p:nvPr>
+            <p:ph type="sldNum" idx="5" sz="quarter"/>
+          </p:nvPr>
+        </p:nvSpPr>
+        <p:spPr/>
+      </p:sp>
+    </p:spTree>
+  </p:cSld>
+  <p:clrMapOvr>
+    <a:masterClrMapping/>
+  </p:clrMapOvr>
+</p:notes>
+</file>
+
+<file path=ppt/notesSlides/notesSlide25.xml><?xml version="1.0" encoding="utf-8"?>
+<p:notes xmlns:a="http://schemas.openxmlformats.org/drawingml/2006/main" xmlns:p="http://schemas.openxmlformats.org/presentationml/2006/main" xmlns:r="http://schemas.openxmlformats.org/officeDocument/2006/relationships">
+  <p:cSld>
+    <p:spTree>
+      <p:nvGrpSpPr>
+        <p:cNvPr id="1" name=""/>
+        <p:cNvGrpSpPr/>
+        <p:nvPr/>
+      </p:nvGrpSpPr>
+      <p:grpSpPr>
+        <a:xfrm>
+          <a:off x="0" y="0"/>
+          <a:ext cx="0" cy="0"/>
+          <a:chOff x="0" y="0"/>
+          <a:chExt cx="0" cy="0"/>
+        </a:xfrm>
+      </p:grpSpPr>
+      <p:sp>
+        <p:nvSpPr>
+          <p:cNvPr id="2" name="Slide Image Placeholder 1"/>
+          <p:cNvSpPr>
+            <a:spLocks noGrp="1"/>
+          </p:cNvSpPr>
+          <p:nvPr>
+            <p:ph type="sldImg" idx="2"/>
+          </p:nvPr>
+        </p:nvSpPr>
+        <p:spPr/>
+      </p:sp>
+      <p:sp>
+        <p:nvSpPr>
+          <p:cNvPr id="3" name="Notes Placeholder 2"/>
+          <p:cNvSpPr>
+            <a:spLocks noGrp="1"/>
+          </p:cNvSpPr>
+          <p:nvPr>
+            <p:ph type="body" idx="3" sz="quarter"/>
+          </p:nvPr>
+        </p:nvSpPr>
+        <p:spPr/>
+        <p:txBody>
+          <a:bodyPr/>
+          <a:lstStyle/>
+          <a:p>
+            <a:r>
+              <a:t>From MODULE2 Common Pitfalls.</a:t>
+            </a:r>
+          </a:p>
+        </p:txBody>
+      </p:sp>
+      <p:sp>
+        <p:nvSpPr>
+          <p:cNvPr id="4" name="Slide Number Placeholder 3"/>
+          <p:cNvSpPr>
+            <a:spLocks noGrp="1"/>
+          </p:cNvSpPr>
+          <p:nvPr>
+            <p:ph type="sldNum" idx="5" sz="quarter"/>
+          </p:nvPr>
+        </p:nvSpPr>
+        <p:spPr/>
+      </p:sp>
+    </p:spTree>
+  </p:cSld>
+  <p:clrMapOvr>
+    <a:masterClrMapping/>
+  </p:clrMapOvr>
+</p:notes>
+</file>
+
+<file path=ppt/notesSlides/notesSlide26.xml><?xml version="1.0" encoding="utf-8"?>
+<p:notes xmlns:a="http://schemas.openxmlformats.org/drawingml/2006/main" xmlns:p="http://schemas.openxmlformats.org/presentationml/2006/main" xmlns:r="http://schemas.openxmlformats.org/officeDocument/2006/relationships">
+  <p:cSld>
+    <p:spTree>
+      <p:nvGrpSpPr>
+        <p:cNvPr id="1" name=""/>
+        <p:cNvGrpSpPr/>
+        <p:nvPr/>
+      </p:nvGrpSpPr>
+      <p:grpSpPr>
+        <a:xfrm>
+          <a:off x="0" y="0"/>
+          <a:ext cx="0" cy="0"/>
+          <a:chOff x="0" y="0"/>
+          <a:chExt cx="0" cy="0"/>
+        </a:xfrm>
+      </p:grpSpPr>
+      <p:sp>
+        <p:nvSpPr>
+          <p:cNvPr id="2" name="Slide Image Placeholder 1"/>
+          <p:cNvSpPr>
+            <a:spLocks noGrp="1"/>
+          </p:cNvSpPr>
+          <p:nvPr>
+            <p:ph type="sldImg" idx="2"/>
+          </p:nvPr>
+        </p:nvSpPr>
+        <p:spPr/>
+      </p:sp>
+      <p:sp>
+        <p:nvSpPr>
+          <p:cNvPr id="3" name="Notes Placeholder 2"/>
+          <p:cNvSpPr>
+            <a:spLocks noGrp="1"/>
+          </p:cNvSpPr>
+          <p:nvPr>
+            <p:ph type="body" idx="3" sz="quarter"/>
+          </p:nvPr>
+        </p:nvSpPr>
+        <p:spPr/>
+        <p:txBody>
+          <a:bodyPr/>
+          <a:lstStyle/>
+          <a:p>
+            <a:r>
+              <a:t>From MODULE2 Learning Outcomes.</a:t>
+            </a:r>
+          </a:p>
+        </p:txBody>
+      </p:sp>
+      <p:sp>
+        <p:nvSpPr>
+          <p:cNvPr id="4" name="Slide Number Placeholder 3"/>
+          <p:cNvSpPr>
+            <a:spLocks noGrp="1"/>
+          </p:cNvSpPr>
+          <p:nvPr>
+            <p:ph type="sldNum" idx="5" sz="quarter"/>
+          </p:nvPr>
+        </p:nvSpPr>
+        <p:spPr/>
+      </p:sp>
+    </p:spTree>
+  </p:cSld>
+  <p:clrMapOvr>
+    <a:masterClrMapping/>
+  </p:clrMapOvr>
+</p:notes>
+</file>
+
 <file path=ppt/notesSlides/notesSlide3.xml><?xml version="1.0" encoding="utf-8"?>
 <p:notes xmlns:a="http://schemas.openxmlformats.org/drawingml/2006/main" xmlns:p="http://schemas.openxmlformats.org/presentationml/2006/main" xmlns:r="http://schemas.openxmlformats.org/officeDocument/2006/relationships">
   <p:cSld>
@@ -1377,7 +2020,7 @@
           <a:lstStyle/>
           <a:p>
             <a:r>
-              <a:t>From MODULE2 Verification &amp; Testing Methods.</a:t>
+              <a:t>From MODULE2 Design Architecture.</a:t>
             </a:r>
           </a:p>
         </p:txBody>
@@ -1447,7 +2090,7 @@
           <a:lstStyle/>
           <a:p>
             <a:r>
-              <a:t>From MODULE2 Verification &amp; Testing Methods.</a:t>
+              <a:t>From MODULE2 — execution and artifact layout.</a:t>
             </a:r>
           </a:p>
         </p:txBody>
@@ -1517,7 +2160,7 @@
           <a:lstStyle/>
           <a:p>
             <a:r>
-              <a:t>From MODULE2 Verification &amp; Testing Methods.</a:t>
+              <a:t>Match each path to files under module/examples/.</a:t>
             </a:r>
           </a:p>
         </p:txBody>
@@ -1587,7 +2230,7 @@
           <a:lstStyle/>
           <a:p>
             <a:r>
-              <a:t>From MODULE2 Topics Covered.</a:t>
+              <a:t>Match each path to files under module/examples/.</a:t>
             </a:r>
           </a:p>
         </p:txBody>
@@ -1657,7 +2300,7 @@
           <a:lstStyle/>
           <a:p>
             <a:r>
-              <a:t>From MODULE2 Topics Covered.</a:t>
+              <a:t>Trace while running module2/EXAMPLES.md labs.</a:t>
             </a:r>
           </a:p>
         </p:txBody>
@@ -4815,14 +5458,208 @@
               </a:defRPr>
             </a:pPr>
             <a:r>
-              <a:t>Verification environment architecture</a:t>
+              <a:t>2. UVM component hierarchy (1/2)</a:t>
+            </a:r>
+          </a:p>
+        </p:txBody>
+      </p:sp>
+      <p:sp>
+        <p:nvSpPr>
+          <p:cNvPr id="3" name="TextBox 2"/>
+          <p:cNvSpPr txBox="1"/>
+          <p:nvPr/>
+        </p:nvSpPr>
+        <p:spPr>
+          <a:xfrm>
+            <a:off x="548640" y="1234440"/>
+            <a:ext cx="5303520" cy="4754880"/>
+          </a:xfrm>
+          <a:prstGeom prst="rect">
+            <a:avLst/>
+          </a:prstGeom>
+          <a:noFill/>
+        </p:spPr>
+        <p:txBody>
+          <a:bodyPr wrap="square">
+            <a:noAutofit/>
+          </a:bodyPr>
+          <a:lstStyle/>
+          <a:p>
+            <a:pPr>
+              <a:lnSpc>
+                <a:spcPts val="2200"/>
+              </a:lnSpc>
+              <a:spcAft>
+                <a:spcPts val="1000"/>
+              </a:spcAft>
+              <a:defRPr sz="2000" b="0">
+                <a:solidFill>
+                  <a:srgbClr val="333333"/>
+                </a:solidFill>
+                <a:latin typeface="Calibri"/>
+              </a:defRPr>
+            </a:pPr>
+            <a:r>
+              <a:t>• RegTransaction → one write</a:t>
+            </a:r>
+          </a:p>
+          <a:p>
+            <a:pPr>
+              <a:lnSpc>
+                <a:spcPts val="2200"/>
+              </a:lnSpc>
+              <a:spcAft>
+                <a:spcPts val="1000"/>
+              </a:spcAft>
+              <a:defRPr sz="2000" b="0">
+                <a:solidFill>
+                  <a:srgbClr val="333333"/>
+                </a:solidFill>
+                <a:latin typeface="Calibri"/>
+              </a:defRPr>
+            </a:pPr>
+            <a:r>
+              <a:t>      operation (data + enable +</a:t>
+            </a:r>
+          </a:p>
+          <a:p>
+            <a:pPr>
+              <a:lnSpc>
+                <a:spcPts val="2200"/>
+              </a:lnSpc>
+              <a:spcAft>
+                <a:spcPts val="1000"/>
+              </a:spcAft>
+              <a:defRPr sz="2000" b="0">
+                <a:solidFill>
+                  <a:srgbClr val="333333"/>
+                </a:solidFill>
+                <a:latin typeface="Calibri"/>
+              </a:defRPr>
+            </a:pPr>
+            <a:r>
+              <a:t>      observed q).</a:t>
+            </a:r>
+          </a:p>
+          <a:p>
+            <a:pPr>
+              <a:lnSpc>
+                <a:spcPts val="2200"/>
+              </a:lnSpc>
+              <a:spcAft>
+                <a:spcPts val="1000"/>
+              </a:spcAft>
+              <a:defRPr sz="2000" b="0">
+                <a:solidFill>
+                  <a:srgbClr val="333333"/>
+                </a:solidFill>
+                <a:latin typeface="Calibri"/>
+              </a:defRPr>
+            </a:pPr>
+            <a:r>
+              <a:t>• RegSequence → stream of directed</a:t>
+            </a:r>
+          </a:p>
+          <a:p>
+            <a:pPr>
+              <a:lnSpc>
+                <a:spcPts val="2200"/>
+              </a:lnSpc>
+              <a:spcAft>
+                <a:spcPts val="1000"/>
+              </a:spcAft>
+              <a:defRPr sz="2000" b="0">
+                <a:solidFill>
+                  <a:srgbClr val="333333"/>
+                </a:solidFill>
+                <a:latin typeface="Calibri"/>
+              </a:defRPr>
+            </a:pPr>
+            <a:r>
+              <a:t>      transactions.</a:t>
+            </a:r>
+          </a:p>
+          <a:p>
+            <a:pPr>
+              <a:lnSpc>
+                <a:spcPts val="2200"/>
+              </a:lnSpc>
+              <a:spcAft>
+                <a:spcPts val="1000"/>
+              </a:spcAft>
+              <a:defRPr sz="2000" b="0">
+                <a:solidFill>
+                  <a:srgbClr val="333333"/>
+                </a:solidFill>
+                <a:latin typeface="Calibri"/>
+              </a:defRPr>
+            </a:pPr>
+            <a:r>
+              <a:t>• RegDriver / RegMonitor → drive</a:t>
+            </a:r>
+          </a:p>
+          <a:p>
+            <a:pPr>
+              <a:lnSpc>
+                <a:spcPts val="2200"/>
+              </a:lnSpc>
+              <a:spcAft>
+                <a:spcPts val="1000"/>
+              </a:spcAft>
+              <a:defRPr sz="2000" b="0">
+                <a:solidFill>
+                  <a:srgbClr val="333333"/>
+                </a:solidFill>
+                <a:latin typeface="Calibri"/>
+              </a:defRPr>
+            </a:pPr>
+            <a:r>
+              <a:t>      pins / sample pins each cycle.</a:t>
+            </a:r>
+          </a:p>
+          <a:p>
+            <a:pPr>
+              <a:lnSpc>
+                <a:spcPts val="2200"/>
+              </a:lnSpc>
+              <a:spcAft>
+                <a:spcPts val="1000"/>
+              </a:spcAft>
+              <a:defRPr sz="2000" b="0">
+                <a:solidFill>
+                  <a:srgbClr val="333333"/>
+                </a:solidFill>
+                <a:latin typeface="Calibri"/>
+              </a:defRPr>
+            </a:pPr>
+            <a:r>
+              <a:t>• RegScoreboard → expected queue</a:t>
+            </a:r>
+          </a:p>
+          <a:p>
+            <a:pPr>
+              <a:lnSpc>
+                <a:spcPts val="2200"/>
+              </a:lnSpc>
+              <a:spcAft>
+                <a:spcPts val="1000"/>
+              </a:spcAft>
+              <a:defRPr sz="2000" b="0">
+                <a:solidFill>
+                  <a:srgbClr val="333333"/>
+                </a:solidFill>
+                <a:latin typeface="Calibri"/>
+              </a:defRPr>
+            </a:pPr>
+            <a:r>
+              <a:t>      vs observed.</a:t>
             </a:r>
           </a:p>
         </p:txBody>
       </p:sp>
       <p:pic>
         <p:nvPicPr>
-          <p:cNvPr id="3" name="Picture 2" descr="verification_architecture.png"/>
+          <p:cNvPr id="4" name="Picture 3" descr="verification_architecture.png"/>
           <p:cNvPicPr>
             <a:picLocks noChangeAspect="1"/>
           </p:cNvPicPr>
@@ -4836,53 +5673,14 @@
         </p:blipFill>
         <p:spPr>
           <a:xfrm>
-            <a:off x="548640" y="1143000"/>
-            <a:ext cx="8128000" cy="4572000"/>
+            <a:off x="6172200" y="2094547"/>
+            <a:ext cx="5394960" cy="3034665"/>
           </a:xfrm>
           <a:prstGeom prst="rect">
             <a:avLst/>
           </a:prstGeom>
         </p:spPr>
       </p:pic>
-      <p:sp>
-        <p:nvSpPr>
-          <p:cNvPr id="4" name="TextBox 3"/>
-          <p:cNvSpPr txBox="1"/>
-          <p:nvPr/>
-        </p:nvSpPr>
-        <p:spPr>
-          <a:xfrm>
-            <a:off x="548640" y="5897880"/>
-            <a:ext cx="11064240" cy="411480"/>
-          </a:xfrm>
-          <a:prstGeom prst="rect">
-            <a:avLst/>
-          </a:prstGeom>
-          <a:noFill/>
-        </p:spPr>
-        <p:txBody>
-          <a:bodyPr wrap="square">
-            <a:noAutofit/>
-          </a:bodyPr>
-          <a:lstStyle/>
-          <a:p>
-            <a:pPr>
-              <a:lnSpc>
-                <a:spcPts val="2200"/>
-              </a:lnSpc>
-              <a:defRPr sz="1200" b="0">
-                <a:solidFill>
-                  <a:srgbClr val="333333"/>
-                </a:solidFill>
-                <a:latin typeface="Calibri"/>
-              </a:defRPr>
-            </a:pPr>
-            <a:r>
-              <a:t>Module 2: UVM layers, agents, and checkers for this phase.</a:t>
-            </a:r>
-          </a:p>
-        </p:txBody>
-      </p:sp>
       <p:sp>
         <p:nvSpPr>
           <p:cNvPr id="5" name="TextBox 4"/>
@@ -4974,7 +5772,7 @@
               </a:defRPr>
             </a:pPr>
             <a:r>
-              <a:t>1. DUT and interface</a:t>
+              <a:t>2. UVM component hierarchy (2/2)</a:t>
             </a:r>
           </a:p>
         </p:txBody>
@@ -5016,64 +5814,26 @@
               </a:defRPr>
             </a:pPr>
             <a:r>
-              <a:t>• simple_register.v: `enable`, `d`, `q` — minimal</a:t>
-            </a:r>
-          </a:p>
-          <a:p>
-            <a:pPr>
-              <a:lnSpc>
-                <a:spcPts val="2200"/>
-              </a:lnSpc>
-              <a:spcAft>
-                <a:spcPts val="1000"/>
-              </a:spcAft>
-              <a:defRPr sz="2000" b="0">
-                <a:solidFill>
-                  <a:srgbClr val="333333"/>
-                </a:solidFill>
-                <a:latin typeface="Calibri"/>
-              </a:defRPr>
-            </a:pPr>
-            <a:r>
-              <a:t>      storage for learning UVM data flow.</a:t>
-            </a:r>
-          </a:p>
-          <a:p>
-            <a:pPr>
-              <a:lnSpc>
-                <a:spcPts val="2200"/>
-              </a:lnSpc>
-              <a:spcAft>
-                <a:spcPts val="1000"/>
-              </a:spcAft>
-              <a:defRPr sz="2000" b="0">
-                <a:solidFill>
-                  <a:srgbClr val="333333"/>
-                </a:solidFill>
-                <a:latin typeface="Calibri"/>
-              </a:defRPr>
-            </a:pPr>
-            <a:r>
-              <a:t>• reg_if: virtual interface bundling `clk`, `rst_n`,</a:t>
-            </a:r>
-          </a:p>
-          <a:p>
-            <a:pPr>
-              <a:lnSpc>
-                <a:spcPts val="2200"/>
-              </a:lnSpc>
-              <a:spcAft>
-                <a:spcPts val="1000"/>
-              </a:spcAft>
-              <a:defRPr sz="2000" b="0">
-                <a:solidFill>
-                  <a:srgbClr val="333333"/>
-                </a:solidFill>
-                <a:latin typeface="Calibri"/>
-              </a:defRPr>
-            </a:pPr>
-            <a:r>
-              <a:t>      `enable`, `d`, `q` for the agent.</a:t>
+              <a:t>• RegAgent, RegEnv, RegTest — standard UVM layering</a:t>
+            </a:r>
+          </a:p>
+          <a:p>
+            <a:pPr>
+              <a:lnSpc>
+                <a:spcPts val="2200"/>
+              </a:lnSpc>
+              <a:spcAft>
+                <a:spcPts val="1000"/>
+              </a:spcAft>
+              <a:defRPr sz="2000" b="0">
+                <a:solidFill>
+                  <a:srgbClr val="333333"/>
+                </a:solidFill>
+                <a:latin typeface="Calibri"/>
+              </a:defRPr>
+            </a:pPr>
+            <a:r>
+              <a:t>      used again in Modules 4, 6, 8.</a:t>
             </a:r>
           </a:p>
         </p:txBody>
@@ -5169,7 +5929,7 @@
               </a:defRPr>
             </a:pPr>
             <a:r>
-              <a:t>2. UVM component hierarchy</a:t>
+              <a:t>3. Build and simulation flow</a:t>
             </a:r>
           </a:p>
         </p:txBody>
@@ -5183,7 +5943,7 @@
         <p:spPr>
           <a:xfrm>
             <a:off x="548640" y="1234440"/>
-            <a:ext cx="11064240" cy="4937760"/>
+            <a:ext cx="5303520" cy="4754880"/>
           </a:xfrm>
           <a:prstGeom prst="rect">
             <a:avLst/>
@@ -5211,147 +5971,133 @@
               </a:defRPr>
             </a:pPr>
             <a:r>
-              <a:t>• RegTransaction → one write operation (data + enable</a:t>
-            </a:r>
-          </a:p>
-          <a:p>
-            <a:pPr>
-              <a:lnSpc>
-                <a:spcPts val="2200"/>
-              </a:lnSpc>
-              <a:spcAft>
-                <a:spcPts val="1000"/>
-              </a:spcAft>
-              <a:defRPr sz="2000" b="0">
-                <a:solidFill>
-                  <a:srgbClr val="333333"/>
-                </a:solidFill>
-                <a:latin typeface="Calibri"/>
-              </a:defRPr>
-            </a:pPr>
-            <a:r>
-              <a:t>      + observed q).</a:t>
-            </a:r>
-          </a:p>
-          <a:p>
-            <a:pPr>
-              <a:lnSpc>
-                <a:spcPts val="2200"/>
-              </a:lnSpc>
-              <a:spcAft>
-                <a:spcPts val="1000"/>
-              </a:spcAft>
-              <a:defRPr sz="2000" b="0">
-                <a:solidFill>
-                  <a:srgbClr val="333333"/>
-                </a:solidFill>
-                <a:latin typeface="Calibri"/>
-              </a:defRPr>
-            </a:pPr>
-            <a:r>
-              <a:t>• RegSequence → stream of directed transactions.</a:t>
-            </a:r>
-          </a:p>
-          <a:p>
-            <a:pPr>
-              <a:lnSpc>
-                <a:spcPts val="2200"/>
-              </a:lnSpc>
-              <a:spcAft>
-                <a:spcPts val="1000"/>
-              </a:spcAft>
-              <a:defRPr sz="2000" b="0">
-                <a:solidFill>
-                  <a:srgbClr val="333333"/>
-                </a:solidFill>
-                <a:latin typeface="Calibri"/>
-              </a:defRPr>
-            </a:pPr>
-            <a:r>
-              <a:t>• RegDriver / RegMonitor → drive pins / sample pins</a:t>
-            </a:r>
-          </a:p>
-          <a:p>
-            <a:pPr>
-              <a:lnSpc>
-                <a:spcPts val="2200"/>
-              </a:lnSpc>
-              <a:spcAft>
-                <a:spcPts val="1000"/>
-              </a:spcAft>
-              <a:defRPr sz="2000" b="0">
-                <a:solidFill>
-                  <a:srgbClr val="333333"/>
-                </a:solidFill>
-                <a:latin typeface="Calibri"/>
-              </a:defRPr>
-            </a:pPr>
-            <a:r>
-              <a:t>      each cycle.</a:t>
-            </a:r>
-          </a:p>
-          <a:p>
-            <a:pPr>
-              <a:lnSpc>
-                <a:spcPts val="2200"/>
-              </a:lnSpc>
-              <a:spcAft>
-                <a:spcPts val="1000"/>
-              </a:spcAft>
-              <a:defRPr sz="2000" b="0">
-                <a:solidFill>
-                  <a:srgbClr val="333333"/>
-                </a:solidFill>
-                <a:latin typeface="Calibri"/>
-              </a:defRPr>
-            </a:pPr>
-            <a:r>
-              <a:t>• RegScoreboard → expected queue vs observed.</a:t>
-            </a:r>
-          </a:p>
-          <a:p>
-            <a:pPr>
-              <a:lnSpc>
-                <a:spcPts val="2200"/>
-              </a:lnSpc>
-              <a:spcAft>
-                <a:spcPts val="1000"/>
-              </a:spcAft>
-              <a:defRPr sz="2000" b="0">
-                <a:solidFill>
-                  <a:srgbClr val="333333"/>
-                </a:solidFill>
-                <a:latin typeface="Calibri"/>
-              </a:defRPr>
-            </a:pPr>
-            <a:r>
-              <a:t>• RegAgent, RegEnv, RegTest — standard UVM layering</a:t>
-            </a:r>
-          </a:p>
-          <a:p>
-            <a:pPr>
-              <a:lnSpc>
-                <a:spcPts val="2200"/>
-              </a:lnSpc>
-              <a:spcAft>
-                <a:spcPts val="1000"/>
-              </a:spcAft>
-              <a:defRPr sz="2000" b="0">
-                <a:solidFill>
-                  <a:srgbClr val="333333"/>
-                </a:solidFill>
-                <a:latin typeface="Calibri"/>
-              </a:defRPr>
-            </a:pPr>
-            <a:r>
-              <a:t>      used again in Modules 4, 6, 8.</a:t>
-            </a:r>
-          </a:p>
-        </p:txBody>
-      </p:sp>
-      <p:sp>
-        <p:nvSpPr>
-          <p:cNvPr id="4" name="TextBox 3"/>
+              <a:t>• Verilator compiles SV + UVM +</a:t>
+            </a:r>
+          </a:p>
+          <a:p>
+            <a:pPr>
+              <a:lnSpc>
+                <a:spcPts val="2200"/>
+              </a:lnSpc>
+              <a:spcAft>
+                <a:spcPts val="1000"/>
+              </a:spcAft>
+              <a:defRPr sz="2000" b="0">
+                <a:solidFill>
+                  <a:srgbClr val="333333"/>
+                </a:solidFill>
+                <a:latin typeface="Calibri"/>
+              </a:defRPr>
+            </a:pPr>
+            <a:r>
+              <a:t>      C++; `+UVM_TESTNAME` selects the</a:t>
+            </a:r>
+          </a:p>
+          <a:p>
+            <a:pPr>
+              <a:lnSpc>
+                <a:spcPts val="2200"/>
+              </a:lnSpc>
+              <a:spcAft>
+                <a:spcPts val="1000"/>
+              </a:spcAft>
+              <a:defRPr sz="2000" b="0">
+                <a:solidFill>
+                  <a:srgbClr val="333333"/>
+                </a:solidFill>
+                <a:latin typeface="Calibri"/>
+              </a:defRPr>
+            </a:pPr>
+            <a:r>
+              <a:t>      test.</a:t>
+            </a:r>
+          </a:p>
+          <a:p>
+            <a:pPr>
+              <a:lnSpc>
+                <a:spcPts val="2200"/>
+              </a:lnSpc>
+              <a:spcAft>
+                <a:spcPts val="1000"/>
+              </a:spcAft>
+              <a:defRPr sz="2000" b="0">
+                <a:solidFill>
+                  <a:srgbClr val="333333"/>
+                </a:solidFill>
+                <a:latin typeface="Calibri"/>
+              </a:defRPr>
+            </a:pPr>
+            <a:r>
+              <a:t>• Phases: build → connect → run</a:t>
+            </a:r>
+          </a:p>
+          <a:p>
+            <a:pPr>
+              <a:lnSpc>
+                <a:spcPts val="2200"/>
+              </a:lnSpc>
+              <a:spcAft>
+                <a:spcPts val="1000"/>
+              </a:spcAft>
+              <a:defRPr sz="2000" b="0">
+                <a:solidFill>
+                  <a:srgbClr val="333333"/>
+                </a:solidFill>
+                <a:latin typeface="Calibri"/>
+              </a:defRPr>
+            </a:pPr>
+            <a:r>
+              <a:t>      (objections hold simulation</a:t>
+            </a:r>
+          </a:p>
+          <a:p>
+            <a:pPr>
+              <a:lnSpc>
+                <a:spcPts val="2200"/>
+              </a:lnSpc>
+              <a:spcAft>
+                <a:spcPts val="1000"/>
+              </a:spcAft>
+              <a:defRPr sz="2000" b="0">
+                <a:solidFill>
+                  <a:srgbClr val="333333"/>
+                </a:solidFill>
+                <a:latin typeface="Calibri"/>
+              </a:defRPr>
+            </a:pPr>
+            <a:r>
+              <a:t>      until sequence completes).</a:t>
+            </a:r>
+          </a:p>
+        </p:txBody>
+      </p:sp>
+      <p:pic>
+        <p:nvPicPr>
+          <p:cNvPr id="4" name="Picture 3" descr="testing_methods.png"/>
+          <p:cNvPicPr>
+            <a:picLocks noChangeAspect="1"/>
+          </p:cNvPicPr>
+          <p:nvPr/>
+        </p:nvPicPr>
+        <p:blipFill>
+          <a:blip r:embed="rId2"/>
+          <a:stretch>
+            <a:fillRect/>
+          </a:stretch>
+        </p:blipFill>
+        <p:spPr>
+          <a:xfrm>
+            <a:off x="6172200" y="2094547"/>
+            <a:ext cx="5394960" cy="3034665"/>
+          </a:xfrm>
+          <a:prstGeom prst="rect">
+            <a:avLst/>
+          </a:prstGeom>
+        </p:spPr>
+      </p:pic>
+      <p:sp>
+        <p:nvSpPr>
+          <p:cNvPr id="5" name="TextBox 4"/>
           <p:cNvSpPr txBox="1"/>
           <p:nvPr/>
         </p:nvSpPr>
@@ -5440,21 +6186,45 @@
               </a:defRPr>
             </a:pPr>
             <a:r>
-              <a:t>3. Build and simulation flow</a:t>
-            </a:r>
-          </a:p>
-        </p:txBody>
-      </p:sp>
-      <p:sp>
-        <p:nvSpPr>
-          <p:cNvPr id="3" name="TextBox 2"/>
+              <a:t>RTL block diagram (reference)</a:t>
+            </a:r>
+          </a:p>
+        </p:txBody>
+      </p:sp>
+      <p:pic>
+        <p:nvPicPr>
+          <p:cNvPr id="3" name="Picture 2" descr="rtl_architecture.png"/>
+          <p:cNvPicPr>
+            <a:picLocks noChangeAspect="1"/>
+          </p:cNvPicPr>
+          <p:nvPr/>
+        </p:nvPicPr>
+        <p:blipFill>
+          <a:blip r:embed="rId2"/>
+          <a:stretch>
+            <a:fillRect/>
+          </a:stretch>
+        </p:blipFill>
+        <p:spPr>
+          <a:xfrm>
+            <a:off x="548640" y="1143000"/>
+            <a:ext cx="8128000" cy="4572000"/>
+          </a:xfrm>
+          <a:prstGeom prst="rect">
+            <a:avLst/>
+          </a:prstGeom>
+        </p:spPr>
+      </p:pic>
+      <p:sp>
+        <p:nvSpPr>
+          <p:cNvPr id="4" name="TextBox 3"/>
           <p:cNvSpPr txBox="1"/>
           <p:nvPr/>
         </p:nvSpPr>
         <p:spPr>
           <a:xfrm>
-            <a:off x="548640" y="1234440"/>
-            <a:ext cx="11064240" cy="4937760"/>
+            <a:off x="548640" y="5897880"/>
+            <a:ext cx="11064240" cy="411480"/>
           </a:xfrm>
           <a:prstGeom prst="rect">
             <a:avLst/>
@@ -5471,82 +6241,22 @@
               <a:lnSpc>
                 <a:spcPts val="2200"/>
               </a:lnSpc>
-              <a:spcAft>
-                <a:spcPts val="1000"/>
-              </a:spcAft>
-              <a:defRPr sz="2000" b="0">
-                <a:solidFill>
-                  <a:srgbClr val="333333"/>
-                </a:solidFill>
-                <a:latin typeface="Calibri"/>
-              </a:defRPr>
-            </a:pPr>
-            <a:r>
-              <a:t>• Verilator compiles SV + UVM + C++; `+UVM_TESTNAME`</a:t>
-            </a:r>
-          </a:p>
-          <a:p>
-            <a:pPr>
-              <a:lnSpc>
-                <a:spcPts val="2200"/>
-              </a:lnSpc>
-              <a:spcAft>
-                <a:spcPts val="1000"/>
-              </a:spcAft>
-              <a:defRPr sz="2000" b="0">
-                <a:solidFill>
-                  <a:srgbClr val="333333"/>
-                </a:solidFill>
-                <a:latin typeface="Calibri"/>
-              </a:defRPr>
-            </a:pPr>
-            <a:r>
-              <a:t>      selects the test.</a:t>
-            </a:r>
-          </a:p>
-          <a:p>
-            <a:pPr>
-              <a:lnSpc>
-                <a:spcPts val="2200"/>
-              </a:lnSpc>
-              <a:spcAft>
-                <a:spcPts val="1000"/>
-              </a:spcAft>
-              <a:defRPr sz="2000" b="0">
-                <a:solidFill>
-                  <a:srgbClr val="333333"/>
-                </a:solidFill>
-                <a:latin typeface="Calibri"/>
-              </a:defRPr>
-            </a:pPr>
-            <a:r>
-              <a:t>• Phases: build → connect → run (objections hold</a:t>
-            </a:r>
-          </a:p>
-          <a:p>
-            <a:pPr>
-              <a:lnSpc>
-                <a:spcPts val="2200"/>
-              </a:lnSpc>
-              <a:spcAft>
-                <a:spcPts val="1000"/>
-              </a:spcAft>
-              <a:defRPr sz="2000" b="0">
-                <a:solidFill>
-                  <a:srgbClr val="333333"/>
-                </a:solidFill>
-                <a:latin typeface="Calibri"/>
-              </a:defRPr>
-            </a:pPr>
-            <a:r>
-              <a:t>      simulation until sequence completes).</a:t>
-            </a:r>
-          </a:p>
-        </p:txBody>
-      </p:sp>
-      <p:sp>
-        <p:nvSpPr>
-          <p:cNvPr id="4" name="TextBox 3"/>
+              <a:defRPr sz="1200" b="0">
+                <a:solidFill>
+                  <a:srgbClr val="333333"/>
+                </a:solidFill>
+                <a:latin typeface="Calibri"/>
+              </a:defRPr>
+            </a:pPr>
+            <a:r>
+              <a:t>Module 2: DUT hierarchy and signal flow.</a:t>
+            </a:r>
+          </a:p>
+        </p:txBody>
+      </p:sp>
+      <p:sp>
+        <p:nvSpPr>
+          <p:cNvPr id="5" name="TextBox 4"/>
           <p:cNvSpPr txBox="1"/>
           <p:nvPr/>
         </p:nvSpPr>
@@ -5609,8 +6319,8 @@
         </p:nvSpPr>
         <p:spPr>
           <a:xfrm>
-            <a:off x="548640" y="2743200"/>
-            <a:ext cx="11064240" cy="1371600"/>
+            <a:off x="548640" y="411480"/>
+            <a:ext cx="11064240" cy="777240"/>
           </a:xfrm>
           <a:prstGeom prst="rect">
             <a:avLst/>
@@ -5623,11 +6333,11 @@
           </a:bodyPr>
           <a:lstStyle/>
           <a:p>
-            <a:pPr algn="ctr">
-              <a:lnSpc>
-                <a:spcPts val="2200"/>
-              </a:lnSpc>
-              <a:defRPr sz="3600" b="1">
+            <a:pPr>
+              <a:lnSpc>
+                <a:spcPts val="2200"/>
+              </a:lnSpc>
+              <a:defRPr sz="2800" b="1">
                 <a:solidFill>
                   <a:srgbClr val="1A1A2E"/>
                 </a:solidFill>
@@ -5635,14 +6345,77 @@
               </a:defRPr>
             </a:pPr>
             <a:r>
-              <a:t>Verification &amp; testing methods</a:t>
-            </a:r>
-          </a:p>
-        </p:txBody>
-      </p:sp>
-      <p:sp>
-        <p:nvSpPr>
-          <p:cNvPr id="3" name="TextBox 2"/>
+              <a:t>Verification / testbench diagram (reference)</a:t>
+            </a:r>
+          </a:p>
+        </p:txBody>
+      </p:sp>
+      <p:pic>
+        <p:nvPicPr>
+          <p:cNvPr id="3" name="Picture 2" descr="verification_architecture.png"/>
+          <p:cNvPicPr>
+            <a:picLocks noChangeAspect="1"/>
+          </p:cNvPicPr>
+          <p:nvPr/>
+        </p:nvPicPr>
+        <p:blipFill>
+          <a:blip r:embed="rId2"/>
+          <a:stretch>
+            <a:fillRect/>
+          </a:stretch>
+        </p:blipFill>
+        <p:spPr>
+          <a:xfrm>
+            <a:off x="548640" y="1143000"/>
+            <a:ext cx="8128000" cy="4572000"/>
+          </a:xfrm>
+          <a:prstGeom prst="rect">
+            <a:avLst/>
+          </a:prstGeom>
+        </p:spPr>
+      </p:pic>
+      <p:sp>
+        <p:nvSpPr>
+          <p:cNvPr id="4" name="TextBox 3"/>
+          <p:cNvSpPr txBox="1"/>
+          <p:nvPr/>
+        </p:nvSpPr>
+        <p:spPr>
+          <a:xfrm>
+            <a:off x="548640" y="5897880"/>
+            <a:ext cx="11064240" cy="411480"/>
+          </a:xfrm>
+          <a:prstGeom prst="rect">
+            <a:avLst/>
+          </a:prstGeom>
+          <a:noFill/>
+        </p:spPr>
+        <p:txBody>
+          <a:bodyPr wrap="square">
+            <a:noAutofit/>
+          </a:bodyPr>
+          <a:lstStyle/>
+          <a:p>
+            <a:pPr>
+              <a:lnSpc>
+                <a:spcPts val="2200"/>
+              </a:lnSpc>
+              <a:defRPr sz="1200" b="0">
+                <a:solidFill>
+                  <a:srgbClr val="333333"/>
+                </a:solidFill>
+                <a:latin typeface="Calibri"/>
+              </a:defRPr>
+            </a:pPr>
+            <a:r>
+              <a:t>Module 2: stimulus, observation, and checking.</a:t>
+            </a:r>
+          </a:p>
+        </p:txBody>
+      </p:sp>
+      <p:sp>
+        <p:nvSpPr>
+          <p:cNvPr id="5" name="TextBox 4"/>
           <p:cNvSpPr txBox="1"/>
           <p:nvPr/>
         </p:nvSpPr>
@@ -5731,50 +6504,28 @@
               </a:defRPr>
             </a:pPr>
             <a:r>
-              <a:t>Testing and closure flow</a:t>
-            </a:r>
-          </a:p>
-        </p:txBody>
-      </p:sp>
-      <p:pic>
-        <p:nvPicPr>
-          <p:cNvPr id="3" name="Picture 2" descr="testing_methods.png"/>
-          <p:cNvPicPr>
-            <a:picLocks noChangeAspect="1"/>
-          </p:cNvPicPr>
+              <a:t>RegTransaction — UVM item</a:t>
+            </a:r>
+          </a:p>
+        </p:txBody>
+      </p:sp>
+      <p:sp>
+        <p:nvSpPr>
+          <p:cNvPr id="3" name="TextBox 2"/>
+          <p:cNvSpPr txBox="1"/>
           <p:nvPr/>
-        </p:nvPicPr>
-        <p:blipFill>
-          <a:blip r:embed="rId2"/>
-          <a:stretch>
-            <a:fillRect/>
-          </a:stretch>
-        </p:blipFill>
+        </p:nvSpPr>
         <p:spPr>
           <a:xfrm>
             <a:off x="548640" y="1143000"/>
-            <a:ext cx="8128000" cy="4572000"/>
+            <a:ext cx="11064240" cy="5029200"/>
           </a:xfrm>
           <a:prstGeom prst="rect">
             <a:avLst/>
           </a:prstGeom>
-        </p:spPr>
-      </p:pic>
-      <p:sp>
-        <p:nvSpPr>
-          <p:cNvPr id="4" name="TextBox 3"/>
-          <p:cNvSpPr txBox="1"/>
-          <p:nvPr/>
-        </p:nvSpPr>
-        <p:spPr>
-          <a:xfrm>
-            <a:off x="548640" y="5897880"/>
-            <a:ext cx="11064240" cy="411480"/>
-          </a:xfrm>
-          <a:prstGeom prst="rect">
-            <a:avLst/>
-          </a:prstGeom>
-          <a:noFill/>
+          <a:solidFill>
+            <a:srgbClr val="F4F4F4"/>
+          </a:solidFill>
         </p:spPr>
         <p:txBody>
           <a:bodyPr wrap="square">
@@ -5786,22 +6537,339 @@
               <a:lnSpc>
                 <a:spcPts val="2200"/>
               </a:lnSpc>
-              <a:defRPr sz="1200" b="0">
-                <a:solidFill>
-                  <a:srgbClr val="333333"/>
-                </a:solidFill>
-                <a:latin typeface="Calibri"/>
-              </a:defRPr>
-            </a:pPr>
-            <a:r>
-              <a:t>Module 2: how tests, checks, and metrics close verification goals.</a:t>
-            </a:r>
-          </a:p>
-        </p:txBody>
-      </p:sp>
-      <p:sp>
-        <p:nvSpPr>
-          <p:cNvPr id="5" name="TextBox 4"/>
+              <a:spcAft>
+                <a:spcPts val="400"/>
+              </a:spcAft>
+              <a:defRPr sz="2000" b="0">
+                <a:solidFill>
+                  <a:srgbClr val="333333"/>
+                </a:solidFill>
+                <a:latin typeface="Consolas"/>
+              </a:defRPr>
+            </a:pPr>
+            <a:r>
+              <a:t>/**</a:t>
+            </a:r>
+          </a:p>
+          <a:p>
+            <a:pPr>
+              <a:lnSpc>
+                <a:spcPts val="2200"/>
+              </a:lnSpc>
+              <a:spcAft>
+                <a:spcPts val="400"/>
+              </a:spcAft>
+              <a:defRPr sz="2000" b="0">
+                <a:solidFill>
+                  <a:srgbClr val="333333"/>
+                </a:solidFill>
+                <a:latin typeface="Consolas"/>
+              </a:defRPr>
+            </a:pPr>
+            <a:r>
+              <a:t> * Module 2: UVM smoke test (Verilator)</a:t>
+            </a:r>
+          </a:p>
+          <a:p>
+            <a:pPr>
+              <a:lnSpc>
+                <a:spcPts val="2200"/>
+              </a:lnSpc>
+              <a:spcAft>
+                <a:spcPts val="400"/>
+              </a:spcAft>
+              <a:defRPr sz="2000" b="0">
+                <a:solidFill>
+                  <a:srgbClr val="333333"/>
+                </a:solidFill>
+                <a:latin typeface="Consolas"/>
+              </a:defRPr>
+            </a:pPr>
+            <a:r>
+              <a:t> *</a:t>
+            </a:r>
+          </a:p>
+          <a:p>
+            <a:pPr>
+              <a:lnSpc>
+                <a:spcPts val="2200"/>
+              </a:lnSpc>
+              <a:spcAft>
+                <a:spcPts val="400"/>
+              </a:spcAft>
+              <a:defRPr sz="2000" b="0">
+                <a:solidFill>
+                  <a:srgbClr val="333333"/>
+                </a:solidFill>
+                <a:latin typeface="Consolas"/>
+              </a:defRPr>
+            </a:pPr>
+            <a:r>
+              <a:t> * Purpose:</a:t>
+            </a:r>
+          </a:p>
+          <a:p>
+            <a:pPr>
+              <a:lnSpc>
+                <a:spcPts val="2200"/>
+              </a:lnSpc>
+              <a:spcAft>
+                <a:spcPts val="400"/>
+              </a:spcAft>
+              <a:defRPr sz="2000" b="0">
+                <a:solidFill>
+                  <a:srgbClr val="333333"/>
+                </a:solidFill>
+                <a:latin typeface="Consolas"/>
+              </a:defRPr>
+            </a:pPr>
+            <a:r>
+              <a:t> * - Provide a *self-contained* UVM test that compiles and runs on</a:t>
+            </a:r>
+          </a:p>
+          <a:p>
+            <a:pPr>
+              <a:lnSpc>
+                <a:spcPts val="2200"/>
+              </a:lnSpc>
+              <a:spcAft>
+                <a:spcPts val="400"/>
+              </a:spcAft>
+              <a:defRPr sz="2000" b="0">
+                <a:solidFill>
+                  <a:srgbClr val="333333"/>
+                </a:solidFill>
+                <a:latin typeface="Consolas"/>
+              </a:defRPr>
+            </a:pPr>
+            <a:r>
+              <a:t>Verilator</a:t>
+            </a:r>
+          </a:p>
+          <a:p>
+            <a:pPr>
+              <a:lnSpc>
+                <a:spcPts val="2200"/>
+              </a:lnSpc>
+              <a:spcAft>
+                <a:spcPts val="400"/>
+              </a:spcAft>
+              <a:defRPr sz="2000" b="0">
+                <a:solidFill>
+                  <a:srgbClr val="333333"/>
+                </a:solidFill>
+                <a:latin typeface="Consolas"/>
+              </a:defRPr>
+            </a:pPr>
+            <a:r>
+              <a:t> * - Demonstrate the core UVM structure used later for UART/SPI/I²C:</a:t>
+            </a:r>
+          </a:p>
+          <a:p>
+            <a:pPr>
+              <a:lnSpc>
+                <a:spcPts val="2200"/>
+              </a:lnSpc>
+              <a:spcAft>
+                <a:spcPts val="400"/>
+              </a:spcAft>
+              <a:defRPr sz="2000" b="0">
+                <a:solidFill>
+                  <a:srgbClr val="333333"/>
+                </a:solidFill>
+                <a:latin typeface="Consolas"/>
+              </a:defRPr>
+            </a:pPr>
+            <a:r>
+              <a:t> *   transaction → sequence → driver/monitor → scoreboard</a:t>
+            </a:r>
+          </a:p>
+          <a:p>
+            <a:pPr>
+              <a:lnSpc>
+                <a:spcPts val="2200"/>
+              </a:lnSpc>
+              <a:spcAft>
+                <a:spcPts val="400"/>
+              </a:spcAft>
+              <a:defRPr sz="2000" b="0">
+                <a:solidFill>
+                  <a:srgbClr val="333333"/>
+                </a:solidFill>
+                <a:latin typeface="Consolas"/>
+              </a:defRPr>
+            </a:pPr>
+            <a:r>
+              <a:t> */</a:t>
+            </a:r>
+          </a:p>
+          <a:p>
+            <a:pPr>
+              <a:lnSpc>
+                <a:spcPts val="2200"/>
+              </a:lnSpc>
+              <a:spcAft>
+                <a:spcPts val="400"/>
+              </a:spcAft>
+              <a:defRPr sz="2000" b="0">
+                <a:solidFill>
+                  <a:srgbClr val="333333"/>
+                </a:solidFill>
+                <a:latin typeface="Consolas"/>
+              </a:defRPr>
+            </a:pPr>
+          </a:p>
+          <a:p>
+            <a:pPr>
+              <a:lnSpc>
+                <a:spcPts val="2200"/>
+              </a:lnSpc>
+              <a:spcAft>
+                <a:spcPts val="400"/>
+              </a:spcAft>
+              <a:defRPr sz="2000" b="0">
+                <a:solidFill>
+                  <a:srgbClr val="333333"/>
+                </a:solidFill>
+                <a:latin typeface="Consolas"/>
+              </a:defRPr>
+            </a:pPr>
+            <a:r>
+              <a:t>`include "uvm_macros.svh"</a:t>
+            </a:r>
+          </a:p>
+          <a:p>
+            <a:pPr>
+              <a:lnSpc>
+                <a:spcPts val="2200"/>
+              </a:lnSpc>
+              <a:spcAft>
+                <a:spcPts val="400"/>
+              </a:spcAft>
+              <a:defRPr sz="2000" b="0">
+                <a:solidFill>
+                  <a:srgbClr val="333333"/>
+                </a:solidFill>
+                <a:latin typeface="Consolas"/>
+              </a:defRPr>
+            </a:pPr>
+            <a:r>
+              <a:t>import uvm_pkg::*;</a:t>
+            </a:r>
+          </a:p>
+          <a:p>
+            <a:pPr>
+              <a:lnSpc>
+                <a:spcPts val="2200"/>
+              </a:lnSpc>
+              <a:spcAft>
+                <a:spcPts val="400"/>
+              </a:spcAft>
+              <a:defRPr sz="2000" b="0">
+                <a:solidFill>
+                  <a:srgbClr val="333333"/>
+                </a:solidFill>
+                <a:latin typeface="Consolas"/>
+              </a:defRPr>
+            </a:pPr>
+          </a:p>
+          <a:p>
+            <a:pPr>
+              <a:lnSpc>
+                <a:spcPts val="2200"/>
+              </a:lnSpc>
+              <a:spcAft>
+                <a:spcPts val="400"/>
+              </a:spcAft>
+              <a:defRPr sz="2000" b="0">
+                <a:solidFill>
+                  <a:srgbClr val="333333"/>
+                </a:solidFill>
+                <a:latin typeface="Consolas"/>
+              </a:defRPr>
+            </a:pPr>
+            <a:r>
+              <a:t>`timescale 1ns/1ps</a:t>
+            </a:r>
+          </a:p>
+          <a:p>
+            <a:pPr>
+              <a:lnSpc>
+                <a:spcPts val="2200"/>
+              </a:lnSpc>
+              <a:spcAft>
+                <a:spcPts val="400"/>
+              </a:spcAft>
+              <a:defRPr sz="2000" b="0">
+                <a:solidFill>
+                  <a:srgbClr val="333333"/>
+                </a:solidFill>
+                <a:latin typeface="Consolas"/>
+              </a:defRPr>
+            </a:pPr>
+          </a:p>
+          <a:p>
+            <a:pPr>
+              <a:lnSpc>
+                <a:spcPts val="2200"/>
+              </a:lnSpc>
+              <a:spcAft>
+                <a:spcPts val="400"/>
+              </a:spcAft>
+              <a:defRPr sz="2000" b="0">
+                <a:solidFill>
+                  <a:srgbClr val="333333"/>
+                </a:solidFill>
+                <a:latin typeface="Consolas"/>
+              </a:defRPr>
+            </a:pPr>
+            <a:r>
+              <a:t>// ---------------------------------------------------------------------</a:t>
+            </a:r>
+          </a:p>
+          <a:p>
+            <a:pPr>
+              <a:lnSpc>
+                <a:spcPts val="2200"/>
+              </a:lnSpc>
+              <a:spcAft>
+                <a:spcPts val="400"/>
+              </a:spcAft>
+              <a:defRPr sz="2000" b="0">
+                <a:solidFill>
+                  <a:srgbClr val="333333"/>
+                </a:solidFill>
+                <a:latin typeface="Consolas"/>
+              </a:defRPr>
+            </a:pPr>
+            <a:r>
+              <a:t>--------</a:t>
+            </a:r>
+          </a:p>
+          <a:p>
+            <a:pPr>
+              <a:lnSpc>
+                <a:spcPts val="2200"/>
+              </a:lnSpc>
+              <a:spcAft>
+                <a:spcPts val="400"/>
+              </a:spcAft>
+              <a:defRPr sz="2000" b="0">
+                <a:solidFill>
+                  <a:srgbClr val="333333"/>
+                </a:solidFill>
+                <a:latin typeface="Consolas"/>
+              </a:defRPr>
+            </a:pPr>
+            <a:r>
+              <a:t>// Interface</a:t>
+            </a:r>
+          </a:p>
+        </p:txBody>
+      </p:sp>
+      <p:sp>
+        <p:nvSpPr>
+          <p:cNvPr id="4" name="TextBox 3"/>
           <p:cNvSpPr txBox="1"/>
           <p:nvPr/>
         </p:nvSpPr>
@@ -5864,8 +6932,8 @@
         </p:nvSpPr>
         <p:spPr>
           <a:xfrm>
-            <a:off x="548640" y="411480"/>
-            <a:ext cx="11064240" cy="777240"/>
+            <a:off x="548640" y="2743200"/>
+            <a:ext cx="11064240" cy="1371600"/>
           </a:xfrm>
           <a:prstGeom prst="rect">
             <a:avLst/>
@@ -5878,11 +6946,11 @@
           </a:bodyPr>
           <a:lstStyle/>
           <a:p>
-            <a:pPr>
-              <a:lnSpc>
-                <a:spcPts val="2200"/>
-              </a:lnSpc>
-              <a:defRPr sz="2800" b="1">
+            <a:pPr algn="ctr">
+              <a:lnSpc>
+                <a:spcPts val="2200"/>
+              </a:lnSpc>
+              <a:defRPr sz="3600" b="1">
                 <a:solidFill>
                   <a:srgbClr val="1A1A2E"/>
                 </a:solidFill>
@@ -5890,7 +6958,7 @@
               </a:defRPr>
             </a:pPr>
             <a:r>
-              <a:t>1. Transaction-level verification</a:t>
+              <a:t>Execution &amp; simulation flow</a:t>
             </a:r>
           </a:p>
         </p:txBody>
@@ -5898,105 +6966,6 @@
       <p:sp>
         <p:nvSpPr>
           <p:cNvPr id="3" name="TextBox 2"/>
-          <p:cNvSpPr txBox="1"/>
-          <p:nvPr/>
-        </p:nvSpPr>
-        <p:spPr>
-          <a:xfrm>
-            <a:off x="548640" y="1234440"/>
-            <a:ext cx="11064240" cy="4937760"/>
-          </a:xfrm>
-          <a:prstGeom prst="rect">
-            <a:avLst/>
-          </a:prstGeom>
-          <a:noFill/>
-        </p:spPr>
-        <p:txBody>
-          <a:bodyPr wrap="square">
-            <a:noAutofit/>
-          </a:bodyPr>
-          <a:lstStyle/>
-          <a:p>
-            <a:pPr>
-              <a:lnSpc>
-                <a:spcPts val="2200"/>
-              </a:lnSpc>
-              <a:spcAft>
-                <a:spcPts val="1000"/>
-              </a:spcAft>
-              <a:defRPr sz="2000" b="0">
-                <a:solidFill>
-                  <a:srgbClr val="333333"/>
-                </a:solidFill>
-                <a:latin typeface="Calibri"/>
-              </a:defRPr>
-            </a:pPr>
-            <a:r>
-              <a:t>• Stimulus is a transaction (what to write), not raw</a:t>
-            </a:r>
-          </a:p>
-          <a:p>
-            <a:pPr>
-              <a:lnSpc>
-                <a:spcPts val="2200"/>
-              </a:lnSpc>
-              <a:spcAft>
-                <a:spcPts val="1000"/>
-              </a:spcAft>
-              <a:defRPr sz="2000" b="0">
-                <a:solidFill>
-                  <a:srgbClr val="333333"/>
-                </a:solidFill>
-                <a:latin typeface="Calibri"/>
-              </a:defRPr>
-            </a:pPr>
-            <a:r>
-              <a:t>      pin wiggles in `initial` blocks.</a:t>
-            </a:r>
-          </a:p>
-          <a:p>
-            <a:pPr>
-              <a:lnSpc>
-                <a:spcPts val="2200"/>
-              </a:lnSpc>
-              <a:spcAft>
-                <a:spcPts val="1000"/>
-              </a:spcAft>
-              <a:defRPr sz="2000" b="0">
-                <a:solidFill>
-                  <a:srgbClr val="333333"/>
-                </a:solidFill>
-                <a:latin typeface="Calibri"/>
-              </a:defRPr>
-            </a:pPr>
-            <a:r>
-              <a:t>• The monitor reconstructs what happened on the bus;</a:t>
-            </a:r>
-          </a:p>
-          <a:p>
-            <a:pPr>
-              <a:lnSpc>
-                <a:spcPts val="2200"/>
-              </a:lnSpc>
-              <a:spcAft>
-                <a:spcPts val="1000"/>
-              </a:spcAft>
-              <a:defRPr sz="2000" b="0">
-                <a:solidFill>
-                  <a:srgbClr val="333333"/>
-                </a:solidFill>
-                <a:latin typeface="Calibri"/>
-              </a:defRPr>
-            </a:pPr>
-            <a:r>
-              <a:t>      the scoreboard compares to expected.</a:t>
-            </a:r>
-          </a:p>
-        </p:txBody>
-      </p:sp>
-      <p:sp>
-        <p:nvSpPr>
-          <p:cNvPr id="4" name="TextBox 3"/>
           <p:cNvSpPr txBox="1"/>
           <p:nvPr/>
         </p:nvSpPr>
@@ -6085,7 +7054,7 @@
               </a:defRPr>
             </a:pPr>
             <a:r>
-              <a:t>2. Directed regression in uvm_smoke</a:t>
+              <a:t>How the example runs (toolchain)</a:t>
             </a:r>
           </a:p>
         </p:txBody>
@@ -6127,64 +7096,178 @@
               </a:defRPr>
             </a:pPr>
             <a:r>
-              <a:t>• Fixed sequence: 0x00, 0x01, 0x55, 0xAA, 0xFF —</a:t>
-            </a:r>
-          </a:p>
-          <a:p>
-            <a:pPr>
-              <a:lnSpc>
-                <a:spcPts val="2200"/>
-              </a:lnSpc>
-              <a:spcAft>
-                <a:spcPts val="1000"/>
-              </a:spcAft>
-              <a:defRPr sz="2000" b="0">
-                <a:solidFill>
-                  <a:srgbClr val="333333"/>
-                </a:solidFill>
-                <a:latin typeface="Calibri"/>
-              </a:defRPr>
-            </a:pPr>
-            <a:r>
-              <a:t>      repeatable, easy to debug.</a:t>
-            </a:r>
-          </a:p>
-          <a:p>
-            <a:pPr>
-              <a:lnSpc>
-                <a:spcPts val="2200"/>
-              </a:lnSpc>
-              <a:spcAft>
-                <a:spcPts val="1000"/>
-              </a:spcAft>
-              <a:defRPr sz="2000" b="0">
-                <a:solidFill>
-                  <a:srgbClr val="333333"/>
-                </a:solidFill>
-                <a:latin typeface="Calibri"/>
-              </a:defRPr>
-            </a:pPr>
-            <a:r>
-              <a:t>• Pass criteria: scoreboard reports matches, zero</a:t>
-            </a:r>
-          </a:p>
-          <a:p>
-            <a:pPr>
-              <a:lnSpc>
-                <a:spcPts val="2200"/>
-              </a:lnSpc>
-              <a:spcAft>
-                <a:spcPts val="1000"/>
-              </a:spcAft>
-              <a:defRPr sz="2000" b="0">
-                <a:solidFill>
-                  <a:srgbClr val="333333"/>
-                </a:solidFill>
-                <a:latin typeface="Calibri"/>
-              </a:defRPr>
-            </a:pPr>
-            <a:r>
-              <a:t>      mismatches.</a:t>
+              <a:t>• Makefile: Verilator + UVM_HOME compile RTL,</a:t>
+            </a:r>
+          </a:p>
+          <a:p>
+            <a:pPr>
+              <a:lnSpc>
+                <a:spcPts val="2200"/>
+              </a:lnSpc>
+              <a:spcAft>
+                <a:spcPts val="1000"/>
+              </a:spcAft>
+              <a:defRPr sz="2000" b="0">
+                <a:solidFill>
+                  <a:srgbClr val="333333"/>
+                </a:solidFill>
+                <a:latin typeface="Calibri"/>
+              </a:defRPr>
+            </a:pPr>
+            <a:r>
+              <a:t>      interface, and test_*.sv</a:t>
+            </a:r>
+          </a:p>
+          <a:p>
+            <a:pPr>
+              <a:lnSpc>
+                <a:spcPts val="2200"/>
+              </a:lnSpc>
+              <a:spcAft>
+                <a:spcPts val="1000"/>
+              </a:spcAft>
+              <a:defRPr sz="2000" b="0">
+                <a:solidFill>
+                  <a:srgbClr val="333333"/>
+                </a:solidFill>
+                <a:latin typeface="Calibri"/>
+              </a:defRPr>
+            </a:pPr>
+            <a:r>
+              <a:t>• UVM phases: build → connect → run_test → report</a:t>
+            </a:r>
+          </a:p>
+          <a:p>
+            <a:pPr>
+              <a:lnSpc>
+                <a:spcPts val="2200"/>
+              </a:lnSpc>
+              <a:spcAft>
+                <a:spcPts val="1000"/>
+              </a:spcAft>
+              <a:defRPr sz="2000" b="0">
+                <a:solidFill>
+                  <a:srgbClr val="333333"/>
+                </a:solidFill>
+                <a:latin typeface="Calibri"/>
+              </a:defRPr>
+            </a:pPr>
+            <a:r>
+              <a:t>      (same pattern as Module 2)</a:t>
+            </a:r>
+          </a:p>
+          <a:p>
+            <a:pPr>
+              <a:lnSpc>
+                <a:spcPts val="2200"/>
+              </a:lnSpc>
+              <a:spcAft>
+                <a:spcPts val="1000"/>
+              </a:spcAft>
+              <a:defRPr sz="2000" b="0">
+                <a:solidFill>
+                  <a:srgbClr val="333333"/>
+                </a:solidFill>
+                <a:latin typeface="Calibri"/>
+              </a:defRPr>
+            </a:pPr>
+            <a:r>
+              <a:t>• Sequence → driver → DUT → monitor → scoreboard (read</a:t>
+            </a:r>
+          </a:p>
+          <a:p>
+            <a:pPr>
+              <a:lnSpc>
+                <a:spcPts val="2200"/>
+              </a:lnSpc>
+              <a:spcAft>
+                <a:spcPts val="1000"/>
+              </a:spcAft>
+              <a:defRPr sz="2000" b="0">
+                <a:solidFill>
+                  <a:srgbClr val="333333"/>
+                </a:solidFill>
+                <a:latin typeface="Calibri"/>
+              </a:defRPr>
+            </a:pPr>
+            <a:r>
+              <a:t>      SCOREBOARD at end)</a:t>
+            </a:r>
+          </a:p>
+          <a:p>
+            <a:pPr>
+              <a:lnSpc>
+                <a:spcPts val="2200"/>
+              </a:lnSpc>
+              <a:spcAft>
+                <a:spcPts val="1000"/>
+              </a:spcAft>
+              <a:defRPr sz="2000" b="0">
+                <a:solidFill>
+                  <a:srgbClr val="333333"/>
+                </a:solidFill>
+                <a:latin typeface="Calibri"/>
+              </a:defRPr>
+            </a:pPr>
+            <a:r>
+              <a:t>• Typical command: make SIM=verilator TEST=test_* (see</a:t>
+            </a:r>
+          </a:p>
+          <a:p>
+            <a:pPr>
+              <a:lnSpc>
+                <a:spcPts val="2200"/>
+              </a:lnSpc>
+              <a:spcAft>
+                <a:spcPts val="1000"/>
+              </a:spcAft>
+              <a:defRPr sz="2000" b="0">
+                <a:solidFill>
+                  <a:srgbClr val="333333"/>
+                </a:solidFill>
+                <a:latin typeface="Calibri"/>
+              </a:defRPr>
+            </a:pPr>
+            <a:r>
+              <a:t>      module2 demo slide)</a:t>
+            </a:r>
+          </a:p>
+          <a:p>
+            <a:pPr>
+              <a:lnSpc>
+                <a:spcPts val="2200"/>
+              </a:lnSpc>
+              <a:spcAft>
+                <a:spcPts val="1000"/>
+              </a:spcAft>
+              <a:defRPr sz="2000" b="0">
+                <a:solidFill>
+                  <a:srgbClr val="333333"/>
+                </a:solidFill>
+                <a:latin typeface="Calibri"/>
+              </a:defRPr>
+            </a:pPr>
+            <a:r>
+              <a:t>• Loopback / hooks connect monitor observations to</a:t>
+            </a:r>
+          </a:p>
+          <a:p>
+            <a:pPr>
+              <a:lnSpc>
+                <a:spcPts val="2200"/>
+              </a:lnSpc>
+              <a:spcAft>
+                <a:spcPts val="1000"/>
+              </a:spcAft>
+              <a:defRPr sz="2000" b="0">
+                <a:solidFill>
+                  <a:srgbClr val="333333"/>
+                </a:solidFill>
+                <a:latin typeface="Calibri"/>
+              </a:defRPr>
+            </a:pPr>
+            <a:r>
+              <a:t>      scoreboard checks</a:t>
             </a:r>
           </a:p>
         </p:txBody>
@@ -6280,7 +7363,7 @@
               </a:defRPr>
             </a:pPr>
             <a:r>
-              <a:t>3. Skills you reuse on UART/SPI/I²C</a:t>
+              <a:t>Example directory layout (1)</a:t>
             </a:r>
           </a:p>
         </p:txBody>
@@ -6322,64 +7405,159 @@
               </a:defRPr>
             </a:pPr>
             <a:r>
-              <a:t>• Same agent pattern; only the transaction and</a:t>
-            </a:r>
-          </a:p>
-          <a:p>
-            <a:pPr>
-              <a:lnSpc>
-                <a:spcPts val="2200"/>
-              </a:lnSpc>
-              <a:spcAft>
-                <a:spcPts val="1000"/>
-              </a:spcAft>
-              <a:defRPr sz="2000" b="0">
-                <a:solidFill>
-                  <a:srgbClr val="333333"/>
-                </a:solidFill>
-                <a:latin typeface="Calibri"/>
-              </a:defRPr>
-            </a:pPr>
-            <a:r>
-              <a:t>      protocol timing in driver/monitor change.</a:t>
-            </a:r>
-          </a:p>
-          <a:p>
-            <a:pPr>
-              <a:lnSpc>
-                <a:spcPts val="2200"/>
-              </a:lnSpc>
-              <a:spcAft>
-                <a:spcPts val="1000"/>
-              </a:spcAft>
-              <a:defRPr sz="2000" b="0">
-                <a:solidFill>
-                  <a:srgbClr val="333333"/>
-                </a:solidFill>
-                <a:latin typeface="Calibri"/>
-              </a:defRPr>
-            </a:pPr>
-            <a:r>
-              <a:t>• Read UVM log lines: DRIVER, MONITOR, SCOREBOARD,</a:t>
-            </a:r>
-          </a:p>
-          <a:p>
-            <a:pPr>
-              <a:lnSpc>
-                <a:spcPts val="2200"/>
-              </a:lnSpc>
-              <a:spcAft>
-                <a:spcPts val="1000"/>
-              </a:spcAft>
-              <a:defRPr sz="2000" b="0">
-                <a:solidFill>
-                  <a:srgbClr val="333333"/>
-                </a:solidFill>
-                <a:latin typeface="Calibri"/>
-              </a:defRPr>
-            </a:pPr>
-            <a:r>
-              <a:t>      final summary.</a:t>
+              <a:t>• DUT: dut/simple_register.v — tiny register (clk,</a:t>
+            </a:r>
+          </a:p>
+          <a:p>
+            <a:pPr>
+              <a:lnSpc>
+                <a:spcPts val="2200"/>
+              </a:lnSpc>
+              <a:spcAft>
+                <a:spcPts val="1000"/>
+              </a:spcAft>
+              <a:defRPr sz="2000" b="0">
+                <a:solidFill>
+                  <a:srgbClr val="333333"/>
+                </a:solidFill>
+                <a:latin typeface="Calibri"/>
+              </a:defRPr>
+            </a:pPr>
+            <a:r>
+              <a:t>      rst_n, enable, d, q).</a:t>
+            </a:r>
+          </a:p>
+          <a:p>
+            <a:pPr>
+              <a:lnSpc>
+                <a:spcPts val="2200"/>
+              </a:lnSpc>
+              <a:spcAft>
+                <a:spcPts val="1000"/>
+              </a:spcAft>
+              <a:defRPr sz="2000" b="0">
+                <a:solidFill>
+                  <a:srgbClr val="333333"/>
+                </a:solidFill>
+                <a:latin typeface="Calibri"/>
+              </a:defRPr>
+            </a:pPr>
+            <a:r>
+              <a:t>• Interface: reg_if — connects testbench to DUT.</a:t>
+            </a:r>
+          </a:p>
+          <a:p>
+            <a:pPr>
+              <a:lnSpc>
+                <a:spcPts val="2200"/>
+              </a:lnSpc>
+              <a:spcAft>
+                <a:spcPts val="1000"/>
+              </a:spcAft>
+              <a:defRPr sz="2000" b="0">
+                <a:solidFill>
+                  <a:srgbClr val="333333"/>
+                </a:solidFill>
+                <a:latin typeface="Calibri"/>
+              </a:defRPr>
+            </a:pPr>
+            <a:r>
+              <a:t>• Transaction: RegTransaction — data + enable +</a:t>
+            </a:r>
+          </a:p>
+          <a:p>
+            <a:pPr>
+              <a:lnSpc>
+                <a:spcPts val="2200"/>
+              </a:lnSpc>
+              <a:spcAft>
+                <a:spcPts val="1000"/>
+              </a:spcAft>
+              <a:defRPr sz="2000" b="0">
+                <a:solidFill>
+                  <a:srgbClr val="333333"/>
+                </a:solidFill>
+                <a:latin typeface="Calibri"/>
+              </a:defRPr>
+            </a:pPr>
+            <a:r>
+              <a:t>      observed_q.</a:t>
+            </a:r>
+          </a:p>
+          <a:p>
+            <a:pPr>
+              <a:lnSpc>
+                <a:spcPts val="2200"/>
+              </a:lnSpc>
+              <a:spcAft>
+                <a:spcPts val="1000"/>
+              </a:spcAft>
+              <a:defRPr sz="2000" b="0">
+                <a:solidFill>
+                  <a:srgbClr val="333333"/>
+                </a:solidFill>
+                <a:latin typeface="Calibri"/>
+              </a:defRPr>
+            </a:pPr>
+            <a:r>
+              <a:t>• Sequence: RegSequence — produces 5 directed</a:t>
+            </a:r>
+          </a:p>
+          <a:p>
+            <a:pPr>
+              <a:lnSpc>
+                <a:spcPts val="2200"/>
+              </a:lnSpc>
+              <a:spcAft>
+                <a:spcPts val="1000"/>
+              </a:spcAft>
+              <a:defRPr sz="2000" b="0">
+                <a:solidFill>
+                  <a:srgbClr val="333333"/>
+                </a:solidFill>
+                <a:latin typeface="Calibri"/>
+              </a:defRPr>
+            </a:pPr>
+            <a:r>
+              <a:t>      transactions (0x00, 0x01, 0x55, 0xAA, 0xFF).</a:t>
+            </a:r>
+          </a:p>
+          <a:p>
+            <a:pPr>
+              <a:lnSpc>
+                <a:spcPts val="2200"/>
+              </a:lnSpc>
+              <a:spcAft>
+                <a:spcPts val="1000"/>
+              </a:spcAft>
+              <a:defRPr sz="2000" b="0">
+                <a:solidFill>
+                  <a:srgbClr val="333333"/>
+                </a:solidFill>
+                <a:latin typeface="Calibri"/>
+              </a:defRPr>
+            </a:pPr>
+            <a:r>
+              <a:t>• Driver: RegDriver — drives enable and d from</a:t>
+            </a:r>
+          </a:p>
+          <a:p>
+            <a:pPr>
+              <a:lnSpc>
+                <a:spcPts val="2200"/>
+              </a:lnSpc>
+              <a:spcAft>
+                <a:spcPts val="1000"/>
+              </a:spcAft>
+              <a:defRPr sz="2000" b="0">
+                <a:solidFill>
+                  <a:srgbClr val="333333"/>
+                </a:solidFill>
+                <a:latin typeface="Calibri"/>
+              </a:defRPr>
+            </a:pPr>
+            <a:r>
+              <a:t>      transaction; waits for clock.</a:t>
             </a:r>
           </a:p>
         </p:txBody>
@@ -6449,8 +7627,8 @@
         </p:nvSpPr>
         <p:spPr>
           <a:xfrm>
-            <a:off x="548640" y="2743200"/>
-            <a:ext cx="11064240" cy="1371600"/>
+            <a:off x="548640" y="411480"/>
+            <a:ext cx="11064240" cy="777240"/>
           </a:xfrm>
           <a:prstGeom prst="rect">
             <a:avLst/>
@@ -6463,11 +7641,11 @@
           </a:bodyPr>
           <a:lstStyle/>
           <a:p>
-            <a:pPr algn="ctr">
-              <a:lnSpc>
-                <a:spcPts val="2200"/>
-              </a:lnSpc>
-              <a:defRPr sz="3600" b="1">
+            <a:pPr>
+              <a:lnSpc>
+                <a:spcPts val="2200"/>
+              </a:lnSpc>
+              <a:defRPr sz="2800" b="1">
                 <a:solidFill>
                   <a:srgbClr val="1A1A2E"/>
                 </a:solidFill>
@@ -6475,7 +7653,7 @@
               </a:defRPr>
             </a:pPr>
             <a:r>
-              <a:t>Syllabus topics</a:t>
+              <a:t>Example directory layout (2)</a:t>
             </a:r>
           </a:p>
         </p:txBody>
@@ -6483,6 +7661,143 @@
       <p:sp>
         <p:nvSpPr>
           <p:cNvPr id="3" name="TextBox 2"/>
+          <p:cNvSpPr txBox="1"/>
+          <p:nvPr/>
+        </p:nvSpPr>
+        <p:spPr>
+          <a:xfrm>
+            <a:off x="548640" y="1234440"/>
+            <a:ext cx="11064240" cy="4937760"/>
+          </a:xfrm>
+          <a:prstGeom prst="rect">
+            <a:avLst/>
+          </a:prstGeom>
+          <a:noFill/>
+        </p:spPr>
+        <p:txBody>
+          <a:bodyPr wrap="square">
+            <a:noAutofit/>
+          </a:bodyPr>
+          <a:lstStyle/>
+          <a:p>
+            <a:pPr>
+              <a:lnSpc>
+                <a:spcPts val="2200"/>
+              </a:lnSpc>
+              <a:spcAft>
+                <a:spcPts val="1000"/>
+              </a:spcAft>
+              <a:defRPr sz="2000" b="0">
+                <a:solidFill>
+                  <a:srgbClr val="333333"/>
+                </a:solidFill>
+                <a:latin typeface="Calibri"/>
+              </a:defRPr>
+            </a:pPr>
+            <a:r>
+              <a:t>• Monitor: RegMonitor — samples enable, d, q each</a:t>
+            </a:r>
+          </a:p>
+          <a:p>
+            <a:pPr>
+              <a:lnSpc>
+                <a:spcPts val="2200"/>
+              </a:lnSpc>
+              <a:spcAft>
+                <a:spcPts val="1000"/>
+              </a:spcAft>
+              <a:defRPr sz="2000" b="0">
+                <a:solidFill>
+                  <a:srgbClr val="333333"/>
+                </a:solidFill>
+                <a:latin typeface="Calibri"/>
+              </a:defRPr>
+            </a:pPr>
+            <a:r>
+              <a:t>      cycle; writes transaction to scoreboard.</a:t>
+            </a:r>
+          </a:p>
+          <a:p>
+            <a:pPr>
+              <a:lnSpc>
+                <a:spcPts val="2200"/>
+              </a:lnSpc>
+              <a:spcAft>
+                <a:spcPts val="1000"/>
+              </a:spcAft>
+              <a:defRPr sz="2000" b="0">
+                <a:solidFill>
+                  <a:srgbClr val="333333"/>
+                </a:solidFill>
+                <a:latin typeface="Calibri"/>
+              </a:defRPr>
+            </a:pPr>
+            <a:r>
+              <a:t>• Scoreboard: RegScoreboard — compares expected vs</a:t>
+            </a:r>
+          </a:p>
+          <a:p>
+            <a:pPr>
+              <a:lnSpc>
+                <a:spcPts val="2200"/>
+              </a:lnSpc>
+              <a:spcAft>
+                <a:spcPts val="1000"/>
+              </a:spcAft>
+              <a:defRPr sz="2000" b="0">
+                <a:solidFill>
+                  <a:srgbClr val="333333"/>
+                </a:solidFill>
+                <a:latin typeface="Calibri"/>
+              </a:defRPr>
+            </a:pPr>
+            <a:r>
+              <a:t>      observed; reports matches/mismatches.</a:t>
+            </a:r>
+          </a:p>
+          <a:p>
+            <a:pPr>
+              <a:lnSpc>
+                <a:spcPts val="2200"/>
+              </a:lnSpc>
+              <a:spcAft>
+                <a:spcPts val="1000"/>
+              </a:spcAft>
+              <a:defRPr sz="2000" b="0">
+                <a:solidFill>
+                  <a:srgbClr val="333333"/>
+                </a:solidFill>
+                <a:latin typeface="Calibri"/>
+              </a:defRPr>
+            </a:pPr>
+            <a:r>
+              <a:t>• Test: RegTest — builds env, queues expected values,</a:t>
+            </a:r>
+          </a:p>
+          <a:p>
+            <a:pPr>
+              <a:lnSpc>
+                <a:spcPts val="2200"/>
+              </a:lnSpc>
+              <a:spcAft>
+                <a:spcPts val="1000"/>
+              </a:spcAft>
+              <a:defRPr sz="2000" b="0">
+                <a:solidFill>
+                  <a:srgbClr val="333333"/>
+                </a:solidFill>
+                <a:latin typeface="Calibri"/>
+              </a:defRPr>
+            </a:pPr>
+            <a:r>
+              <a:t>      starts sequence, objections.</a:t>
+            </a:r>
+          </a:p>
+        </p:txBody>
+      </p:sp>
+      <p:sp>
+        <p:nvSpPr>
+          <p:cNvPr id="4" name="TextBox 3"/>
           <p:cNvSpPr txBox="1"/>
           <p:nvPr/>
         </p:nvSpPr>
@@ -6804,7 +8119,7 @@
               </a:defRPr>
             </a:pPr>
             <a:r>
-              <a:t>1. Basic Testbench (Directed Tests, Pin Wiggling)</a:t>
+              <a:t>Makefile — UVM + Verilator</a:t>
             </a:r>
           </a:p>
         </p:txBody>
@@ -6817,13 +8132,15 @@
         </p:nvSpPr>
         <p:spPr>
           <a:xfrm>
-            <a:off x="548640" y="1234440"/>
-            <a:ext cx="11064240" cy="4937760"/>
+            <a:off x="548640" y="1143000"/>
+            <a:ext cx="11064240" cy="5029200"/>
           </a:xfrm>
           <a:prstGeom prst="rect">
             <a:avLst/>
           </a:prstGeom>
-          <a:noFill/>
+          <a:solidFill>
+            <a:srgbClr val="F4F4F4"/>
+          </a:solidFill>
         </p:spPr>
         <p:txBody>
           <a:bodyPr wrap="square">
@@ -6836,74 +8153,334 @@
                 <a:spcPts val="2200"/>
               </a:lnSpc>
               <a:spcAft>
-                <a:spcPts val="1000"/>
-              </a:spcAft>
-              <a:defRPr sz="2000" b="0">
-                <a:solidFill>
-                  <a:srgbClr val="333333"/>
-                </a:solidFill>
-                <a:latin typeface="Calibri"/>
-              </a:defRPr>
-            </a:pPr>
-            <a:r>
-              <a:t>• Directed test: Drive specific inputs (e.g., reset,</a:t>
-            </a:r>
-          </a:p>
-          <a:p>
-            <a:pPr>
-              <a:lnSpc>
-                <a:spcPts val="2200"/>
-              </a:lnSpc>
-              <a:spcAft>
-                <a:spcPts val="1000"/>
-              </a:spcAft>
-              <a:defRPr sz="2000" b="0">
-                <a:solidFill>
-                  <a:srgbClr val="333333"/>
-                </a:solidFill>
-                <a:latin typeface="Calibri"/>
-              </a:defRPr>
-            </a:pPr>
-            <a:r>
-              <a:t>      then a fixed sequence of data) and check expecte…</a:t>
-            </a:r>
-          </a:p>
-          <a:p>
-            <a:pPr>
-              <a:lnSpc>
-                <a:spcPts val="2200"/>
-              </a:lnSpc>
-              <a:spcAft>
-                <a:spcPts val="1000"/>
-              </a:spcAft>
-              <a:defRPr sz="2000" b="0">
-                <a:solidFill>
-                  <a:srgbClr val="333333"/>
-                </a:solidFill>
-                <a:latin typeface="Calibri"/>
-              </a:defRPr>
-            </a:pPr>
-            <a:r>
-              <a:t>• Pin wiggling: The testbench directly drives and</a:t>
-            </a:r>
-          </a:p>
-          <a:p>
-            <a:pPr>
-              <a:lnSpc>
-                <a:spcPts val="2200"/>
-              </a:lnSpc>
-              <a:spcAft>
-                <a:spcPts val="1000"/>
-              </a:spcAft>
-              <a:defRPr sz="2000" b="0">
-                <a:solidFill>
-                  <a:srgbClr val="333333"/>
-                </a:solidFill>
-                <a:latin typeface="Calibri"/>
-              </a:defRPr>
-            </a:pPr>
-            <a:r>
-              <a:t>      samples DUT pins (clock, reset, data, enable) — no…</a:t>
+                <a:spcPts val="400"/>
+              </a:spcAft>
+              <a:defRPr sz="2000" b="0">
+                <a:solidFill>
+                  <a:srgbClr val="333333"/>
+                </a:solidFill>
+                <a:latin typeface="Consolas"/>
+              </a:defRPr>
+            </a:pPr>
+            <a:r>
+              <a:t># Makefile for Module 2 UVM smoke test</a:t>
+            </a:r>
+          </a:p>
+          <a:p>
+            <a:pPr>
+              <a:lnSpc>
+                <a:spcPts val="2200"/>
+              </a:lnSpc>
+              <a:spcAft>
+                <a:spcPts val="400"/>
+              </a:spcAft>
+              <a:defRPr sz="2000" b="0">
+                <a:solidFill>
+                  <a:srgbClr val="333333"/>
+                </a:solidFill>
+                <a:latin typeface="Consolas"/>
+              </a:defRPr>
+            </a:pPr>
+            <a:r>
+              <a:t>#</a:t>
+            </a:r>
+          </a:p>
+          <a:p>
+            <a:pPr>
+              <a:lnSpc>
+                <a:spcPts val="2200"/>
+              </a:lnSpc>
+              <a:spcAft>
+                <a:spcPts val="400"/>
+              </a:spcAft>
+              <a:defRPr sz="2000" b="0">
+                <a:solidFill>
+                  <a:srgbClr val="333333"/>
+                </a:solidFill>
+                <a:latin typeface="Consolas"/>
+              </a:defRPr>
+            </a:pPr>
+            <a:r>
+              <a:t># Mirrors the style used in:</a:t>
+            </a:r>
+          </a:p>
+          <a:p>
+            <a:pPr>
+              <a:lnSpc>
+                <a:spcPts val="2200"/>
+              </a:lnSpc>
+              <a:spcAft>
+                <a:spcPts val="400"/>
+              </a:spcAft>
+              <a:defRPr sz="2000" b="0">
+                <a:solidFill>
+                  <a:srgbClr val="333333"/>
+                </a:solidFill>
+                <a:latin typeface="Consolas"/>
+              </a:defRPr>
+            </a:pPr>
+            <a:r>
+              <a:t># - tools/learn_uvm2017_sv_verilator/module3/tests/uvm_tests/Makefile</a:t>
+            </a:r>
+          </a:p>
+          <a:p>
+            <a:pPr>
+              <a:lnSpc>
+                <a:spcPts val="2200"/>
+              </a:lnSpc>
+              <a:spcAft>
+                <a:spcPts val="400"/>
+              </a:spcAft>
+              <a:defRPr sz="2000" b="0">
+                <a:solidFill>
+                  <a:srgbClr val="333333"/>
+                </a:solidFill>
+                <a:latin typeface="Consolas"/>
+              </a:defRPr>
+            </a:pPr>
+            <a:r>
+              <a:t>#</a:t>
+            </a:r>
+          </a:p>
+          <a:p>
+            <a:pPr>
+              <a:lnSpc>
+                <a:spcPts val="2200"/>
+              </a:lnSpc>
+              <a:spcAft>
+                <a:spcPts val="400"/>
+              </a:spcAft>
+              <a:defRPr sz="2000" b="0">
+                <a:solidFill>
+                  <a:srgbClr val="333333"/>
+                </a:solidFill>
+                <a:latin typeface="Consolas"/>
+              </a:defRPr>
+            </a:pPr>
+            <a:r>
+              <a:t># Usage:</a:t>
+            </a:r>
+          </a:p>
+          <a:p>
+            <a:pPr>
+              <a:lnSpc>
+                <a:spcPts val="2200"/>
+              </a:lnSpc>
+              <a:spcAft>
+                <a:spcPts val="400"/>
+              </a:spcAft>
+              <a:defRPr sz="2000" b="0">
+                <a:solidFill>
+                  <a:srgbClr val="333333"/>
+                </a:solidFill>
+                <a:latin typeface="Consolas"/>
+              </a:defRPr>
+            </a:pPr>
+            <a:r>
+              <a:t>#   make SIM=verilator TEST=test_uvm_smoke</a:t>
+            </a:r>
+          </a:p>
+          <a:p>
+            <a:pPr>
+              <a:lnSpc>
+                <a:spcPts val="2200"/>
+              </a:lnSpc>
+              <a:spcAft>
+                <a:spcPts val="400"/>
+              </a:spcAft>
+              <a:defRPr sz="2000" b="0">
+                <a:solidFill>
+                  <a:srgbClr val="333333"/>
+                </a:solidFill>
+                <a:latin typeface="Consolas"/>
+              </a:defRPr>
+            </a:pPr>
+            <a:r>
+              <a:t>#</a:t>
+            </a:r>
+          </a:p>
+          <a:p>
+            <a:pPr>
+              <a:lnSpc>
+                <a:spcPts val="2200"/>
+              </a:lnSpc>
+              <a:spcAft>
+                <a:spcPts val="400"/>
+              </a:spcAft>
+              <a:defRPr sz="2000" b="0">
+                <a:solidFill>
+                  <a:srgbClr val="333333"/>
+                </a:solidFill>
+                <a:latin typeface="Consolas"/>
+              </a:defRPr>
+            </a:pPr>
+          </a:p>
+          <a:p>
+            <a:pPr>
+              <a:lnSpc>
+                <a:spcPts val="2200"/>
+              </a:lnSpc>
+              <a:spcAft>
+                <a:spcPts val="400"/>
+              </a:spcAft>
+              <a:defRPr sz="2000" b="0">
+                <a:solidFill>
+                  <a:srgbClr val="333333"/>
+                </a:solidFill>
+                <a:latin typeface="Consolas"/>
+              </a:defRPr>
+            </a:pPr>
+            <a:r>
+              <a:t>SIM ?= verilator</a:t>
+            </a:r>
+          </a:p>
+          <a:p>
+            <a:pPr>
+              <a:lnSpc>
+                <a:spcPts val="2200"/>
+              </a:lnSpc>
+              <a:spcAft>
+                <a:spcPts val="400"/>
+              </a:spcAft>
+              <a:defRPr sz="2000" b="0">
+                <a:solidFill>
+                  <a:srgbClr val="333333"/>
+                </a:solidFill>
+                <a:latin typeface="Consolas"/>
+              </a:defRPr>
+            </a:pPr>
+            <a:r>
+              <a:t>TEST ?= test_uvm_smoke</a:t>
+            </a:r>
+          </a:p>
+          <a:p>
+            <a:pPr>
+              <a:lnSpc>
+                <a:spcPts val="2200"/>
+              </a:lnSpc>
+              <a:spcAft>
+                <a:spcPts val="400"/>
+              </a:spcAft>
+              <a:defRPr sz="2000" b="0">
+                <a:solidFill>
+                  <a:srgbClr val="333333"/>
+                </a:solidFill>
+                <a:latin typeface="Consolas"/>
+              </a:defRPr>
+            </a:pPr>
+          </a:p>
+          <a:p>
+            <a:pPr>
+              <a:lnSpc>
+                <a:spcPts val="2200"/>
+              </a:lnSpc>
+              <a:spcAft>
+                <a:spcPts val="400"/>
+              </a:spcAft>
+              <a:defRPr sz="2000" b="0">
+                <a:solidFill>
+                  <a:srgbClr val="333333"/>
+                </a:solidFill>
+                <a:latin typeface="Consolas"/>
+              </a:defRPr>
+            </a:pPr>
+            <a:r>
+              <a:t># Prefer an externally-installed UVM, but fall back to the repo's</a:t>
+            </a:r>
+          </a:p>
+          <a:p>
+            <a:pPr>
+              <a:lnSpc>
+                <a:spcPts val="2200"/>
+              </a:lnSpc>
+              <a:spcAft>
+                <a:spcPts val="400"/>
+              </a:spcAft>
+              <a:defRPr sz="2000" b="0">
+                <a:solidFill>
+                  <a:srgbClr val="333333"/>
+                </a:solidFill>
+                <a:latin typeface="Consolas"/>
+              </a:defRPr>
+            </a:pPr>
+            <a:r>
+              <a:t>vendored UVM.</a:t>
+            </a:r>
+          </a:p>
+          <a:p>
+            <a:pPr>
+              <a:lnSpc>
+                <a:spcPts val="2200"/>
+              </a:lnSpc>
+              <a:spcAft>
+                <a:spcPts val="400"/>
+              </a:spcAft>
+              <a:defRPr sz="2000" b="0">
+                <a:solidFill>
+                  <a:srgbClr val="333333"/>
+                </a:solidFill>
+                <a:latin typeface="Consolas"/>
+              </a:defRPr>
+            </a:pPr>
+            <a:r>
+              <a:t>UVM_HOME ?= $(shell echo $$UVM_HOME)</a:t>
+            </a:r>
+          </a:p>
+          <a:p>
+            <a:pPr>
+              <a:lnSpc>
+                <a:spcPts val="2200"/>
+              </a:lnSpc>
+              <a:spcAft>
+                <a:spcPts val="400"/>
+              </a:spcAft>
+              <a:defRPr sz="2000" b="0">
+                <a:solidFill>
+                  <a:srgbClr val="333333"/>
+                </a:solidFill>
+                <a:latin typeface="Consolas"/>
+              </a:defRPr>
+            </a:pPr>
+            <a:r>
+              <a:t># From module2/examples/uvm_smoke, repo root is ../../..</a:t>
+            </a:r>
+          </a:p>
+          <a:p>
+            <a:pPr>
+              <a:lnSpc>
+                <a:spcPts val="2200"/>
+              </a:lnSpc>
+              <a:spcAft>
+                <a:spcPts val="400"/>
+              </a:spcAft>
+              <a:defRPr sz="2000" b="0">
+                <a:solidFill>
+                  <a:srgbClr val="333333"/>
+                </a:solidFill>
+                <a:latin typeface="Consolas"/>
+              </a:defRPr>
+            </a:pPr>
+            <a:r>
+              <a:t>UVM_HOME_FALLBACK := ../../../tools/uvm-2017/1800.2-2017-1.0</a:t>
+            </a:r>
+          </a:p>
+          <a:p>
+            <a:pPr>
+              <a:lnSpc>
+                <a:spcPts val="2200"/>
+              </a:lnSpc>
+              <a:spcAft>
+                <a:spcPts val="400"/>
+              </a:spcAft>
+              <a:defRPr sz="2000" b="0">
+                <a:solidFill>
+                  <a:srgbClr val="333333"/>
+                </a:solidFill>
+                <a:latin typeface="Consolas"/>
+              </a:defRPr>
+            </a:pPr>
+            <a:r>
+              <a:t># ...</a:t>
             </a:r>
           </a:p>
         </p:txBody>
@@ -6973,8 +8550,8 @@
         </p:nvSpPr>
         <p:spPr>
           <a:xfrm>
-            <a:off x="548640" y="411480"/>
-            <a:ext cx="11064240" cy="777240"/>
+            <a:off x="548640" y="2743200"/>
+            <a:ext cx="11064240" cy="1371600"/>
           </a:xfrm>
           <a:prstGeom prst="rect">
             <a:avLst/>
@@ -6987,11 +8564,11 @@
           </a:bodyPr>
           <a:lstStyle/>
           <a:p>
-            <a:pPr>
-              <a:lnSpc>
-                <a:spcPts val="2200"/>
-              </a:lnSpc>
-              <a:defRPr sz="2800" b="1">
+            <a:pPr algn="ctr">
+              <a:lnSpc>
+                <a:spcPts val="2200"/>
+              </a:lnSpc>
+              <a:defRPr sz="3600" b="1">
                 <a:solidFill>
                   <a:srgbClr val="1A1A2E"/>
                 </a:solidFill>
@@ -6999,7 +8576,7 @@
               </a:defRPr>
             </a:pPr>
             <a:r>
-              <a:t>2. Evolution to UVM+SV Testbench</a:t>
+              <a:t>Key files to study</a:t>
             </a:r>
           </a:p>
         </p:txBody>
@@ -7007,219 +8584,6 @@
       <p:sp>
         <p:nvSpPr>
           <p:cNvPr id="3" name="TextBox 2"/>
-          <p:cNvSpPr txBox="1"/>
-          <p:nvPr/>
-        </p:nvSpPr>
-        <p:spPr>
-          <a:xfrm>
-            <a:off x="548640" y="1234440"/>
-            <a:ext cx="11064240" cy="4937760"/>
-          </a:xfrm>
-          <a:prstGeom prst="rect">
-            <a:avLst/>
-          </a:prstGeom>
-          <a:noFill/>
-        </p:spPr>
-        <p:txBody>
-          <a:bodyPr wrap="square">
-            <a:noAutofit/>
-          </a:bodyPr>
-          <a:lstStyle/>
-          <a:p>
-            <a:pPr>
-              <a:lnSpc>
-                <a:spcPts val="2200"/>
-              </a:lnSpc>
-              <a:spcAft>
-                <a:spcPts val="1000"/>
-              </a:spcAft>
-              <a:defRPr sz="2000" b="0">
-                <a:solidFill>
-                  <a:srgbClr val="333333"/>
-                </a:solidFill>
-                <a:latin typeface="Calibri"/>
-              </a:defRPr>
-            </a:pPr>
-            <a:r>
-              <a:t>• Sequence: Produces a stream of transactions (e.g., a</a:t>
-            </a:r>
-          </a:p>
-          <a:p>
-            <a:pPr>
-              <a:lnSpc>
-                <a:spcPts val="2200"/>
-              </a:lnSpc>
-              <a:spcAft>
-                <a:spcPts val="1000"/>
-              </a:spcAft>
-              <a:defRPr sz="2000" b="0">
-                <a:solidFill>
-                  <a:srgbClr val="333333"/>
-                </a:solidFill>
-                <a:latin typeface="Calibri"/>
-              </a:defRPr>
-            </a:pPr>
-            <a:r>
-              <a:t>      few directed values: 0x00, 0x01, 0x55, 0xAA, 0…</a:t>
-            </a:r>
-          </a:p>
-          <a:p>
-            <a:pPr>
-              <a:lnSpc>
-                <a:spcPts val="2200"/>
-              </a:lnSpc>
-              <a:spcAft>
-                <a:spcPts val="1000"/>
-              </a:spcAft>
-              <a:defRPr sz="2000" b="0">
-                <a:solidFill>
-                  <a:srgbClr val="333333"/>
-                </a:solidFill>
-                <a:latin typeface="Calibri"/>
-              </a:defRPr>
-            </a:pPr>
-            <a:r>
-              <a:t>• Driver: Gets transactions from the sequencer and</a:t>
-            </a:r>
-          </a:p>
-          <a:p>
-            <a:pPr>
-              <a:lnSpc>
-                <a:spcPts val="2200"/>
-              </a:lnSpc>
-              <a:spcAft>
-                <a:spcPts val="1000"/>
-              </a:spcAft>
-              <a:defRPr sz="2000" b="0">
-                <a:solidFill>
-                  <a:srgbClr val="333333"/>
-                </a:solidFill>
-                <a:latin typeface="Calibri"/>
-              </a:defRPr>
-            </a:pPr>
-            <a:r>
-              <a:t>      drives the DUT interface (e.g., set enable and d o…</a:t>
-            </a:r>
-          </a:p>
-          <a:p>
-            <a:pPr>
-              <a:lnSpc>
-                <a:spcPts val="2200"/>
-              </a:lnSpc>
-              <a:spcAft>
-                <a:spcPts val="1000"/>
-              </a:spcAft>
-              <a:defRPr sz="2000" b="0">
-                <a:solidFill>
-                  <a:srgbClr val="333333"/>
-                </a:solidFill>
-                <a:latin typeface="Calibri"/>
-              </a:defRPr>
-            </a:pPr>
-            <a:r>
-              <a:t>• Monitor: Observes the DUT interface and turns pin</a:t>
-            </a:r>
-          </a:p>
-          <a:p>
-            <a:pPr>
-              <a:lnSpc>
-                <a:spcPts val="2200"/>
-              </a:lnSpc>
-              <a:spcAft>
-                <a:spcPts val="1000"/>
-              </a:spcAft>
-              <a:defRPr sz="2000" b="0">
-                <a:solidFill>
-                  <a:srgbClr val="333333"/>
-                </a:solidFill>
-                <a:latin typeface="Calibri"/>
-              </a:defRPr>
-            </a:pPr>
-            <a:r>
-              <a:t>      activity into transactions, then sends them to th…</a:t>
-            </a:r>
-          </a:p>
-          <a:p>
-            <a:pPr>
-              <a:lnSpc>
-                <a:spcPts val="2200"/>
-              </a:lnSpc>
-              <a:spcAft>
-                <a:spcPts val="1000"/>
-              </a:spcAft>
-              <a:defRPr sz="2000" b="0">
-                <a:solidFill>
-                  <a:srgbClr val="333333"/>
-                </a:solidFill>
-                <a:latin typeface="Calibri"/>
-              </a:defRPr>
-            </a:pPr>
-            <a:r>
-              <a:t>• Scoreboard: Compares “expected” (what we sent) vs</a:t>
-            </a:r>
-          </a:p>
-          <a:p>
-            <a:pPr>
-              <a:lnSpc>
-                <a:spcPts val="2200"/>
-              </a:lnSpc>
-              <a:spcAft>
-                <a:spcPts val="1000"/>
-              </a:spcAft>
-              <a:defRPr sz="2000" b="0">
-                <a:solidFill>
-                  <a:srgbClr val="333333"/>
-                </a:solidFill>
-                <a:latin typeface="Calibri"/>
-              </a:defRPr>
-            </a:pPr>
-            <a:r>
-              <a:t>      “observed” (what the monitor saw). Reports matche…</a:t>
-            </a:r>
-          </a:p>
-          <a:p>
-            <a:pPr>
-              <a:lnSpc>
-                <a:spcPts val="2200"/>
-              </a:lnSpc>
-              <a:spcAft>
-                <a:spcPts val="1000"/>
-              </a:spcAft>
-              <a:defRPr sz="2000" b="0">
-                <a:solidFill>
-                  <a:srgbClr val="333333"/>
-                </a:solidFill>
-                <a:latin typeface="Calibri"/>
-              </a:defRPr>
-            </a:pPr>
-            <a:r>
-              <a:t>• Agent: Groups driver, monitor, and sequencer for one</a:t>
-            </a:r>
-          </a:p>
-          <a:p>
-            <a:pPr>
-              <a:lnSpc>
-                <a:spcPts val="2200"/>
-              </a:lnSpc>
-              <a:spcAft>
-                <a:spcPts val="1000"/>
-              </a:spcAft>
-              <a:defRPr sz="2000" b="0">
-                <a:solidFill>
-                  <a:srgbClr val="333333"/>
-                </a:solidFill>
-                <a:latin typeface="Calibri"/>
-              </a:defRPr>
-            </a:pPr>
-            <a:r>
-              <a:t>      interface. Env: Contains agent(s) and scoreboa…</a:t>
-            </a:r>
-          </a:p>
-        </p:txBody>
-      </p:sp>
-      <p:sp>
-        <p:nvSpPr>
-          <p:cNvPr id="4" name="TextBox 3"/>
           <p:cNvSpPr txBox="1"/>
           <p:nvPr/>
         </p:nvSpPr>
@@ -7308,7 +8672,7 @@
               </a:defRPr>
             </a:pPr>
             <a:r>
-              <a:t>3. Toolchain (Verilator, UVM_HOME, Make)</a:t>
+              <a:t>Open these in the repo</a:t>
             </a:r>
           </a:p>
         </p:txBody>
@@ -7350,102 +8714,102 @@
               </a:defRPr>
             </a:pPr>
             <a:r>
-              <a:t>• Verilator: Compiles SystemVerilog (including UVM) +</a:t>
-            </a:r>
-          </a:p>
-          <a:p>
-            <a:pPr>
-              <a:lnSpc>
-                <a:spcPts val="2200"/>
-              </a:lnSpc>
-              <a:spcAft>
-                <a:spcPts val="1000"/>
-              </a:spcAft>
-              <a:defRPr sz="2000" b="0">
-                <a:solidFill>
-                  <a:srgbClr val="333333"/>
-                </a:solidFill>
-                <a:latin typeface="Calibri"/>
-              </a:defRPr>
-            </a:pPr>
-            <a:r>
-              <a:t>      C++ into an executable. Key flags: `-sv`, `--ti…</a:t>
-            </a:r>
-          </a:p>
-          <a:p>
-            <a:pPr>
-              <a:lnSpc>
-                <a:spcPts val="2200"/>
-              </a:lnSpc>
-              <a:spcAft>
-                <a:spcPts val="1000"/>
-              </a:spcAft>
-              <a:defRPr sz="2000" b="0">
-                <a:solidFill>
-                  <a:srgbClr val="333333"/>
-                </a:solidFill>
-                <a:latin typeface="Calibri"/>
-              </a:defRPr>
-            </a:pPr>
-            <a:r>
-              <a:t>• UVM_HOME: Points to the UVM library root; the build</a:t>
-            </a:r>
-          </a:p>
-          <a:p>
-            <a:pPr>
-              <a:lnSpc>
-                <a:spcPts val="2200"/>
-              </a:lnSpc>
-              <a:spcAft>
-                <a:spcPts val="1000"/>
-              </a:spcAft>
-              <a:defRPr sz="2000" b="0">
-                <a:solidFill>
-                  <a:srgbClr val="333333"/>
-                </a:solidFill>
-                <a:latin typeface="Calibri"/>
-              </a:defRPr>
-            </a:pPr>
-            <a:r>
-              <a:t>      uses `$(UVM_HOME)/src/uvm_pkg.sv` and `+incdir+…</a:t>
-            </a:r>
-          </a:p>
-          <a:p>
-            <a:pPr>
-              <a:lnSpc>
-                <a:spcPts val="2200"/>
-              </a:lnSpc>
-              <a:spcAft>
-                <a:spcPts val="1000"/>
-              </a:spcAft>
-              <a:defRPr sz="2000" b="0">
-                <a:solidFill>
-                  <a:srgbClr val="333333"/>
-                </a:solidFill>
-                <a:latin typeface="Calibri"/>
-              </a:defRPr>
-            </a:pPr>
-            <a:r>
-              <a:t>• Make: One target to compile (Verilator + make in</a:t>
-            </a:r>
-          </a:p>
-          <a:p>
-            <a:pPr>
-              <a:lnSpc>
-                <a:spcPts val="2200"/>
-              </a:lnSpc>
-              <a:spcAft>
-                <a:spcPts val="1000"/>
-              </a:spcAft>
-              <a:defRPr sz="2000" b="0">
-                <a:solidFill>
-                  <a:srgbClr val="333333"/>
-                </a:solidFill>
-                <a:latin typeface="Calibri"/>
-              </a:defRPr>
-            </a:pPr>
-            <a:r>
-              <a:t>      obj_dir), one to run (`./obj_dir/Vtest_uvm_smoke +…</a:t>
+              <a:t>• `module2/examples/uvm_smoke/dut/simple_register.v` —</a:t>
+            </a:r>
+          </a:p>
+          <a:p>
+            <a:pPr>
+              <a:lnSpc>
+                <a:spcPts val="2200"/>
+              </a:lnSpc>
+              <a:spcAft>
+                <a:spcPts val="1000"/>
+              </a:spcAft>
+              <a:defRPr sz="2000" b="0">
+                <a:solidFill>
+                  <a:srgbClr val="333333"/>
+                </a:solidFill>
+                <a:latin typeface="Calibri"/>
+              </a:defRPr>
+            </a:pPr>
+            <a:r>
+              <a:t>      tiny DUT</a:t>
+            </a:r>
+          </a:p>
+          <a:p>
+            <a:pPr>
+              <a:lnSpc>
+                <a:spcPts val="2200"/>
+              </a:lnSpc>
+              <a:spcAft>
+                <a:spcPts val="1000"/>
+              </a:spcAft>
+              <a:defRPr sz="2000" b="0">
+                <a:solidFill>
+                  <a:srgbClr val="333333"/>
+                </a:solidFill>
+                <a:latin typeface="Calibri"/>
+              </a:defRPr>
+            </a:pPr>
+            <a:r>
+              <a:t>• `module2/examples/uvm_smoke/test_uvm_smoke.sv` —</a:t>
+            </a:r>
+          </a:p>
+          <a:p>
+            <a:pPr>
+              <a:lnSpc>
+                <a:spcPts val="2200"/>
+              </a:lnSpc>
+              <a:spcAft>
+                <a:spcPts val="1000"/>
+              </a:spcAft>
+              <a:defRPr sz="2000" b="0">
+                <a:solidFill>
+                  <a:srgbClr val="333333"/>
+                </a:solidFill>
+                <a:latin typeface="Calibri"/>
+              </a:defRPr>
+            </a:pPr>
+            <a:r>
+              <a:t>      transaction, agent, scoreboard</a:t>
+            </a:r>
+          </a:p>
+          <a:p>
+            <a:pPr>
+              <a:lnSpc>
+                <a:spcPts val="2200"/>
+              </a:lnSpc>
+              <a:spcAft>
+                <a:spcPts val="1000"/>
+              </a:spcAft>
+              <a:defRPr sz="2000" b="0">
+                <a:solidFill>
+                  <a:srgbClr val="333333"/>
+                </a:solidFill>
+                <a:latin typeface="Calibri"/>
+              </a:defRPr>
+            </a:pPr>
+            <a:r>
+              <a:t>• `module2/examples/uvm_smoke/Makefile` — Verilator +</a:t>
+            </a:r>
+          </a:p>
+          <a:p>
+            <a:pPr>
+              <a:lnSpc>
+                <a:spcPts val="2200"/>
+              </a:lnSpc>
+              <a:spcAft>
+                <a:spcPts val="1000"/>
+              </a:spcAft>
+              <a:defRPr sz="2000" b="0">
+                <a:solidFill>
+                  <a:srgbClr val="333333"/>
+                </a:solidFill>
+                <a:latin typeface="Calibri"/>
+              </a:defRPr>
+            </a:pPr>
+            <a:r>
+              <a:t>      UVM build</a:t>
             </a:r>
           </a:p>
         </p:txBody>
@@ -7541,7 +8905,7 @@
               </a:defRPr>
             </a:pPr>
             <a:r>
-              <a:t>Command reference highlights</a:t>
+              <a:t>Verification &amp; testing methods</a:t>
             </a:r>
           </a:p>
         </p:txBody>
@@ -7637,7 +9001,7 @@
               </a:defRPr>
             </a:pPr>
             <a:r>
-              <a:t>Environment checks</a:t>
+              <a:t>1. Transaction-level verification</a:t>
             </a:r>
           </a:p>
         </p:txBody>
@@ -7651,7 +9015,7 @@
         <p:spPr>
           <a:xfrm>
             <a:off x="548640" y="1234440"/>
-            <a:ext cx="11064240" cy="4937760"/>
+            <a:ext cx="5303520" cy="4754880"/>
           </a:xfrm>
           <a:prstGeom prst="rect">
             <a:avLst/>
@@ -7679,14 +9043,133 @@
               </a:defRPr>
             </a:pPr>
             <a:r>
-              <a:t>• verilator --version</a:t>
-            </a:r>
-          </a:p>
-        </p:txBody>
-      </p:sp>
-      <p:sp>
-        <p:nvSpPr>
-          <p:cNvPr id="4" name="TextBox 3"/>
+              <a:t>• Stimulus is a transaction (what</a:t>
+            </a:r>
+          </a:p>
+          <a:p>
+            <a:pPr>
+              <a:lnSpc>
+                <a:spcPts val="2200"/>
+              </a:lnSpc>
+              <a:spcAft>
+                <a:spcPts val="1000"/>
+              </a:spcAft>
+              <a:defRPr sz="2000" b="0">
+                <a:solidFill>
+                  <a:srgbClr val="333333"/>
+                </a:solidFill>
+                <a:latin typeface="Calibri"/>
+              </a:defRPr>
+            </a:pPr>
+            <a:r>
+              <a:t>      to write), not raw pin wiggles</a:t>
+            </a:r>
+          </a:p>
+          <a:p>
+            <a:pPr>
+              <a:lnSpc>
+                <a:spcPts val="2200"/>
+              </a:lnSpc>
+              <a:spcAft>
+                <a:spcPts val="1000"/>
+              </a:spcAft>
+              <a:defRPr sz="2000" b="0">
+                <a:solidFill>
+                  <a:srgbClr val="333333"/>
+                </a:solidFill>
+                <a:latin typeface="Calibri"/>
+              </a:defRPr>
+            </a:pPr>
+            <a:r>
+              <a:t>      in `initial` blocks.</a:t>
+            </a:r>
+          </a:p>
+          <a:p>
+            <a:pPr>
+              <a:lnSpc>
+                <a:spcPts val="2200"/>
+              </a:lnSpc>
+              <a:spcAft>
+                <a:spcPts val="1000"/>
+              </a:spcAft>
+              <a:defRPr sz="2000" b="0">
+                <a:solidFill>
+                  <a:srgbClr val="333333"/>
+                </a:solidFill>
+                <a:latin typeface="Calibri"/>
+              </a:defRPr>
+            </a:pPr>
+            <a:r>
+              <a:t>• The monitor reconstructs what</a:t>
+            </a:r>
+          </a:p>
+          <a:p>
+            <a:pPr>
+              <a:lnSpc>
+                <a:spcPts val="2200"/>
+              </a:lnSpc>
+              <a:spcAft>
+                <a:spcPts val="1000"/>
+              </a:spcAft>
+              <a:defRPr sz="2000" b="0">
+                <a:solidFill>
+                  <a:srgbClr val="333333"/>
+                </a:solidFill>
+                <a:latin typeface="Calibri"/>
+              </a:defRPr>
+            </a:pPr>
+            <a:r>
+              <a:t>      happened on the bus; the</a:t>
+            </a:r>
+          </a:p>
+          <a:p>
+            <a:pPr>
+              <a:lnSpc>
+                <a:spcPts val="2200"/>
+              </a:lnSpc>
+              <a:spcAft>
+                <a:spcPts val="1000"/>
+              </a:spcAft>
+              <a:defRPr sz="2000" b="0">
+                <a:solidFill>
+                  <a:srgbClr val="333333"/>
+                </a:solidFill>
+                <a:latin typeface="Calibri"/>
+              </a:defRPr>
+            </a:pPr>
+            <a:r>
+              <a:t>      scoreboard compares to expected.</a:t>
+            </a:r>
+          </a:p>
+        </p:txBody>
+      </p:sp>
+      <p:pic>
+        <p:nvPicPr>
+          <p:cNvPr id="4" name="Picture 3" descr="testing_methods.png"/>
+          <p:cNvPicPr>
+            <a:picLocks noChangeAspect="1"/>
+          </p:cNvPicPr>
+          <p:nvPr/>
+        </p:nvPicPr>
+        <p:blipFill>
+          <a:blip r:embed="rId2"/>
+          <a:stretch>
+            <a:fillRect/>
+          </a:stretch>
+        </p:blipFill>
+        <p:spPr>
+          <a:xfrm>
+            <a:off x="6172200" y="2094547"/>
+            <a:ext cx="5394960" cy="3034665"/>
+          </a:xfrm>
+          <a:prstGeom prst="rect">
+            <a:avLst/>
+          </a:prstGeom>
+        </p:spPr>
+      </p:pic>
+      <p:sp>
+        <p:nvSpPr>
+          <p:cNvPr id="5" name="TextBox 4"/>
           <p:cNvSpPr txBox="1"/>
           <p:nvPr/>
         </p:nvSpPr>
@@ -7775,7 +9258,7 @@
               </a:defRPr>
             </a:pPr>
             <a:r>
-              <a:t>Build and run uvm_smoke</a:t>
+              <a:t>2. Directed regression in uvm_smoke</a:t>
             </a:r>
           </a:p>
         </p:txBody>
@@ -7789,7 +9272,7 @@
         <p:spPr>
           <a:xfrm>
             <a:off x="548640" y="1234440"/>
-            <a:ext cx="11064240" cy="4937760"/>
+            <a:ext cx="5303520" cy="4754880"/>
           </a:xfrm>
           <a:prstGeom prst="rect">
             <a:avLst/>
@@ -7817,14 +9300,133 @@
               </a:defRPr>
             </a:pPr>
             <a:r>
-              <a:t>• cd module2/examples/uvm_smoke</a:t>
-            </a:r>
-          </a:p>
-        </p:txBody>
-      </p:sp>
-      <p:sp>
-        <p:nvSpPr>
-          <p:cNvPr id="4" name="TextBox 3"/>
+              <a:t>• Fixed sequence: 0x00, 0x01,</a:t>
+            </a:r>
+          </a:p>
+          <a:p>
+            <a:pPr>
+              <a:lnSpc>
+                <a:spcPts val="2200"/>
+              </a:lnSpc>
+              <a:spcAft>
+                <a:spcPts val="1000"/>
+              </a:spcAft>
+              <a:defRPr sz="2000" b="0">
+                <a:solidFill>
+                  <a:srgbClr val="333333"/>
+                </a:solidFill>
+                <a:latin typeface="Calibri"/>
+              </a:defRPr>
+            </a:pPr>
+            <a:r>
+              <a:t>      0x55, 0xAA, 0xFF — repeatable,</a:t>
+            </a:r>
+          </a:p>
+          <a:p>
+            <a:pPr>
+              <a:lnSpc>
+                <a:spcPts val="2200"/>
+              </a:lnSpc>
+              <a:spcAft>
+                <a:spcPts val="1000"/>
+              </a:spcAft>
+              <a:defRPr sz="2000" b="0">
+                <a:solidFill>
+                  <a:srgbClr val="333333"/>
+                </a:solidFill>
+                <a:latin typeface="Calibri"/>
+              </a:defRPr>
+            </a:pPr>
+            <a:r>
+              <a:t>      easy to debug.</a:t>
+            </a:r>
+          </a:p>
+          <a:p>
+            <a:pPr>
+              <a:lnSpc>
+                <a:spcPts val="2200"/>
+              </a:lnSpc>
+              <a:spcAft>
+                <a:spcPts val="1000"/>
+              </a:spcAft>
+              <a:defRPr sz="2000" b="0">
+                <a:solidFill>
+                  <a:srgbClr val="333333"/>
+                </a:solidFill>
+                <a:latin typeface="Calibri"/>
+              </a:defRPr>
+            </a:pPr>
+            <a:r>
+              <a:t>• Pass criteria: scoreboard</a:t>
+            </a:r>
+          </a:p>
+          <a:p>
+            <a:pPr>
+              <a:lnSpc>
+                <a:spcPts val="2200"/>
+              </a:lnSpc>
+              <a:spcAft>
+                <a:spcPts val="1000"/>
+              </a:spcAft>
+              <a:defRPr sz="2000" b="0">
+                <a:solidFill>
+                  <a:srgbClr val="333333"/>
+                </a:solidFill>
+                <a:latin typeface="Calibri"/>
+              </a:defRPr>
+            </a:pPr>
+            <a:r>
+              <a:t>      reports matches, zero</a:t>
+            </a:r>
+          </a:p>
+          <a:p>
+            <a:pPr>
+              <a:lnSpc>
+                <a:spcPts val="2200"/>
+              </a:lnSpc>
+              <a:spcAft>
+                <a:spcPts val="1000"/>
+              </a:spcAft>
+              <a:defRPr sz="2000" b="0">
+                <a:solidFill>
+                  <a:srgbClr val="333333"/>
+                </a:solidFill>
+                <a:latin typeface="Calibri"/>
+              </a:defRPr>
+            </a:pPr>
+            <a:r>
+              <a:t>      mismatches.</a:t>
+            </a:r>
+          </a:p>
+        </p:txBody>
+      </p:sp>
+      <p:pic>
+        <p:nvPicPr>
+          <p:cNvPr id="4" name="Picture 3" descr="testing_methods.png"/>
+          <p:cNvPicPr>
+            <a:picLocks noChangeAspect="1"/>
+          </p:cNvPicPr>
+          <p:nvPr/>
+        </p:nvPicPr>
+        <p:blipFill>
+          <a:blip r:embed="rId2"/>
+          <a:stretch>
+            <a:fillRect/>
+          </a:stretch>
+        </p:blipFill>
+        <p:spPr>
+          <a:xfrm>
+            <a:off x="6172200" y="2094547"/>
+            <a:ext cx="5394960" cy="3034665"/>
+          </a:xfrm>
+          <a:prstGeom prst="rect">
+            <a:avLst/>
+          </a:prstGeom>
+        </p:spPr>
+      </p:pic>
+      <p:sp>
+        <p:nvSpPr>
+          <p:cNvPr id="5" name="TextBox 4"/>
           <p:cNvSpPr txBox="1"/>
           <p:nvPr/>
         </p:nvSpPr>
@@ -7913,7 +9515,7 @@
               </a:defRPr>
             </a:pPr>
             <a:r>
-              <a:t>Module script (from repo root)</a:t>
+              <a:t>3. Skills you reuse on UART/SPI/I²C</a:t>
             </a:r>
           </a:p>
         </p:txBody>
@@ -7927,7 +9529,7 @@
         <p:spPr>
           <a:xfrm>
             <a:off x="548640" y="1234440"/>
-            <a:ext cx="11064240" cy="4937760"/>
+            <a:ext cx="5303520" cy="4754880"/>
           </a:xfrm>
           <a:prstGeom prst="rect">
             <a:avLst/>
@@ -7955,33 +9557,133 @@
               </a:defRPr>
             </a:pPr>
             <a:r>
-              <a:t>• ./scripts/module2.sh --check # Environment + UVM +</a:t>
-            </a:r>
-          </a:p>
-          <a:p>
-            <a:pPr>
-              <a:lnSpc>
-                <a:spcPts val="2200"/>
-              </a:lnSpc>
-              <a:spcAft>
-                <a:spcPts val="1000"/>
-              </a:spcAft>
-              <a:defRPr sz="2000" b="0">
-                <a:solidFill>
-                  <a:srgbClr val="333333"/>
-                </a:solidFill>
-                <a:latin typeface="Calibri"/>
-              </a:defRPr>
-            </a:pPr>
-            <a:r>
-              <a:t>      example dirs</a:t>
-            </a:r>
-          </a:p>
-        </p:txBody>
-      </p:sp>
-      <p:sp>
-        <p:nvSpPr>
-          <p:cNvPr id="4" name="TextBox 3"/>
+              <a:t>• Same agent pattern; only the</a:t>
+            </a:r>
+          </a:p>
+          <a:p>
+            <a:pPr>
+              <a:lnSpc>
+                <a:spcPts val="2200"/>
+              </a:lnSpc>
+              <a:spcAft>
+                <a:spcPts val="1000"/>
+              </a:spcAft>
+              <a:defRPr sz="2000" b="0">
+                <a:solidFill>
+                  <a:srgbClr val="333333"/>
+                </a:solidFill>
+                <a:latin typeface="Calibri"/>
+              </a:defRPr>
+            </a:pPr>
+            <a:r>
+              <a:t>      transaction and protocol timing</a:t>
+            </a:r>
+          </a:p>
+          <a:p>
+            <a:pPr>
+              <a:lnSpc>
+                <a:spcPts val="2200"/>
+              </a:lnSpc>
+              <a:spcAft>
+                <a:spcPts val="1000"/>
+              </a:spcAft>
+              <a:defRPr sz="2000" b="0">
+                <a:solidFill>
+                  <a:srgbClr val="333333"/>
+                </a:solidFill>
+                <a:latin typeface="Calibri"/>
+              </a:defRPr>
+            </a:pPr>
+            <a:r>
+              <a:t>      in driver/monitor change.</a:t>
+            </a:r>
+          </a:p>
+          <a:p>
+            <a:pPr>
+              <a:lnSpc>
+                <a:spcPts val="2200"/>
+              </a:lnSpc>
+              <a:spcAft>
+                <a:spcPts val="1000"/>
+              </a:spcAft>
+              <a:defRPr sz="2000" b="0">
+                <a:solidFill>
+                  <a:srgbClr val="333333"/>
+                </a:solidFill>
+                <a:latin typeface="Calibri"/>
+              </a:defRPr>
+            </a:pPr>
+            <a:r>
+              <a:t>• Read UVM log lines: DRIVER,</a:t>
+            </a:r>
+          </a:p>
+          <a:p>
+            <a:pPr>
+              <a:lnSpc>
+                <a:spcPts val="2200"/>
+              </a:lnSpc>
+              <a:spcAft>
+                <a:spcPts val="1000"/>
+              </a:spcAft>
+              <a:defRPr sz="2000" b="0">
+                <a:solidFill>
+                  <a:srgbClr val="333333"/>
+                </a:solidFill>
+                <a:latin typeface="Calibri"/>
+              </a:defRPr>
+            </a:pPr>
+            <a:r>
+              <a:t>      MONITOR, SCOREBOARD, final</a:t>
+            </a:r>
+          </a:p>
+          <a:p>
+            <a:pPr>
+              <a:lnSpc>
+                <a:spcPts val="2200"/>
+              </a:lnSpc>
+              <a:spcAft>
+                <a:spcPts val="1000"/>
+              </a:spcAft>
+              <a:defRPr sz="2000" b="0">
+                <a:solidFill>
+                  <a:srgbClr val="333333"/>
+                </a:solidFill>
+                <a:latin typeface="Calibri"/>
+              </a:defRPr>
+            </a:pPr>
+            <a:r>
+              <a:t>      summary.</a:t>
+            </a:r>
+          </a:p>
+        </p:txBody>
+      </p:sp>
+      <p:pic>
+        <p:nvPicPr>
+          <p:cNvPr id="4" name="Picture 3" descr="testing_methods.png"/>
+          <p:cNvPicPr>
+            <a:picLocks noChangeAspect="1"/>
+          </p:cNvPicPr>
+          <p:nvPr/>
+        </p:nvPicPr>
+        <p:blipFill>
+          <a:blip r:embed="rId2"/>
+          <a:stretch>
+            <a:fillRect/>
+          </a:stretch>
+        </p:blipFill>
+        <p:spPr>
+          <a:xfrm>
+            <a:off x="6172200" y="2094547"/>
+            <a:ext cx="5394960" cy="3034665"/>
+          </a:xfrm>
+          <a:prstGeom prst="rect">
+            <a:avLst/>
+          </a:prstGeom>
+        </p:spPr>
+      </p:pic>
+      <p:sp>
+        <p:nvSpPr>
+          <p:cNvPr id="5" name="TextBox 4"/>
           <p:cNvSpPr txBox="1"/>
           <p:nvPr/>
         </p:nvSpPr>
@@ -8070,7 +9772,7 @@
               </a:defRPr>
             </a:pPr>
             <a:r>
-              <a:t>Hands-on examples</a:t>
+              <a:t>Syllabus topics</a:t>
             </a:r>
           </a:p>
         </p:txBody>
@@ -8166,7 +9868,7 @@
               </a:defRPr>
             </a:pPr>
             <a:r>
-              <a:t>Module 2 self-check</a:t>
+              <a:t>1. Basic Testbench (Directed Tests, Pin Wiggling)</a:t>
             </a:r>
           </a:p>
         </p:txBody>
@@ -8179,15 +9881,13 @@
         </p:nvSpPr>
         <p:spPr>
           <a:xfrm>
-            <a:off x="548640" y="1051560"/>
-            <a:ext cx="11064240" cy="914400"/>
+            <a:off x="548640" y="1234440"/>
+            <a:ext cx="11064240" cy="4937760"/>
           </a:xfrm>
           <a:prstGeom prst="rect">
             <a:avLst/>
           </a:prstGeom>
-          <a:solidFill>
-            <a:srgbClr val="F4F4F4"/>
-          </a:solidFill>
+          <a:noFill/>
         </p:spPr>
         <p:txBody>
           <a:bodyPr wrap="square">
@@ -8200,48 +9900,119 @@
                 <a:spcPts val="2200"/>
               </a:lnSpc>
               <a:spcAft>
-                <a:spcPts val="200"/>
-              </a:spcAft>
-              <a:defRPr sz="2000" b="0">
-                <a:solidFill>
-                  <a:srgbClr val="333333"/>
-                </a:solidFill>
-                <a:latin typeface="Consolas"/>
-              </a:defRPr>
-            </a:pPr>
-            <a:r>
-              <a:t>$ ./scripts/module2.sh --help</a:t>
-            </a:r>
-          </a:p>
-        </p:txBody>
-      </p:sp>
-      <p:pic>
-        <p:nvPicPr>
-          <p:cNvPr id="4" name="Picture 3" descr="module2_check.png"/>
-          <p:cNvPicPr>
-            <a:picLocks noChangeAspect="1"/>
-          </p:cNvPicPr>
-          <p:nvPr/>
-        </p:nvPicPr>
-        <p:blipFill>
-          <a:blip r:embed="rId2"/>
-          <a:stretch>
-            <a:fillRect/>
-          </a:stretch>
-        </p:blipFill>
-        <p:spPr>
-          <a:xfrm>
-            <a:off x="548640" y="1965960"/>
-            <a:ext cx="7071358" cy="3977639"/>
-          </a:xfrm>
-          <a:prstGeom prst="rect">
-            <a:avLst/>
-          </a:prstGeom>
-        </p:spPr>
-      </p:pic>
-      <p:sp>
-        <p:nvSpPr>
-          <p:cNvPr id="5" name="TextBox 4"/>
+                <a:spcPts val="1000"/>
+              </a:spcAft>
+              <a:defRPr sz="2000" b="0">
+                <a:solidFill>
+                  <a:srgbClr val="333333"/>
+                </a:solidFill>
+                <a:latin typeface="Calibri"/>
+              </a:defRPr>
+            </a:pPr>
+            <a:r>
+              <a:t>• Directed test: Drive specific inputs (e.g., reset,</a:t>
+            </a:r>
+          </a:p>
+          <a:p>
+            <a:pPr>
+              <a:lnSpc>
+                <a:spcPts val="2200"/>
+              </a:lnSpc>
+              <a:spcAft>
+                <a:spcPts val="1000"/>
+              </a:spcAft>
+              <a:defRPr sz="2000" b="0">
+                <a:solidFill>
+                  <a:srgbClr val="333333"/>
+                </a:solidFill>
+                <a:latin typeface="Calibri"/>
+              </a:defRPr>
+            </a:pPr>
+            <a:r>
+              <a:t>      then a fixed sequence of data) and check expecte…</a:t>
+            </a:r>
+          </a:p>
+          <a:p>
+            <a:pPr>
+              <a:lnSpc>
+                <a:spcPts val="2200"/>
+              </a:lnSpc>
+              <a:spcAft>
+                <a:spcPts val="1000"/>
+              </a:spcAft>
+              <a:defRPr sz="2000" b="0">
+                <a:solidFill>
+                  <a:srgbClr val="333333"/>
+                </a:solidFill>
+                <a:latin typeface="Calibri"/>
+              </a:defRPr>
+            </a:pPr>
+            <a:r>
+              <a:t>• Pin wiggling: The testbench directly drives and</a:t>
+            </a:r>
+          </a:p>
+          <a:p>
+            <a:pPr>
+              <a:lnSpc>
+                <a:spcPts val="2200"/>
+              </a:lnSpc>
+              <a:spcAft>
+                <a:spcPts val="1000"/>
+              </a:spcAft>
+              <a:defRPr sz="2000" b="0">
+                <a:solidFill>
+                  <a:srgbClr val="333333"/>
+                </a:solidFill>
+                <a:latin typeface="Calibri"/>
+              </a:defRPr>
+            </a:pPr>
+            <a:r>
+              <a:t>      samples DUT pins (clock, reset, data, enable) — no…</a:t>
+            </a:r>
+          </a:p>
+          <a:p>
+            <a:pPr>
+              <a:lnSpc>
+                <a:spcPts val="2200"/>
+              </a:lnSpc>
+              <a:spcAft>
+                <a:spcPts val="1000"/>
+              </a:spcAft>
+              <a:defRPr sz="2000" b="0">
+                <a:solidFill>
+                  <a:srgbClr val="333333"/>
+                </a:solidFill>
+                <a:latin typeface="Calibri"/>
+              </a:defRPr>
+            </a:pPr>
+            <a:r>
+              <a:t>• Relation to Module 1: The spec_to_rtl example used a</a:t>
+            </a:r>
+          </a:p>
+          <a:p>
+            <a:pPr>
+              <a:lnSpc>
+                <a:spcPts val="2200"/>
+              </a:lnSpc>
+              <a:spcAft>
+                <a:spcPts val="1000"/>
+              </a:spcAft>
+              <a:defRPr sz="2000" b="0">
+                <a:solidFill>
+                  <a:srgbClr val="333333"/>
+                </a:solidFill>
+                <a:latin typeface="Calibri"/>
+              </a:defRPr>
+            </a:pPr>
+            <a:r>
+              <a:t>      C++ harness to drive clk/rst_n/enable and chec…</a:t>
+            </a:r>
+          </a:p>
+        </p:txBody>
+      </p:sp>
+      <p:sp>
+        <p:nvSpPr>
+          <p:cNvPr id="4" name="TextBox 3"/>
           <p:cNvSpPr txBox="1"/>
           <p:nvPr/>
         </p:nvSpPr>
@@ -8330,7 +10101,7 @@
               </a:defRPr>
             </a:pPr>
             <a:r>
-              <a:t>Exercise scaffold</a:t>
+              <a:t>2. Evolution to UVM+SV Testbench</a:t>
             </a:r>
           </a:p>
         </p:txBody>
@@ -8343,15 +10114,13 @@
         </p:nvSpPr>
         <p:spPr>
           <a:xfrm>
-            <a:off x="548640" y="1143000"/>
-            <a:ext cx="11064240" cy="5029200"/>
+            <a:off x="548640" y="1234440"/>
+            <a:ext cx="11064240" cy="4937760"/>
           </a:xfrm>
           <a:prstGeom prst="rect">
             <a:avLst/>
           </a:prstGeom>
-          <a:solidFill>
-            <a:srgbClr val="F4F4F4"/>
-          </a:solidFill>
+          <a:noFill/>
         </p:spPr>
         <p:txBody>
           <a:bodyPr wrap="square">
@@ -8364,17 +10133,226 @@
                 <a:spcPts val="2200"/>
               </a:lnSpc>
               <a:spcAft>
-                <a:spcPts val="400"/>
-              </a:spcAft>
-              <a:defRPr sz="2000" b="0">
-                <a:solidFill>
-                  <a:srgbClr val="333333"/>
-                </a:solidFill>
-                <a:latin typeface="Consolas"/>
-              </a:defRPr>
-            </a:pPr>
-            <a:r>
-              <a:t>./scripts/module2.sh --scaffold</a:t>
+                <a:spcPts val="1000"/>
+              </a:spcAft>
+              <a:defRPr sz="2000" b="0">
+                <a:solidFill>
+                  <a:srgbClr val="333333"/>
+                </a:solidFill>
+                <a:latin typeface="Calibri"/>
+              </a:defRPr>
+            </a:pPr>
+            <a:r>
+              <a:t>• Transaction (`uvm_sequence_item`): Represents “one</a:t>
+            </a:r>
+          </a:p>
+          <a:p>
+            <a:pPr>
+              <a:lnSpc>
+                <a:spcPts val="2200"/>
+              </a:lnSpc>
+              <a:spcAft>
+                <a:spcPts val="1000"/>
+              </a:spcAft>
+              <a:defRPr sz="2000" b="0">
+                <a:solidFill>
+                  <a:srgbClr val="333333"/>
+                </a:solidFill>
+                <a:latin typeface="Calibri"/>
+              </a:defRPr>
+            </a:pPr>
+            <a:r>
+              <a:t>      operation” (e.g., one write to a register: data…</a:t>
+            </a:r>
+          </a:p>
+          <a:p>
+            <a:pPr>
+              <a:lnSpc>
+                <a:spcPts val="2200"/>
+              </a:lnSpc>
+              <a:spcAft>
+                <a:spcPts val="1000"/>
+              </a:spcAft>
+              <a:defRPr sz="2000" b="0">
+                <a:solidFill>
+                  <a:srgbClr val="333333"/>
+                </a:solidFill>
+                <a:latin typeface="Calibri"/>
+              </a:defRPr>
+            </a:pPr>
+            <a:r>
+              <a:t>• Sequence: Produces a stream of transactions (e.g., a</a:t>
+            </a:r>
+          </a:p>
+          <a:p>
+            <a:pPr>
+              <a:lnSpc>
+                <a:spcPts val="2200"/>
+              </a:lnSpc>
+              <a:spcAft>
+                <a:spcPts val="1000"/>
+              </a:spcAft>
+              <a:defRPr sz="2000" b="0">
+                <a:solidFill>
+                  <a:srgbClr val="333333"/>
+                </a:solidFill>
+                <a:latin typeface="Calibri"/>
+              </a:defRPr>
+            </a:pPr>
+            <a:r>
+              <a:t>      few directed values: 0x00, 0x01, 0x55, 0xAA, 0…</a:t>
+            </a:r>
+          </a:p>
+          <a:p>
+            <a:pPr>
+              <a:lnSpc>
+                <a:spcPts val="2200"/>
+              </a:lnSpc>
+              <a:spcAft>
+                <a:spcPts val="1000"/>
+              </a:spcAft>
+              <a:defRPr sz="2000" b="0">
+                <a:solidFill>
+                  <a:srgbClr val="333333"/>
+                </a:solidFill>
+                <a:latin typeface="Calibri"/>
+              </a:defRPr>
+            </a:pPr>
+            <a:r>
+              <a:t>• Driver: Gets transactions from the sequencer and</a:t>
+            </a:r>
+          </a:p>
+          <a:p>
+            <a:pPr>
+              <a:lnSpc>
+                <a:spcPts val="2200"/>
+              </a:lnSpc>
+              <a:spcAft>
+                <a:spcPts val="1000"/>
+              </a:spcAft>
+              <a:defRPr sz="2000" b="0">
+                <a:solidFill>
+                  <a:srgbClr val="333333"/>
+                </a:solidFill>
+                <a:latin typeface="Calibri"/>
+              </a:defRPr>
+            </a:pPr>
+            <a:r>
+              <a:t>      drives the DUT interface (e.g., set enable and d o…</a:t>
+            </a:r>
+          </a:p>
+          <a:p>
+            <a:pPr>
+              <a:lnSpc>
+                <a:spcPts val="2200"/>
+              </a:lnSpc>
+              <a:spcAft>
+                <a:spcPts val="1000"/>
+              </a:spcAft>
+              <a:defRPr sz="2000" b="0">
+                <a:solidFill>
+                  <a:srgbClr val="333333"/>
+                </a:solidFill>
+                <a:latin typeface="Calibri"/>
+              </a:defRPr>
+            </a:pPr>
+            <a:r>
+              <a:t>• Monitor: Observes the DUT interface and turns pin</a:t>
+            </a:r>
+          </a:p>
+          <a:p>
+            <a:pPr>
+              <a:lnSpc>
+                <a:spcPts val="2200"/>
+              </a:lnSpc>
+              <a:spcAft>
+                <a:spcPts val="1000"/>
+              </a:spcAft>
+              <a:defRPr sz="2000" b="0">
+                <a:solidFill>
+                  <a:srgbClr val="333333"/>
+                </a:solidFill>
+                <a:latin typeface="Calibri"/>
+              </a:defRPr>
+            </a:pPr>
+            <a:r>
+              <a:t>      activity into transactions, then sends them to th…</a:t>
+            </a:r>
+          </a:p>
+          <a:p>
+            <a:pPr>
+              <a:lnSpc>
+                <a:spcPts val="2200"/>
+              </a:lnSpc>
+              <a:spcAft>
+                <a:spcPts val="1000"/>
+              </a:spcAft>
+              <a:defRPr sz="2000" b="0">
+                <a:solidFill>
+                  <a:srgbClr val="333333"/>
+                </a:solidFill>
+                <a:latin typeface="Calibri"/>
+              </a:defRPr>
+            </a:pPr>
+            <a:r>
+              <a:t>• Scoreboard: Compares “expected” (what we sent) vs</a:t>
+            </a:r>
+          </a:p>
+          <a:p>
+            <a:pPr>
+              <a:lnSpc>
+                <a:spcPts val="2200"/>
+              </a:lnSpc>
+              <a:spcAft>
+                <a:spcPts val="1000"/>
+              </a:spcAft>
+              <a:defRPr sz="2000" b="0">
+                <a:solidFill>
+                  <a:srgbClr val="333333"/>
+                </a:solidFill>
+                <a:latin typeface="Calibri"/>
+              </a:defRPr>
+            </a:pPr>
+            <a:r>
+              <a:t>      “observed” (what the monitor saw). Reports matche…</a:t>
+            </a:r>
+          </a:p>
+          <a:p>
+            <a:pPr>
+              <a:lnSpc>
+                <a:spcPts val="2200"/>
+              </a:lnSpc>
+              <a:spcAft>
+                <a:spcPts val="1000"/>
+              </a:spcAft>
+              <a:defRPr sz="2000" b="0">
+                <a:solidFill>
+                  <a:srgbClr val="333333"/>
+                </a:solidFill>
+                <a:latin typeface="Calibri"/>
+              </a:defRPr>
+            </a:pPr>
+            <a:r>
+              <a:t>• Agent: Groups driver, monitor, and sequencer for one</a:t>
+            </a:r>
+          </a:p>
+          <a:p>
+            <a:pPr>
+              <a:lnSpc>
+                <a:spcPts val="2200"/>
+              </a:lnSpc>
+              <a:spcAft>
+                <a:spcPts val="1000"/>
+              </a:spcAft>
+              <a:defRPr sz="2000" b="0">
+                <a:solidFill>
+                  <a:srgbClr val="333333"/>
+                </a:solidFill>
+                <a:latin typeface="Calibri"/>
+              </a:defRPr>
+            </a:pPr>
+            <a:r>
+              <a:t>      interface. Env: Contains agent(s) and scoreboa…</a:t>
             </a:r>
           </a:p>
         </p:txBody>
@@ -8703,7 +10681,7 @@
               </a:defRPr>
             </a:pPr>
             <a:r>
-              <a:t>Example 1: UVM smoke test</a:t>
+              <a:t>3. Toolchain (Verilator, UVM_HOME, Make)</a:t>
             </a:r>
           </a:p>
         </p:txBody>
@@ -8745,83 +10723,102 @@
               </a:defRPr>
             </a:pPr>
             <a:r>
-              <a:t>• UVM phases and reporting (DRIVER, MONITOR,</a:t>
-            </a:r>
-          </a:p>
-          <a:p>
-            <a:pPr>
-              <a:lnSpc>
-                <a:spcPts val="2200"/>
-              </a:lnSpc>
-              <a:spcAft>
-                <a:spcPts val="1000"/>
-              </a:spcAft>
-              <a:defRPr sz="2000" b="0">
-                <a:solidFill>
-                  <a:srgbClr val="333333"/>
-                </a:solidFill>
-                <a:latin typeface="Calibri"/>
-              </a:defRPr>
-            </a:pPr>
-            <a:r>
-              <a:t>      SCOREBOARD messages).</a:t>
-            </a:r>
-          </a:p>
-          <a:p>
-            <a:pPr>
-              <a:lnSpc>
-                <a:spcPts val="2200"/>
-              </a:lnSpc>
-              <a:spcAft>
-                <a:spcPts val="1000"/>
-              </a:spcAft>
-              <a:defRPr sz="2000" b="0">
-                <a:solidFill>
-                  <a:srgbClr val="333333"/>
-                </a:solidFill>
-                <a:latin typeface="Calibri"/>
-              </a:defRPr>
-            </a:pPr>
-            <a:r>
-              <a:t>• Directed sequence: a few data values (0x00, 0x01,</a:t>
-            </a:r>
-          </a:p>
-          <a:p>
-            <a:pPr>
-              <a:lnSpc>
-                <a:spcPts val="2200"/>
-              </a:lnSpc>
-              <a:spcAft>
-                <a:spcPts val="1000"/>
-              </a:spcAft>
-              <a:defRPr sz="2000" b="0">
-                <a:solidFill>
-                  <a:srgbClr val="333333"/>
-                </a:solidFill>
-                <a:latin typeface="Calibri"/>
-              </a:defRPr>
-            </a:pPr>
-            <a:r>
-              <a:t>      0x55, 0xAA, 0xFF) driven and checked.</a:t>
-            </a:r>
-          </a:p>
-          <a:p>
-            <a:pPr>
-              <a:lnSpc>
-                <a:spcPts val="2200"/>
-              </a:lnSpc>
-              <a:spcAft>
-                <a:spcPts val="1000"/>
-              </a:spcAft>
-              <a:defRPr sz="2000" b="0">
-                <a:solidFill>
-                  <a:srgbClr val="333333"/>
-                </a:solidFill>
-                <a:latin typeface="Calibri"/>
-              </a:defRPr>
-            </a:pPr>
-            <a:r>
-              <a:t>• Final scoreboard summary (matches/mismatches).</a:t>
+              <a:t>• Verilator: Compiles SystemVerilog (including UVM) +</a:t>
+            </a:r>
+          </a:p>
+          <a:p>
+            <a:pPr>
+              <a:lnSpc>
+                <a:spcPts val="2200"/>
+              </a:lnSpc>
+              <a:spcAft>
+                <a:spcPts val="1000"/>
+              </a:spcAft>
+              <a:defRPr sz="2000" b="0">
+                <a:solidFill>
+                  <a:srgbClr val="333333"/>
+                </a:solidFill>
+                <a:latin typeface="Calibri"/>
+              </a:defRPr>
+            </a:pPr>
+            <a:r>
+              <a:t>      C++ into an executable. Key flags: `-sv`, `--ti…</a:t>
+            </a:r>
+          </a:p>
+          <a:p>
+            <a:pPr>
+              <a:lnSpc>
+                <a:spcPts val="2200"/>
+              </a:lnSpc>
+              <a:spcAft>
+                <a:spcPts val="1000"/>
+              </a:spcAft>
+              <a:defRPr sz="2000" b="0">
+                <a:solidFill>
+                  <a:srgbClr val="333333"/>
+                </a:solidFill>
+                <a:latin typeface="Calibri"/>
+              </a:defRPr>
+            </a:pPr>
+            <a:r>
+              <a:t>• UVM_HOME: Points to the UVM library root; the build</a:t>
+            </a:r>
+          </a:p>
+          <a:p>
+            <a:pPr>
+              <a:lnSpc>
+                <a:spcPts val="2200"/>
+              </a:lnSpc>
+              <a:spcAft>
+                <a:spcPts val="1000"/>
+              </a:spcAft>
+              <a:defRPr sz="2000" b="0">
+                <a:solidFill>
+                  <a:srgbClr val="333333"/>
+                </a:solidFill>
+                <a:latin typeface="Calibri"/>
+              </a:defRPr>
+            </a:pPr>
+            <a:r>
+              <a:t>      uses `$(UVM_HOME)/src/uvm_pkg.sv` and `+incdir+…</a:t>
+            </a:r>
+          </a:p>
+          <a:p>
+            <a:pPr>
+              <a:lnSpc>
+                <a:spcPts val="2200"/>
+              </a:lnSpc>
+              <a:spcAft>
+                <a:spcPts val="1000"/>
+              </a:spcAft>
+              <a:defRPr sz="2000" b="0">
+                <a:solidFill>
+                  <a:srgbClr val="333333"/>
+                </a:solidFill>
+                <a:latin typeface="Calibri"/>
+              </a:defRPr>
+            </a:pPr>
+            <a:r>
+              <a:t>• Make: One target to compile (Verilator + make in</a:t>
+            </a:r>
+          </a:p>
+          <a:p>
+            <a:pPr>
+              <a:lnSpc>
+                <a:spcPts val="2200"/>
+              </a:lnSpc>
+              <a:spcAft>
+                <a:spcPts val="1000"/>
+              </a:spcAft>
+              <a:defRPr sz="2000" b="0">
+                <a:solidFill>
+                  <a:srgbClr val="333333"/>
+                </a:solidFill>
+                <a:latin typeface="Calibri"/>
+              </a:defRPr>
+            </a:pPr>
+            <a:r>
+              <a:t>      obj_dir), one to run (`./obj_dir/Vtest_uvm_smoke +…</a:t>
             </a:r>
           </a:p>
         </p:txBody>
@@ -8891,8 +10888,8 @@
         </p:nvSpPr>
         <p:spPr>
           <a:xfrm>
-            <a:off x="548640" y="411480"/>
-            <a:ext cx="11064240" cy="777240"/>
+            <a:off x="548640" y="2743200"/>
+            <a:ext cx="11064240" cy="1371600"/>
           </a:xfrm>
           <a:prstGeom prst="rect">
             <a:avLst/>
@@ -8905,11 +10902,11 @@
           </a:bodyPr>
           <a:lstStyle/>
           <a:p>
-            <a:pPr>
-              <a:lnSpc>
-                <a:spcPts val="2200"/>
-              </a:lnSpc>
-              <a:defRPr sz="2800" b="1">
+            <a:pPr algn="ctr">
+              <a:lnSpc>
+                <a:spcPts val="2200"/>
+              </a:lnSpc>
+              <a:defRPr sz="3600" b="1">
                 <a:solidFill>
                   <a:srgbClr val="1A1A2E"/>
                 </a:solidFill>
@@ -8917,7 +10914,7 @@
               </a:defRPr>
             </a:pPr>
             <a:r>
-              <a:t>Demo: UVM smoke test</a:t>
+              <a:t>Command reference highlights</a:t>
             </a:r>
           </a:p>
         </p:txBody>
@@ -8925,74 +10922,6 @@
       <p:sp>
         <p:nvSpPr>
           <p:cNvPr id="3" name="TextBox 2"/>
-          <p:cNvSpPr txBox="1"/>
-          <p:nvPr/>
-        </p:nvSpPr>
-        <p:spPr>
-          <a:xfrm>
-            <a:off x="548640" y="1051560"/>
-            <a:ext cx="11064240" cy="914400"/>
-          </a:xfrm>
-          <a:prstGeom prst="rect">
-            <a:avLst/>
-          </a:prstGeom>
-          <a:solidFill>
-            <a:srgbClr val="F4F4F4"/>
-          </a:solidFill>
-        </p:spPr>
-        <p:txBody>
-          <a:bodyPr wrap="square">
-            <a:noAutofit/>
-          </a:bodyPr>
-          <a:lstStyle/>
-          <a:p>
-            <a:pPr>
-              <a:lnSpc>
-                <a:spcPts val="2200"/>
-              </a:lnSpc>
-              <a:spcAft>
-                <a:spcPts val="200"/>
-              </a:spcAft>
-              <a:defRPr sz="2000" b="0">
-                <a:solidFill>
-                  <a:srgbClr val="333333"/>
-                </a:solidFill>
-                <a:latin typeface="Consolas"/>
-              </a:defRPr>
-            </a:pPr>
-            <a:r>
-              <a:t>$ ./scripts/module2.sh --run</a:t>
-            </a:r>
-          </a:p>
-        </p:txBody>
-      </p:sp>
-      <p:pic>
-        <p:nvPicPr>
-          <p:cNvPr id="4" name="Picture 3" descr="uvm_smoke.png"/>
-          <p:cNvPicPr>
-            <a:picLocks noChangeAspect="1"/>
-          </p:cNvPicPr>
-          <p:nvPr/>
-        </p:nvPicPr>
-        <p:blipFill>
-          <a:blip r:embed="rId2"/>
-          <a:stretch>
-            <a:fillRect/>
-          </a:stretch>
-        </p:blipFill>
-        <p:spPr>
-          <a:xfrm>
-            <a:off x="548640" y="1965960"/>
-            <a:ext cx="7071358" cy="3977639"/>
-          </a:xfrm>
-          <a:prstGeom prst="rect">
-            <a:avLst/>
-          </a:prstGeom>
-        </p:spPr>
-      </p:pic>
-      <p:sp>
-        <p:nvSpPr>
-          <p:cNvPr id="5" name="TextBox 4"/>
           <p:cNvSpPr txBox="1"/>
           <p:nvPr/>
         </p:nvSpPr>
@@ -9055,8 +10984,8 @@
         </p:nvSpPr>
         <p:spPr>
           <a:xfrm>
-            <a:off x="548640" y="2743200"/>
-            <a:ext cx="11064240" cy="1371600"/>
+            <a:off x="548640" y="411480"/>
+            <a:ext cx="11064240" cy="777240"/>
           </a:xfrm>
           <a:prstGeom prst="rect">
             <a:avLst/>
@@ -9069,11 +10998,11 @@
           </a:bodyPr>
           <a:lstStyle/>
           <a:p>
-            <a:pPr algn="ctr">
-              <a:lnSpc>
-                <a:spcPts val="2200"/>
-              </a:lnSpc>
-              <a:defRPr sz="3600" b="1">
+            <a:pPr>
+              <a:lnSpc>
+                <a:spcPts val="2200"/>
+              </a:lnSpc>
+              <a:defRPr sz="2800" b="1">
                 <a:solidFill>
                   <a:srgbClr val="1A1A2E"/>
                 </a:solidFill>
@@ -9081,7 +11010,7 @@
               </a:defRPr>
             </a:pPr>
             <a:r>
-              <a:t>Practice &amp; assessment</a:t>
+              <a:t>Environment checks</a:t>
             </a:r>
           </a:p>
         </p:txBody>
@@ -9089,6 +11018,48 @@
       <p:sp>
         <p:nvSpPr>
           <p:cNvPr id="3" name="TextBox 2"/>
+          <p:cNvSpPr txBox="1"/>
+          <p:nvPr/>
+        </p:nvSpPr>
+        <p:spPr>
+          <a:xfrm>
+            <a:off x="548640" y="1234440"/>
+            <a:ext cx="11064240" cy="4937760"/>
+          </a:xfrm>
+          <a:prstGeom prst="rect">
+            <a:avLst/>
+          </a:prstGeom>
+          <a:noFill/>
+        </p:spPr>
+        <p:txBody>
+          <a:bodyPr wrap="square">
+            <a:noAutofit/>
+          </a:bodyPr>
+          <a:lstStyle/>
+          <a:p>
+            <a:pPr>
+              <a:lnSpc>
+                <a:spcPts val="2200"/>
+              </a:lnSpc>
+              <a:spcAft>
+                <a:spcPts val="1000"/>
+              </a:spcAft>
+              <a:defRPr sz="2000" b="0">
+                <a:solidFill>
+                  <a:srgbClr val="333333"/>
+                </a:solidFill>
+                <a:latin typeface="Calibri"/>
+              </a:defRPr>
+            </a:pPr>
+            <a:r>
+              <a:t>• verilator --version</a:t>
+            </a:r>
+          </a:p>
+        </p:txBody>
+      </p:sp>
+      <p:sp>
+        <p:nvSpPr>
+          <p:cNvPr id="4" name="TextBox 3"/>
           <p:cNvSpPr txBox="1"/>
           <p:nvPr/>
         </p:nvSpPr>
@@ -9177,7 +11148,7 @@
               </a:defRPr>
             </a:pPr>
             <a:r>
-              <a:t>What you should know</a:t>
+              <a:t>Build and run uvm_smoke</a:t>
             </a:r>
           </a:p>
         </p:txBody>
@@ -9219,197 +11190,7 @@
               </a:defRPr>
             </a:pPr>
             <a:r>
-              <a:t>• Explain basic testbench (directed tests, pin</a:t>
-            </a:r>
-          </a:p>
-          <a:p>
-            <a:pPr>
-              <a:lnSpc>
-                <a:spcPts val="2200"/>
-              </a:lnSpc>
-              <a:spcAft>
-                <a:spcPts val="1000"/>
-              </a:spcAft>
-              <a:defRPr sz="2000" b="0">
-                <a:solidFill>
-                  <a:srgbClr val="333333"/>
-                </a:solidFill>
-                <a:latin typeface="Calibri"/>
-              </a:defRPr>
-            </a:pPr>
-            <a:r>
-              <a:t>      wiggling) and how it evolves into UVM (transaction,</a:t>
-            </a:r>
-          </a:p>
-          <a:p>
-            <a:pPr>
-              <a:lnSpc>
-                <a:spcPts val="2200"/>
-              </a:lnSpc>
-              <a:spcAft>
-                <a:spcPts val="1000"/>
-              </a:spcAft>
-              <a:defRPr sz="2000" b="0">
-                <a:solidFill>
-                  <a:srgbClr val="333333"/>
-                </a:solidFill>
-                <a:latin typeface="Calibri"/>
-              </a:defRPr>
-            </a:pPr>
-            <a:r>
-              <a:t>      se…</a:t>
-            </a:r>
-          </a:p>
-          <a:p>
-            <a:pPr>
-              <a:lnSpc>
-                <a:spcPts val="2200"/>
-              </a:lnSpc>
-              <a:spcAft>
-                <a:spcPts val="1000"/>
-              </a:spcAft>
-              <a:defRPr sz="2000" b="0">
-                <a:solidFill>
-                  <a:srgbClr val="333333"/>
-                </a:solidFill>
-                <a:latin typeface="Calibri"/>
-              </a:defRPr>
-            </a:pPr>
-            <a:r>
-              <a:t>• Describe the role of transaction, sequence, driver,</a:t>
-            </a:r>
-          </a:p>
-          <a:p>
-            <a:pPr>
-              <a:lnSpc>
-                <a:spcPts val="2200"/>
-              </a:lnSpc>
-              <a:spcAft>
-                <a:spcPts val="1000"/>
-              </a:spcAft>
-              <a:defRPr sz="2000" b="0">
-                <a:solidFill>
-                  <a:srgbClr val="333333"/>
-                </a:solidFill>
-                <a:latin typeface="Calibri"/>
-              </a:defRPr>
-            </a:pPr>
-            <a:r>
-              <a:t>      monitor, scoreboard, agent, env, and test in a…</a:t>
-            </a:r>
-          </a:p>
-          <a:p>
-            <a:pPr>
-              <a:lnSpc>
-                <a:spcPts val="2200"/>
-              </a:lnSpc>
-              <a:spcAft>
-                <a:spcPts val="1000"/>
-              </a:spcAft>
-              <a:defRPr sz="2000" b="0">
-                <a:solidFill>
-                  <a:srgbClr val="333333"/>
-                </a:solidFill>
-                <a:latin typeface="Calibri"/>
-              </a:defRPr>
-            </a:pPr>
-            <a:r>
-              <a:t>• Run the uvm_smoke example (make SIM=verilator</a:t>
-            </a:r>
-          </a:p>
-          <a:p>
-            <a:pPr>
-              <a:lnSpc>
-                <a:spcPts val="2200"/>
-              </a:lnSpc>
-              <a:spcAft>
-                <a:spcPts val="1000"/>
-              </a:spcAft>
-              <a:defRPr sz="2000" b="0">
-                <a:solidFill>
-                  <a:srgbClr val="333333"/>
-                </a:solidFill>
-                <a:latin typeface="Calibri"/>
-              </a:defRPr>
-            </a:pPr>
-            <a:r>
-              <a:t>      TEST=test_uvm_smoke) and interpret UVM output.</a:t>
-            </a:r>
-          </a:p>
-          <a:p>
-            <a:pPr>
-              <a:lnSpc>
-                <a:spcPts val="2200"/>
-              </a:lnSpc>
-              <a:spcAft>
-                <a:spcPts val="1000"/>
-              </a:spcAft>
-              <a:defRPr sz="2000" b="0">
-                <a:solidFill>
-                  <a:srgbClr val="333333"/>
-                </a:solidFill>
-                <a:latin typeface="Calibri"/>
-              </a:defRPr>
-            </a:pPr>
-            <a:r>
-              <a:t>• Use the toolchain: Verilator, UVM_HOME, Make; know</a:t>
-            </a:r>
-          </a:p>
-          <a:p>
-            <a:pPr>
-              <a:lnSpc>
-                <a:spcPts val="2200"/>
-              </a:lnSpc>
-              <a:spcAft>
-                <a:spcPts val="1000"/>
-              </a:spcAft>
-              <a:defRPr sz="2000" b="0">
-                <a:solidFill>
-                  <a:srgbClr val="333333"/>
-                </a:solidFill>
-                <a:latin typeface="Calibri"/>
-              </a:defRPr>
-            </a:pPr>
-            <a:r>
-              <a:t>      why `-sv`, `--timing`, and include paths are nee…</a:t>
-            </a:r>
-          </a:p>
-          <a:p>
-            <a:pPr>
-              <a:lnSpc>
-                <a:spcPts val="2200"/>
-              </a:lnSpc>
-              <a:spcAft>
-                <a:spcPts val="1000"/>
-              </a:spcAft>
-              <a:defRPr sz="2000" b="0">
-                <a:solidFill>
-                  <a:srgbClr val="333333"/>
-                </a:solidFill>
-                <a:latin typeface="Calibri"/>
-              </a:defRPr>
-            </a:pPr>
-            <a:r>
-              <a:t>• Be ready for Module 3: UART protocol + RTL + basic</a:t>
-            </a:r>
-          </a:p>
-          <a:p>
-            <a:pPr>
-              <a:lnSpc>
-                <a:spcPts val="2200"/>
-              </a:lnSpc>
-              <a:spcAft>
-                <a:spcPts val="1000"/>
-              </a:spcAft>
-              <a:defRPr sz="2000" b="0">
-                <a:solidFill>
-                  <a:srgbClr val="333333"/>
-                </a:solidFill>
-                <a:latin typeface="Calibri"/>
-              </a:defRPr>
-            </a:pPr>
-            <a:r>
-              <a:t>      (non-UVM) testbench.</a:t>
+              <a:t>• cd module2/examples/uvm_smoke</a:t>
             </a:r>
           </a:p>
         </p:txBody>
@@ -9505,7 +11286,7 @@
               </a:defRPr>
             </a:pPr>
             <a:r>
-              <a:t>Exercises</a:t>
+              <a:t>Module script (from repo root)</a:t>
             </a:r>
           </a:p>
         </p:txBody>
@@ -9547,64 +11328,26 @@
               </a:defRPr>
             </a:pPr>
             <a:r>
-              <a:t>• Run uvm_smoke</a:t>
-            </a:r>
-          </a:p>
-          <a:p>
-            <a:pPr>
-              <a:lnSpc>
-                <a:spcPts val="2200"/>
-              </a:lnSpc>
-              <a:spcAft>
-                <a:spcPts val="1000"/>
-              </a:spcAft>
-              <a:defRPr sz="2000" b="0">
-                <a:solidFill>
-                  <a:srgbClr val="333333"/>
-                </a:solidFill>
-                <a:latin typeface="Calibri"/>
-              </a:defRPr>
-            </a:pPr>
-            <a:r>
-              <a:t>• Traceability</a:t>
-            </a:r>
-          </a:p>
-          <a:p>
-            <a:pPr>
-              <a:lnSpc>
-                <a:spcPts val="2200"/>
-              </a:lnSpc>
-              <a:spcAft>
-                <a:spcPts val="1000"/>
-              </a:spcAft>
-              <a:defRPr sz="2000" b="0">
-                <a:solidFill>
-                  <a:srgbClr val="333333"/>
-                </a:solidFill>
-                <a:latin typeface="Calibri"/>
-              </a:defRPr>
-            </a:pPr>
-            <a:r>
-              <a:t>• Change the sequence</a:t>
-            </a:r>
-          </a:p>
-          <a:p>
-            <a:pPr>
-              <a:lnSpc>
-                <a:spcPts val="2200"/>
-              </a:lnSpc>
-              <a:spcAft>
-                <a:spcPts val="1000"/>
-              </a:spcAft>
-              <a:defRPr sz="2000" b="0">
-                <a:solidFill>
-                  <a:srgbClr val="333333"/>
-                </a:solidFill>
-                <a:latin typeface="Calibri"/>
-              </a:defRPr>
-            </a:pPr>
-            <a:r>
-              <a:t>• Optional: Waveforms</a:t>
+              <a:t>• ./scripts/module2.sh --check # Environment + UVM +</a:t>
+            </a:r>
+          </a:p>
+          <a:p>
+            <a:pPr>
+              <a:lnSpc>
+                <a:spcPts val="2200"/>
+              </a:lnSpc>
+              <a:spcAft>
+                <a:spcPts val="1000"/>
+              </a:spcAft>
+              <a:defRPr sz="2000" b="0">
+                <a:solidFill>
+                  <a:srgbClr val="333333"/>
+                </a:solidFill>
+                <a:latin typeface="Calibri"/>
+              </a:defRPr>
+            </a:pPr>
+            <a:r>
+              <a:t>      example dirs</a:t>
             </a:r>
           </a:p>
         </p:txBody>
@@ -9674,8 +11417,8 @@
         </p:nvSpPr>
         <p:spPr>
           <a:xfrm>
-            <a:off x="548640" y="411480"/>
-            <a:ext cx="11064240" cy="777240"/>
+            <a:off x="548640" y="2743200"/>
+            <a:ext cx="11064240" cy="1371600"/>
           </a:xfrm>
           <a:prstGeom prst="rect">
             <a:avLst/>
@@ -9688,11 +11431,11 @@
           </a:bodyPr>
           <a:lstStyle/>
           <a:p>
-            <a:pPr>
-              <a:lnSpc>
-                <a:spcPts val="2200"/>
-              </a:lnSpc>
-              <a:defRPr sz="2800" b="1">
+            <a:pPr algn="ctr">
+              <a:lnSpc>
+                <a:spcPts val="2200"/>
+              </a:lnSpc>
+              <a:defRPr sz="3600" b="1">
                 <a:solidFill>
                   <a:srgbClr val="1A1A2E"/>
                 </a:solidFill>
@@ -9700,7 +11443,7 @@
               </a:defRPr>
             </a:pPr>
             <a:r>
-              <a:t>Assessment checklist</a:t>
+              <a:t>Hands-on examples</a:t>
             </a:r>
           </a:p>
         </p:txBody>
@@ -9708,162 +11451,6 @@
       <p:sp>
         <p:nvSpPr>
           <p:cNvPr id="3" name="TextBox 2"/>
-          <p:cNvSpPr txBox="1"/>
-          <p:nvPr/>
-        </p:nvSpPr>
-        <p:spPr>
-          <a:xfrm>
-            <a:off x="548640" y="1234440"/>
-            <a:ext cx="11064240" cy="4937760"/>
-          </a:xfrm>
-          <a:prstGeom prst="rect">
-            <a:avLst/>
-          </a:prstGeom>
-          <a:noFill/>
-        </p:spPr>
-        <p:txBody>
-          <a:bodyPr wrap="square">
-            <a:noAutofit/>
-          </a:bodyPr>
-          <a:lstStyle/>
-          <a:p>
-            <a:pPr>
-              <a:lnSpc>
-                <a:spcPts val="2200"/>
-              </a:lnSpc>
-              <a:spcAft>
-                <a:spcPts val="1000"/>
-              </a:spcAft>
-              <a:defRPr sz="2000" b="0">
-                <a:solidFill>
-                  <a:srgbClr val="333333"/>
-                </a:solidFill>
-                <a:latin typeface="Calibri"/>
-              </a:defRPr>
-            </a:pPr>
-            <a:r>
-              <a:t>• Can explain basic TB vs UVM (transaction, sequence,</a:t>
-            </a:r>
-          </a:p>
-          <a:p>
-            <a:pPr>
-              <a:lnSpc>
-                <a:spcPts val="2200"/>
-              </a:lnSpc>
-              <a:spcAft>
-                <a:spcPts val="1000"/>
-              </a:spcAft>
-              <a:defRPr sz="2000" b="0">
-                <a:solidFill>
-                  <a:srgbClr val="333333"/>
-                </a:solidFill>
-                <a:latin typeface="Calibri"/>
-              </a:defRPr>
-            </a:pPr>
-            <a:r>
-              <a:t>      driver, monitor, scoreboard).</a:t>
-            </a:r>
-          </a:p>
-          <a:p>
-            <a:pPr>
-              <a:lnSpc>
-                <a:spcPts val="2200"/>
-              </a:lnSpc>
-              <a:spcAft>
-                <a:spcPts val="1000"/>
-              </a:spcAft>
-              <a:defRPr sz="2000" b="0">
-                <a:solidFill>
-                  <a:srgbClr val="333333"/>
-                </a:solidFill>
-                <a:latin typeface="Calibri"/>
-              </a:defRPr>
-            </a:pPr>
-            <a:r>
-              <a:t>• Can describe the role of UVM_HOME, Verilator flags,</a:t>
-            </a:r>
-          </a:p>
-          <a:p>
-            <a:pPr>
-              <a:lnSpc>
-                <a:spcPts val="2200"/>
-              </a:lnSpc>
-              <a:spcAft>
-                <a:spcPts val="1000"/>
-              </a:spcAft>
-              <a:defRPr sz="2000" b="0">
-                <a:solidFill>
-                  <a:srgbClr val="333333"/>
-                </a:solidFill>
-                <a:latin typeface="Calibri"/>
-              </a:defRPr>
-            </a:pPr>
-            <a:r>
-              <a:t>      and Make in building/running a UVM test.</a:t>
-            </a:r>
-          </a:p>
-          <a:p>
-            <a:pPr>
-              <a:lnSpc>
-                <a:spcPts val="2200"/>
-              </a:lnSpc>
-              <a:spcAft>
-                <a:spcPts val="1000"/>
-              </a:spcAft>
-              <a:defRPr sz="2000" b="0">
-                <a:solidFill>
-                  <a:srgbClr val="333333"/>
-                </a:solidFill>
-                <a:latin typeface="Calibri"/>
-              </a:defRPr>
-            </a:pPr>
-            <a:r>
-              <a:t>• Can run uvm_smoke and interpret the output.</a:t>
-            </a:r>
-          </a:p>
-          <a:p>
-            <a:pPr>
-              <a:lnSpc>
-                <a:spcPts val="2200"/>
-              </a:lnSpc>
-              <a:spcAft>
-                <a:spcPts val="1000"/>
-              </a:spcAft>
-              <a:defRPr sz="2000" b="0">
-                <a:solidFill>
-                  <a:srgbClr val="333333"/>
-                </a:solidFill>
-                <a:latin typeface="Calibri"/>
-              </a:defRPr>
-            </a:pPr>
-            <a:r>
-              <a:t>• Ready to move to Module 3 (UART protocol + RTL +</a:t>
-            </a:r>
-          </a:p>
-          <a:p>
-            <a:pPr>
-              <a:lnSpc>
-                <a:spcPts val="2200"/>
-              </a:lnSpc>
-              <a:spcAft>
-                <a:spcPts val="1000"/>
-              </a:spcAft>
-              <a:defRPr sz="2000" b="0">
-                <a:solidFill>
-                  <a:srgbClr val="333333"/>
-                </a:solidFill>
-                <a:latin typeface="Calibri"/>
-              </a:defRPr>
-            </a:pPr>
-            <a:r>
-              <a:t>      basic testbench).</a:t>
-            </a:r>
-          </a:p>
-        </p:txBody>
-      </p:sp>
-      <p:sp>
-        <p:nvSpPr>
-          <p:cNvPr id="4" name="TextBox 3"/>
           <p:cNvSpPr txBox="1"/>
           <p:nvPr/>
         </p:nvSpPr>
@@ -9952,7 +11539,7 @@
               </a:defRPr>
             </a:pPr>
             <a:r>
-              <a:t>Summary &amp; next steps</a:t>
+              <a:t>Module 2 self-check</a:t>
             </a:r>
           </a:p>
         </p:txBody>
@@ -9965,8 +11552,76 @@
         </p:nvSpPr>
         <p:spPr>
           <a:xfrm>
-            <a:off x="548640" y="1234440"/>
-            <a:ext cx="11064240" cy="4937760"/>
+            <a:off x="548640" y="1051560"/>
+            <a:ext cx="11064240" cy="914400"/>
+          </a:xfrm>
+          <a:prstGeom prst="rect">
+            <a:avLst/>
+          </a:prstGeom>
+          <a:solidFill>
+            <a:srgbClr val="F4F4F4"/>
+          </a:solidFill>
+        </p:spPr>
+        <p:txBody>
+          <a:bodyPr wrap="square">
+            <a:noAutofit/>
+          </a:bodyPr>
+          <a:lstStyle/>
+          <a:p>
+            <a:pPr>
+              <a:lnSpc>
+                <a:spcPts val="2200"/>
+              </a:lnSpc>
+              <a:spcAft>
+                <a:spcPts val="200"/>
+              </a:spcAft>
+              <a:defRPr sz="2000" b="0">
+                <a:solidFill>
+                  <a:srgbClr val="333333"/>
+                </a:solidFill>
+                <a:latin typeface="Consolas"/>
+              </a:defRPr>
+            </a:pPr>
+            <a:r>
+              <a:t>$ ./scripts/module2.sh --help</a:t>
+            </a:r>
+          </a:p>
+        </p:txBody>
+      </p:sp>
+      <p:pic>
+        <p:nvPicPr>
+          <p:cNvPr id="4" name="Picture 3" descr="module2_check.png"/>
+          <p:cNvPicPr>
+            <a:picLocks noChangeAspect="1"/>
+          </p:cNvPicPr>
+          <p:nvPr/>
+        </p:nvPicPr>
+        <p:blipFill>
+          <a:blip r:embed="rId2"/>
+          <a:stretch>
+            <a:fillRect/>
+          </a:stretch>
+        </p:blipFill>
+        <p:spPr>
+          <a:xfrm>
+            <a:off x="548640" y="1965960"/>
+            <a:ext cx="7071358" cy="3977639"/>
+          </a:xfrm>
+          <a:prstGeom prst="rect">
+            <a:avLst/>
+          </a:prstGeom>
+        </p:spPr>
+      </p:pic>
+      <p:sp>
+        <p:nvSpPr>
+          <p:cNvPr id="5" name="TextBox 4"/>
+          <p:cNvSpPr txBox="1"/>
+          <p:nvPr/>
+        </p:nvSpPr>
+        <p:spPr>
+          <a:xfrm>
+            <a:off x="548640" y="6355080"/>
+            <a:ext cx="11064240" cy="320040"/>
           </a:xfrm>
           <a:prstGeom prst="rect">
             <a:avLst/>
@@ -9979,98 +11634,194 @@
           </a:bodyPr>
           <a:lstStyle/>
           <a:p>
-            <a:pPr>
-              <a:lnSpc>
-                <a:spcPts val="2200"/>
-              </a:lnSpc>
-              <a:spcAft>
-                <a:spcPts val="1000"/>
-              </a:spcAft>
-              <a:defRPr sz="2000" b="0">
-                <a:solidFill>
-                  <a:srgbClr val="333333"/>
-                </a:solidFill>
-                <a:latin typeface="Calibri"/>
-              </a:defRPr>
-            </a:pPr>
-            <a:r>
-              <a:t>• Understand basic testbench patterns (directed tests,</a:t>
-            </a:r>
-          </a:p>
-          <a:p>
-            <a:pPr>
-              <a:lnSpc>
-                <a:spcPts val="2200"/>
-              </a:lnSpc>
-              <a:spcAft>
-                <a:spcPts val="1000"/>
-              </a:spcAft>
-              <a:defRPr sz="2000" b="0">
-                <a:solidFill>
-                  <a:srgbClr val="333333"/>
-                </a:solidFill>
-                <a:latin typeface="Calibri"/>
-              </a:defRPr>
-            </a:pPr>
-            <a:r>
-              <a:t>      pin wiggling), the evolution to a UVM+SV testb…</a:t>
-            </a:r>
-          </a:p>
-          <a:p>
-            <a:pPr>
-              <a:lnSpc>
-                <a:spcPts val="2200"/>
-              </a:lnSpc>
-              <a:spcAft>
-                <a:spcPts val="1000"/>
-              </a:spcAft>
-              <a:defRPr sz="2000" b="0">
-                <a:solidFill>
-                  <a:srgbClr val="333333"/>
-                </a:solidFill>
-                <a:latin typeface="Calibri"/>
-              </a:defRPr>
-            </a:pPr>
-            <a:r>
-              <a:t>• Complete module2/CHECKLIST.md</a:t>
-            </a:r>
-          </a:p>
-          <a:p>
-            <a:pPr>
-              <a:lnSpc>
-                <a:spcPts val="2200"/>
-              </a:lnSpc>
-              <a:spcAft>
-                <a:spcPts val="1000"/>
-              </a:spcAft>
-              <a:defRPr sz="2000" b="0">
-                <a:solidFill>
-                  <a:srgbClr val="333333"/>
-                </a:solidFill>
-                <a:latin typeface="Calibri"/>
-              </a:defRPr>
-            </a:pPr>
-            <a:r>
-              <a:t>• Review module2/EXAMPLES.md and run each lab</a:t>
-            </a:r>
-          </a:p>
-          <a:p>
-            <a:pPr>
-              <a:lnSpc>
-                <a:spcPts val="2200"/>
-              </a:lnSpc>
-              <a:spcAft>
-                <a:spcPts val="1000"/>
-              </a:spcAft>
-              <a:defRPr sz="2000" b="0">
-                <a:solidFill>
-                  <a:srgbClr val="333333"/>
-                </a:solidFill>
-                <a:latin typeface="Calibri"/>
-              </a:defRPr>
-            </a:pPr>
-            <a:r>
-              <a:t>• Next: UART</a:t>
+            <a:pPr algn="r">
+              <a:lnSpc>
+                <a:spcPts val="2200"/>
+              </a:lnSpc>
+              <a:defRPr sz="1000" b="0">
+                <a:solidFill>
+                  <a:srgbClr val="666666"/>
+                </a:solidFill>
+                <a:latin typeface="Calibri"/>
+              </a:defRPr>
+            </a:pPr>
+            <a:r>
+              <a:t>learn_uart_spi_i2c / Module 2</a:t>
+            </a:r>
+          </a:p>
+        </p:txBody>
+      </p:sp>
+    </p:spTree>
+  </p:cSld>
+  <p:clrMapOvr>
+    <a:masterClrMapping/>
+  </p:clrMapOvr>
+</p:sld>
+</file>
+
+<file path=ppt/slides/slide37.xml><?xml version="1.0" encoding="utf-8"?>
+<p:sld xmlns:a="http://schemas.openxmlformats.org/drawingml/2006/main" xmlns:p="http://schemas.openxmlformats.org/presentationml/2006/main" xmlns:r="http://schemas.openxmlformats.org/officeDocument/2006/relationships">
+  <p:cSld>
+    <p:spTree>
+      <p:nvGrpSpPr>
+        <p:cNvPr id="1" name=""/>
+        <p:cNvGrpSpPr/>
+        <p:nvPr/>
+      </p:nvGrpSpPr>
+      <p:grpSpPr/>
+      <p:sp>
+        <p:nvSpPr>
+          <p:cNvPr id="2" name="TextBox 1"/>
+          <p:cNvSpPr txBox="1"/>
+          <p:nvPr/>
+        </p:nvSpPr>
+        <p:spPr>
+          <a:xfrm>
+            <a:off x="548640" y="411480"/>
+            <a:ext cx="11064240" cy="777240"/>
+          </a:xfrm>
+          <a:prstGeom prst="rect">
+            <a:avLst/>
+          </a:prstGeom>
+          <a:noFill/>
+        </p:spPr>
+        <p:txBody>
+          <a:bodyPr wrap="square">
+            <a:noAutofit/>
+          </a:bodyPr>
+          <a:lstStyle/>
+          <a:p>
+            <a:pPr>
+              <a:lnSpc>
+                <a:spcPts val="2200"/>
+              </a:lnSpc>
+              <a:defRPr sz="2800" b="1">
+                <a:solidFill>
+                  <a:srgbClr val="1A1A2E"/>
+                </a:solidFill>
+                <a:latin typeface="Calibri"/>
+              </a:defRPr>
+            </a:pPr>
+            <a:r>
+              <a:t>Example 1: UVM smoke test</a:t>
+            </a:r>
+          </a:p>
+        </p:txBody>
+      </p:sp>
+      <p:sp>
+        <p:nvSpPr>
+          <p:cNvPr id="3" name="TextBox 2"/>
+          <p:cNvSpPr txBox="1"/>
+          <p:nvPr/>
+        </p:nvSpPr>
+        <p:spPr>
+          <a:xfrm>
+            <a:off x="548640" y="1234440"/>
+            <a:ext cx="11064240" cy="4937760"/>
+          </a:xfrm>
+          <a:prstGeom prst="rect">
+            <a:avLst/>
+          </a:prstGeom>
+          <a:noFill/>
+        </p:spPr>
+        <p:txBody>
+          <a:bodyPr wrap="square">
+            <a:noAutofit/>
+          </a:bodyPr>
+          <a:lstStyle/>
+          <a:p>
+            <a:pPr>
+              <a:lnSpc>
+                <a:spcPts val="2200"/>
+              </a:lnSpc>
+              <a:spcAft>
+                <a:spcPts val="1000"/>
+              </a:spcAft>
+              <a:defRPr sz="2000" b="0">
+                <a:solidFill>
+                  <a:srgbClr val="333333"/>
+                </a:solidFill>
+                <a:latin typeface="Calibri"/>
+              </a:defRPr>
+            </a:pPr>
+            <a:r>
+              <a:t>• UVM transaction, sequence, driver, monitor, and</a:t>
+            </a:r>
+          </a:p>
+          <a:p>
+            <a:pPr>
+              <a:lnSpc>
+                <a:spcPts val="2200"/>
+              </a:lnSpc>
+              <a:spcAft>
+                <a:spcPts val="1000"/>
+              </a:spcAft>
+              <a:defRPr sz="2000" b="0">
+                <a:solidFill>
+                  <a:srgbClr val="333333"/>
+                </a:solidFill>
+                <a:latin typeface="Calibri"/>
+              </a:defRPr>
+            </a:pPr>
+            <a:r>
+              <a:t>      scoreboard on a tiny register DUT</a:t>
+            </a:r>
+          </a:p>
+          <a:p>
+            <a:pPr>
+              <a:lnSpc>
+                <a:spcPts val="2200"/>
+              </a:lnSpc>
+              <a:spcAft>
+                <a:spcPts val="1000"/>
+              </a:spcAft>
+              <a:defRPr sz="2000" b="0">
+                <a:solidFill>
+                  <a:srgbClr val="333333"/>
+                </a:solidFill>
+                <a:latin typeface="Calibri"/>
+              </a:defRPr>
+            </a:pPr>
+            <a:r>
+              <a:t>• How objections start and end the test in `run_phase`</a:t>
+            </a:r>
+          </a:p>
+          <a:p>
+            <a:pPr>
+              <a:lnSpc>
+                <a:spcPts val="2200"/>
+              </a:lnSpc>
+              <a:spcAft>
+                <a:spcPts val="1000"/>
+              </a:spcAft>
+              <a:defRPr sz="2000" b="0">
+                <a:solidFill>
+                  <a:srgbClr val="333333"/>
+                </a:solidFill>
+                <a:latin typeface="Calibri"/>
+              </a:defRPr>
+            </a:pPr>
+            <a:r>
+              <a:t>• Interpreting DRIVER / MONITOR / SCOREBOARD messages</a:t>
+            </a:r>
+          </a:p>
+          <a:p>
+            <a:pPr>
+              <a:lnSpc>
+                <a:spcPts val="2200"/>
+              </a:lnSpc>
+              <a:spcAft>
+                <a:spcPts val="1000"/>
+              </a:spcAft>
+              <a:defRPr sz="2000" b="0">
+                <a:solidFill>
+                  <a:srgbClr val="333333"/>
+                </a:solidFill>
+                <a:latin typeface="Calibri"/>
+              </a:defRPr>
+            </a:pPr>
+            <a:r>
+              <a:t>      and match counts</a:t>
             </a:r>
           </a:p>
         </p:txBody>
@@ -10078,6 +11829,285 @@
       <p:sp>
         <p:nvSpPr>
           <p:cNvPr id="4" name="TextBox 3"/>
+          <p:cNvSpPr txBox="1"/>
+          <p:nvPr/>
+        </p:nvSpPr>
+        <p:spPr>
+          <a:xfrm>
+            <a:off x="548640" y="6355080"/>
+            <a:ext cx="11064240" cy="320040"/>
+          </a:xfrm>
+          <a:prstGeom prst="rect">
+            <a:avLst/>
+          </a:prstGeom>
+          <a:noFill/>
+        </p:spPr>
+        <p:txBody>
+          <a:bodyPr wrap="square">
+            <a:noAutofit/>
+          </a:bodyPr>
+          <a:lstStyle/>
+          <a:p>
+            <a:pPr algn="r">
+              <a:lnSpc>
+                <a:spcPts val="2200"/>
+              </a:lnSpc>
+              <a:defRPr sz="1000" b="0">
+                <a:solidFill>
+                  <a:srgbClr val="666666"/>
+                </a:solidFill>
+                <a:latin typeface="Calibri"/>
+              </a:defRPr>
+            </a:pPr>
+            <a:r>
+              <a:t>learn_uart_spi_i2c / Module 2</a:t>
+            </a:r>
+          </a:p>
+        </p:txBody>
+      </p:sp>
+    </p:spTree>
+  </p:cSld>
+  <p:clrMapOvr>
+    <a:masterClrMapping/>
+  </p:clrMapOvr>
+</p:sld>
+</file>
+
+<file path=ppt/slides/slide38.xml><?xml version="1.0" encoding="utf-8"?>
+<p:sld xmlns:a="http://schemas.openxmlformats.org/drawingml/2006/main" xmlns:p="http://schemas.openxmlformats.org/presentationml/2006/main" xmlns:r="http://schemas.openxmlformats.org/officeDocument/2006/relationships">
+  <p:cSld>
+    <p:spTree>
+      <p:nvGrpSpPr>
+        <p:cNvPr id="1" name=""/>
+        <p:cNvGrpSpPr/>
+        <p:nvPr/>
+      </p:nvGrpSpPr>
+      <p:grpSpPr/>
+      <p:sp>
+        <p:nvSpPr>
+          <p:cNvPr id="2" name="TextBox 1"/>
+          <p:cNvSpPr txBox="1"/>
+          <p:nvPr/>
+        </p:nvSpPr>
+        <p:spPr>
+          <a:xfrm>
+            <a:off x="548640" y="411480"/>
+            <a:ext cx="11064240" cy="777240"/>
+          </a:xfrm>
+          <a:prstGeom prst="rect">
+            <a:avLst/>
+          </a:prstGeom>
+          <a:noFill/>
+        </p:spPr>
+        <p:txBody>
+          <a:bodyPr wrap="square">
+            <a:noAutofit/>
+          </a:bodyPr>
+          <a:lstStyle/>
+          <a:p>
+            <a:pPr>
+              <a:lnSpc>
+                <a:spcPts val="2200"/>
+              </a:lnSpc>
+              <a:defRPr sz="2800" b="1">
+                <a:solidFill>
+                  <a:srgbClr val="1A1A2E"/>
+                </a:solidFill>
+                <a:latin typeface="Calibri"/>
+              </a:defRPr>
+            </a:pPr>
+            <a:r>
+              <a:t>Demo: UVM smoke test</a:t>
+            </a:r>
+          </a:p>
+        </p:txBody>
+      </p:sp>
+      <p:sp>
+        <p:nvSpPr>
+          <p:cNvPr id="3" name="TextBox 2"/>
+          <p:cNvSpPr txBox="1"/>
+          <p:nvPr/>
+        </p:nvSpPr>
+        <p:spPr>
+          <a:xfrm>
+            <a:off x="548640" y="1051560"/>
+            <a:ext cx="11064240" cy="914400"/>
+          </a:xfrm>
+          <a:prstGeom prst="rect">
+            <a:avLst/>
+          </a:prstGeom>
+          <a:solidFill>
+            <a:srgbClr val="F4F4F4"/>
+          </a:solidFill>
+        </p:spPr>
+        <p:txBody>
+          <a:bodyPr wrap="square">
+            <a:noAutofit/>
+          </a:bodyPr>
+          <a:lstStyle/>
+          <a:p>
+            <a:pPr>
+              <a:lnSpc>
+                <a:spcPts val="2200"/>
+              </a:lnSpc>
+              <a:spcAft>
+                <a:spcPts val="200"/>
+              </a:spcAft>
+              <a:defRPr sz="2000" b="0">
+                <a:solidFill>
+                  <a:srgbClr val="333333"/>
+                </a:solidFill>
+                <a:latin typeface="Consolas"/>
+              </a:defRPr>
+            </a:pPr>
+            <a:r>
+              <a:t>$ cd module2/examples/uvm_smoke &amp;&amp; make SIM=verilator</a:t>
+            </a:r>
+          </a:p>
+          <a:p>
+            <a:pPr>
+              <a:lnSpc>
+                <a:spcPts val="2200"/>
+              </a:lnSpc>
+              <a:spcAft>
+                <a:spcPts val="200"/>
+              </a:spcAft>
+              <a:defRPr sz="2000" b="0">
+                <a:solidFill>
+                  <a:srgbClr val="333333"/>
+                </a:solidFill>
+                <a:latin typeface="Consolas"/>
+              </a:defRPr>
+            </a:pPr>
+            <a:r>
+              <a:t>      TEST=test_uvm_smoke</a:t>
+            </a:r>
+          </a:p>
+        </p:txBody>
+      </p:sp>
+      <p:pic>
+        <p:nvPicPr>
+          <p:cNvPr id="4" name="Picture 3" descr="ex01_uvm_smoke.png"/>
+          <p:cNvPicPr>
+            <a:picLocks noChangeAspect="1"/>
+          </p:cNvPicPr>
+          <p:nvPr/>
+        </p:nvPicPr>
+        <p:blipFill>
+          <a:blip r:embed="rId2"/>
+          <a:stretch>
+            <a:fillRect/>
+          </a:stretch>
+        </p:blipFill>
+        <p:spPr>
+          <a:xfrm>
+            <a:off x="548640" y="1965960"/>
+            <a:ext cx="7071358" cy="3977639"/>
+          </a:xfrm>
+          <a:prstGeom prst="rect">
+            <a:avLst/>
+          </a:prstGeom>
+        </p:spPr>
+      </p:pic>
+      <p:sp>
+        <p:nvSpPr>
+          <p:cNvPr id="5" name="TextBox 4"/>
+          <p:cNvSpPr txBox="1"/>
+          <p:nvPr/>
+        </p:nvSpPr>
+        <p:spPr>
+          <a:xfrm>
+            <a:off x="548640" y="6355080"/>
+            <a:ext cx="11064240" cy="320040"/>
+          </a:xfrm>
+          <a:prstGeom prst="rect">
+            <a:avLst/>
+          </a:prstGeom>
+          <a:noFill/>
+        </p:spPr>
+        <p:txBody>
+          <a:bodyPr wrap="square">
+            <a:noAutofit/>
+          </a:bodyPr>
+          <a:lstStyle/>
+          <a:p>
+            <a:pPr algn="r">
+              <a:lnSpc>
+                <a:spcPts val="2200"/>
+              </a:lnSpc>
+              <a:defRPr sz="1000" b="0">
+                <a:solidFill>
+                  <a:srgbClr val="666666"/>
+                </a:solidFill>
+                <a:latin typeface="Calibri"/>
+              </a:defRPr>
+            </a:pPr>
+            <a:r>
+              <a:t>learn_uart_spi_i2c / Module 2</a:t>
+            </a:r>
+          </a:p>
+        </p:txBody>
+      </p:sp>
+    </p:spTree>
+  </p:cSld>
+  <p:clrMapOvr>
+    <a:masterClrMapping/>
+  </p:clrMapOvr>
+</p:sld>
+</file>
+
+<file path=ppt/slides/slide39.xml><?xml version="1.0" encoding="utf-8"?>
+<p:sld xmlns:a="http://schemas.openxmlformats.org/drawingml/2006/main" xmlns:p="http://schemas.openxmlformats.org/presentationml/2006/main" xmlns:r="http://schemas.openxmlformats.org/officeDocument/2006/relationships">
+  <p:cSld>
+    <p:spTree>
+      <p:nvGrpSpPr>
+        <p:cNvPr id="1" name=""/>
+        <p:cNvGrpSpPr/>
+        <p:nvPr/>
+      </p:nvGrpSpPr>
+      <p:grpSpPr/>
+      <p:sp>
+        <p:nvSpPr>
+          <p:cNvPr id="2" name="TextBox 1"/>
+          <p:cNvSpPr txBox="1"/>
+          <p:nvPr/>
+        </p:nvSpPr>
+        <p:spPr>
+          <a:xfrm>
+            <a:off x="548640" y="2743200"/>
+            <a:ext cx="11064240" cy="1371600"/>
+          </a:xfrm>
+          <a:prstGeom prst="rect">
+            <a:avLst/>
+          </a:prstGeom>
+          <a:noFill/>
+        </p:spPr>
+        <p:txBody>
+          <a:bodyPr wrap="square">
+            <a:noAutofit/>
+          </a:bodyPr>
+          <a:lstStyle/>
+          <a:p>
+            <a:pPr algn="ctr">
+              <a:lnSpc>
+                <a:spcPts val="2200"/>
+              </a:lnSpc>
+              <a:defRPr sz="3600" b="1">
+                <a:solidFill>
+                  <a:srgbClr val="1A1A2E"/>
+                </a:solidFill>
+                <a:latin typeface="Calibri"/>
+              </a:defRPr>
+            </a:pPr>
+            <a:r>
+              <a:t>Key concepts</a:t>
+            </a:r>
+          </a:p>
+        </p:txBody>
+      </p:sp>
+      <p:sp>
+        <p:nvSpPr>
+          <p:cNvPr id="3" name="TextBox 2"/>
           <p:cNvSpPr txBox="1"/>
           <p:nvPr/>
         </p:nvSpPr>
@@ -10281,6 +12311,1929 @@
 </p:sld>
 </file>
 
+<file path=ppt/slides/slide40.xml><?xml version="1.0" encoding="utf-8"?>
+<p:sld xmlns:a="http://schemas.openxmlformats.org/drawingml/2006/main" xmlns:p="http://schemas.openxmlformats.org/presentationml/2006/main" xmlns:r="http://schemas.openxmlformats.org/officeDocument/2006/relationships">
+  <p:cSld>
+    <p:spTree>
+      <p:nvGrpSpPr>
+        <p:cNvPr id="1" name=""/>
+        <p:cNvGrpSpPr/>
+        <p:nvPr/>
+      </p:nvGrpSpPr>
+      <p:grpSpPr/>
+      <p:sp>
+        <p:nvSpPr>
+          <p:cNvPr id="2" name="TextBox 1"/>
+          <p:cNvSpPr txBox="1"/>
+          <p:nvPr/>
+        </p:nvSpPr>
+        <p:spPr>
+          <a:xfrm>
+            <a:off x="548640" y="411480"/>
+            <a:ext cx="11064240" cy="777240"/>
+          </a:xfrm>
+          <a:prstGeom prst="rect">
+            <a:avLst/>
+          </a:prstGeom>
+          <a:noFill/>
+        </p:spPr>
+        <p:txBody>
+          <a:bodyPr wrap="square">
+            <a:noAutofit/>
+          </a:bodyPr>
+          <a:lstStyle/>
+          <a:p>
+            <a:pPr>
+              <a:lnSpc>
+                <a:spcPts val="2200"/>
+              </a:lnSpc>
+              <a:defRPr sz="2800" b="1">
+                <a:solidFill>
+                  <a:srgbClr val="1A1A2E"/>
+                </a:solidFill>
+                <a:latin typeface="Calibri"/>
+              </a:defRPr>
+            </a:pPr>
+            <a:r>
+              <a:t>1. Transaction-level TB</a:t>
+            </a:r>
+          </a:p>
+        </p:txBody>
+      </p:sp>
+      <p:sp>
+        <p:nvSpPr>
+          <p:cNvPr id="3" name="TextBox 2"/>
+          <p:cNvSpPr txBox="1"/>
+          <p:nvPr/>
+        </p:nvSpPr>
+        <p:spPr>
+          <a:xfrm>
+            <a:off x="548640" y="1234440"/>
+            <a:ext cx="11064240" cy="4937760"/>
+          </a:xfrm>
+          <a:prstGeom prst="rect">
+            <a:avLst/>
+          </a:prstGeom>
+          <a:noFill/>
+        </p:spPr>
+        <p:txBody>
+          <a:bodyPr wrap="square">
+            <a:noAutofit/>
+          </a:bodyPr>
+          <a:lstStyle/>
+          <a:p>
+            <a:pPr>
+              <a:lnSpc>
+                <a:spcPts val="2200"/>
+              </a:lnSpc>
+              <a:spcAft>
+                <a:spcPts val="1000"/>
+              </a:spcAft>
+              <a:defRPr sz="2000" b="0">
+                <a:solidFill>
+                  <a:srgbClr val="333333"/>
+                </a:solidFill>
+                <a:latin typeface="Calibri"/>
+              </a:defRPr>
+            </a:pPr>
+            <a:r>
+              <a:t>• Stimulus is a transaction (what to do), not raw pin</a:t>
+            </a:r>
+          </a:p>
+          <a:p>
+            <a:pPr>
+              <a:lnSpc>
+                <a:spcPts val="2200"/>
+              </a:lnSpc>
+              <a:spcAft>
+                <a:spcPts val="1000"/>
+              </a:spcAft>
+              <a:defRPr sz="2000" b="0">
+                <a:solidFill>
+                  <a:srgbClr val="333333"/>
+                </a:solidFill>
+                <a:latin typeface="Calibri"/>
+              </a:defRPr>
+            </a:pPr>
+            <a:r>
+              <a:t>      toggles in one big `initial` block.</a:t>
+            </a:r>
+          </a:p>
+          <a:p>
+            <a:pPr>
+              <a:lnSpc>
+                <a:spcPts val="2200"/>
+              </a:lnSpc>
+              <a:spcAft>
+                <a:spcPts val="1000"/>
+              </a:spcAft>
+              <a:defRPr sz="2000" b="0">
+                <a:solidFill>
+                  <a:srgbClr val="333333"/>
+                </a:solidFill>
+                <a:latin typeface="Calibri"/>
+              </a:defRPr>
+            </a:pPr>
+            <a:r>
+              <a:t>• Driver converts transactions to pin activity;</a:t>
+            </a:r>
+          </a:p>
+          <a:p>
+            <a:pPr>
+              <a:lnSpc>
+                <a:spcPts val="2200"/>
+              </a:lnSpc>
+              <a:spcAft>
+                <a:spcPts val="1000"/>
+              </a:spcAft>
+              <a:defRPr sz="2000" b="0">
+                <a:solidFill>
+                  <a:srgbClr val="333333"/>
+                </a:solidFill>
+                <a:latin typeface="Calibri"/>
+              </a:defRPr>
+            </a:pPr>
+            <a:r>
+              <a:t>      monitor converts pins back to transactions.</a:t>
+            </a:r>
+          </a:p>
+        </p:txBody>
+      </p:sp>
+      <p:sp>
+        <p:nvSpPr>
+          <p:cNvPr id="4" name="TextBox 3"/>
+          <p:cNvSpPr txBox="1"/>
+          <p:nvPr/>
+        </p:nvSpPr>
+        <p:spPr>
+          <a:xfrm>
+            <a:off x="548640" y="6355080"/>
+            <a:ext cx="11064240" cy="320040"/>
+          </a:xfrm>
+          <a:prstGeom prst="rect">
+            <a:avLst/>
+          </a:prstGeom>
+          <a:noFill/>
+        </p:spPr>
+        <p:txBody>
+          <a:bodyPr wrap="square">
+            <a:noAutofit/>
+          </a:bodyPr>
+          <a:lstStyle/>
+          <a:p>
+            <a:pPr algn="r">
+              <a:lnSpc>
+                <a:spcPts val="2200"/>
+              </a:lnSpc>
+              <a:defRPr sz="1000" b="0">
+                <a:solidFill>
+                  <a:srgbClr val="666666"/>
+                </a:solidFill>
+                <a:latin typeface="Calibri"/>
+              </a:defRPr>
+            </a:pPr>
+            <a:r>
+              <a:t>learn_uart_spi_i2c / Module 2</a:t>
+            </a:r>
+          </a:p>
+        </p:txBody>
+      </p:sp>
+    </p:spTree>
+  </p:cSld>
+  <p:clrMapOvr>
+    <a:masterClrMapping/>
+  </p:clrMapOvr>
+</p:sld>
+</file>
+
+<file path=ppt/slides/slide41.xml><?xml version="1.0" encoding="utf-8"?>
+<p:sld xmlns:a="http://schemas.openxmlformats.org/drawingml/2006/main" xmlns:p="http://schemas.openxmlformats.org/presentationml/2006/main" xmlns:r="http://schemas.openxmlformats.org/officeDocument/2006/relationships">
+  <p:cSld>
+    <p:spTree>
+      <p:nvGrpSpPr>
+        <p:cNvPr id="1" name=""/>
+        <p:cNvGrpSpPr/>
+        <p:nvPr/>
+      </p:nvGrpSpPr>
+      <p:grpSpPr/>
+      <p:sp>
+        <p:nvSpPr>
+          <p:cNvPr id="2" name="TextBox 1"/>
+          <p:cNvSpPr txBox="1"/>
+          <p:nvPr/>
+        </p:nvSpPr>
+        <p:spPr>
+          <a:xfrm>
+            <a:off x="548640" y="411480"/>
+            <a:ext cx="11064240" cy="777240"/>
+          </a:xfrm>
+          <a:prstGeom prst="rect">
+            <a:avLst/>
+          </a:prstGeom>
+          <a:noFill/>
+        </p:spPr>
+        <p:txBody>
+          <a:bodyPr wrap="square">
+            <a:noAutofit/>
+          </a:bodyPr>
+          <a:lstStyle/>
+          <a:p>
+            <a:pPr>
+              <a:lnSpc>
+                <a:spcPts val="2200"/>
+              </a:lnSpc>
+              <a:defRPr sz="2800" b="1">
+                <a:solidFill>
+                  <a:srgbClr val="1A1A2E"/>
+                </a:solidFill>
+                <a:latin typeface="Calibri"/>
+              </a:defRPr>
+            </a:pPr>
+            <a:r>
+              <a:t>2. Scoreboard closure</a:t>
+            </a:r>
+          </a:p>
+        </p:txBody>
+      </p:sp>
+      <p:sp>
+        <p:nvSpPr>
+          <p:cNvPr id="3" name="TextBox 2"/>
+          <p:cNvSpPr txBox="1"/>
+          <p:nvPr/>
+        </p:nvSpPr>
+        <p:spPr>
+          <a:xfrm>
+            <a:off x="548640" y="1234440"/>
+            <a:ext cx="11064240" cy="4937760"/>
+          </a:xfrm>
+          <a:prstGeom prst="rect">
+            <a:avLst/>
+          </a:prstGeom>
+          <a:noFill/>
+        </p:spPr>
+        <p:txBody>
+          <a:bodyPr wrap="square">
+            <a:noAutofit/>
+          </a:bodyPr>
+          <a:lstStyle/>
+          <a:p>
+            <a:pPr>
+              <a:lnSpc>
+                <a:spcPts val="2200"/>
+              </a:lnSpc>
+              <a:spcAft>
+                <a:spcPts val="1000"/>
+              </a:spcAft>
+              <a:defRPr sz="2000" b="0">
+                <a:solidFill>
+                  <a:srgbClr val="333333"/>
+                </a:solidFill>
+                <a:latin typeface="Calibri"/>
+              </a:defRPr>
+            </a:pPr>
+            <a:r>
+              <a:t>• Expected queue vs observed values — same pattern for</a:t>
+            </a:r>
+          </a:p>
+          <a:p>
+            <a:pPr>
+              <a:lnSpc>
+                <a:spcPts val="2200"/>
+              </a:lnSpc>
+              <a:spcAft>
+                <a:spcPts val="1000"/>
+              </a:spcAft>
+              <a:defRPr sz="2000" b="0">
+                <a:solidFill>
+                  <a:srgbClr val="333333"/>
+                </a:solidFill>
+                <a:latin typeface="Calibri"/>
+              </a:defRPr>
+            </a:pPr>
+            <a:r>
+              <a:t>      UART/SPI/I²C UVM modules.</a:t>
+            </a:r>
+          </a:p>
+        </p:txBody>
+      </p:sp>
+      <p:sp>
+        <p:nvSpPr>
+          <p:cNvPr id="4" name="TextBox 3"/>
+          <p:cNvSpPr txBox="1"/>
+          <p:nvPr/>
+        </p:nvSpPr>
+        <p:spPr>
+          <a:xfrm>
+            <a:off x="548640" y="6355080"/>
+            <a:ext cx="11064240" cy="320040"/>
+          </a:xfrm>
+          <a:prstGeom prst="rect">
+            <a:avLst/>
+          </a:prstGeom>
+          <a:noFill/>
+        </p:spPr>
+        <p:txBody>
+          <a:bodyPr wrap="square">
+            <a:noAutofit/>
+          </a:bodyPr>
+          <a:lstStyle/>
+          <a:p>
+            <a:pPr algn="r">
+              <a:lnSpc>
+                <a:spcPts val="2200"/>
+              </a:lnSpc>
+              <a:defRPr sz="1000" b="0">
+                <a:solidFill>
+                  <a:srgbClr val="666666"/>
+                </a:solidFill>
+                <a:latin typeface="Calibri"/>
+              </a:defRPr>
+            </a:pPr>
+            <a:r>
+              <a:t>learn_uart_spi_i2c / Module 2</a:t>
+            </a:r>
+          </a:p>
+        </p:txBody>
+      </p:sp>
+    </p:spTree>
+  </p:cSld>
+  <p:clrMapOvr>
+    <a:masterClrMapping/>
+  </p:clrMapOvr>
+</p:sld>
+</file>
+
+<file path=ppt/slides/slide42.xml><?xml version="1.0" encoding="utf-8"?>
+<p:sld xmlns:a="http://schemas.openxmlformats.org/drawingml/2006/main" xmlns:p="http://schemas.openxmlformats.org/presentationml/2006/main" xmlns:r="http://schemas.openxmlformats.org/officeDocument/2006/relationships">
+  <p:cSld>
+    <p:spTree>
+      <p:nvGrpSpPr>
+        <p:cNvPr id="1" name=""/>
+        <p:cNvGrpSpPr/>
+        <p:nvPr/>
+      </p:nvGrpSpPr>
+      <p:grpSpPr/>
+      <p:sp>
+        <p:nvSpPr>
+          <p:cNvPr id="2" name="TextBox 1"/>
+          <p:cNvSpPr txBox="1"/>
+          <p:nvPr/>
+        </p:nvSpPr>
+        <p:spPr>
+          <a:xfrm>
+            <a:off x="548640" y="2743200"/>
+            <a:ext cx="11064240" cy="1371600"/>
+          </a:xfrm>
+          <a:prstGeom prst="rect">
+            <a:avLst/>
+          </a:prstGeom>
+          <a:noFill/>
+        </p:spPr>
+        <p:txBody>
+          <a:bodyPr wrap="square">
+            <a:noAutofit/>
+          </a:bodyPr>
+          <a:lstStyle/>
+          <a:p>
+            <a:pPr algn="ctr">
+              <a:lnSpc>
+                <a:spcPts val="2200"/>
+              </a:lnSpc>
+              <a:defRPr sz="3600" b="1">
+                <a:solidFill>
+                  <a:srgbClr val="1A1A2E"/>
+                </a:solidFill>
+                <a:latin typeface="Calibri"/>
+              </a:defRPr>
+            </a:pPr>
+            <a:r>
+              <a:t>Common pitfalls</a:t>
+            </a:r>
+          </a:p>
+        </p:txBody>
+      </p:sp>
+      <p:sp>
+        <p:nvSpPr>
+          <p:cNvPr id="3" name="TextBox 2"/>
+          <p:cNvSpPr txBox="1"/>
+          <p:nvPr/>
+        </p:nvSpPr>
+        <p:spPr>
+          <a:xfrm>
+            <a:off x="548640" y="6355080"/>
+            <a:ext cx="11064240" cy="320040"/>
+          </a:xfrm>
+          <a:prstGeom prst="rect">
+            <a:avLst/>
+          </a:prstGeom>
+          <a:noFill/>
+        </p:spPr>
+        <p:txBody>
+          <a:bodyPr wrap="square">
+            <a:noAutofit/>
+          </a:bodyPr>
+          <a:lstStyle/>
+          <a:p>
+            <a:pPr algn="r">
+              <a:lnSpc>
+                <a:spcPts val="2200"/>
+              </a:lnSpc>
+              <a:defRPr sz="1000" b="0">
+                <a:solidFill>
+                  <a:srgbClr val="666666"/>
+                </a:solidFill>
+                <a:latin typeface="Calibri"/>
+              </a:defRPr>
+            </a:pPr>
+            <a:r>
+              <a:t>learn_uart_spi_i2c / Module 2</a:t>
+            </a:r>
+          </a:p>
+        </p:txBody>
+      </p:sp>
+    </p:spTree>
+  </p:cSld>
+  <p:clrMapOvr>
+    <a:masterClrMapping/>
+  </p:clrMapOvr>
+</p:sld>
+</file>
+
+<file path=ppt/slides/slide43.xml><?xml version="1.0" encoding="utf-8"?>
+<p:sld xmlns:a="http://schemas.openxmlformats.org/drawingml/2006/main" xmlns:p="http://schemas.openxmlformats.org/presentationml/2006/main" xmlns:r="http://schemas.openxmlformats.org/officeDocument/2006/relationships">
+  <p:cSld>
+    <p:spTree>
+      <p:nvGrpSpPr>
+        <p:cNvPr id="1" name=""/>
+        <p:cNvGrpSpPr/>
+        <p:nvPr/>
+      </p:nvGrpSpPr>
+      <p:grpSpPr/>
+      <p:sp>
+        <p:nvSpPr>
+          <p:cNvPr id="2" name="TextBox 1"/>
+          <p:cNvSpPr txBox="1"/>
+          <p:nvPr/>
+        </p:nvSpPr>
+        <p:spPr>
+          <a:xfrm>
+            <a:off x="548640" y="411480"/>
+            <a:ext cx="11064240" cy="777240"/>
+          </a:xfrm>
+          <a:prstGeom prst="rect">
+            <a:avLst/>
+          </a:prstGeom>
+          <a:noFill/>
+        </p:spPr>
+        <p:txBody>
+          <a:bodyPr wrap="square">
+            <a:noAutofit/>
+          </a:bodyPr>
+          <a:lstStyle/>
+          <a:p>
+            <a:pPr>
+              <a:lnSpc>
+                <a:spcPts val="2200"/>
+              </a:lnSpc>
+              <a:defRPr sz="2800" b="1">
+                <a:solidFill>
+                  <a:srgbClr val="1A1A2E"/>
+                </a:solidFill>
+                <a:latin typeface="Calibri"/>
+              </a:defRPr>
+            </a:pPr>
+            <a:r>
+              <a:t>Skipping monitor or scoreboard</a:t>
+            </a:r>
+          </a:p>
+        </p:txBody>
+      </p:sp>
+      <p:sp>
+        <p:nvSpPr>
+          <p:cNvPr id="3" name="TextBox 2"/>
+          <p:cNvSpPr txBox="1"/>
+          <p:nvPr/>
+        </p:nvSpPr>
+        <p:spPr>
+          <a:xfrm>
+            <a:off x="548640" y="1234440"/>
+            <a:ext cx="11064240" cy="4937760"/>
+          </a:xfrm>
+          <a:prstGeom prst="rect">
+            <a:avLst/>
+          </a:prstGeom>
+          <a:noFill/>
+        </p:spPr>
+        <p:txBody>
+          <a:bodyPr wrap="square">
+            <a:noAutofit/>
+          </a:bodyPr>
+          <a:lstStyle/>
+          <a:p>
+            <a:pPr>
+              <a:lnSpc>
+                <a:spcPts val="2200"/>
+              </a:lnSpc>
+              <a:spcAft>
+                <a:spcPts val="1000"/>
+              </a:spcAft>
+              <a:defRPr sz="2000" b="0">
+                <a:solidFill>
+                  <a:srgbClr val="333333"/>
+                </a:solidFill>
+                <a:latin typeface="Calibri"/>
+              </a:defRPr>
+            </a:pPr>
+            <a:r>
+              <a:t>• Mistake: Only driving the DUT and eyeballing waves.</a:t>
+            </a:r>
+          </a:p>
+          <a:p>
+            <a:pPr>
+              <a:lnSpc>
+                <a:spcPts val="2200"/>
+              </a:lnSpc>
+              <a:spcAft>
+                <a:spcPts val="1000"/>
+              </a:spcAft>
+              <a:defRPr sz="2000" b="0">
+                <a:solidFill>
+                  <a:srgbClr val="333333"/>
+                </a:solidFill>
+                <a:latin typeface="Calibri"/>
+              </a:defRPr>
+            </a:pPr>
+            <a:r>
+              <a:t>• Correct: Monitor + scoreboard automate expected vs</a:t>
+            </a:r>
+          </a:p>
+          <a:p>
+            <a:pPr>
+              <a:lnSpc>
+                <a:spcPts val="2200"/>
+              </a:lnSpc>
+              <a:spcAft>
+                <a:spcPts val="1000"/>
+              </a:spcAft>
+              <a:defRPr sz="2000" b="0">
+                <a:solidFill>
+                  <a:srgbClr val="333333"/>
+                </a:solidFill>
+                <a:latin typeface="Calibri"/>
+              </a:defRPr>
+            </a:pPr>
+            <a:r>
+              <a:t>      observed.</a:t>
+            </a:r>
+          </a:p>
+          <a:p>
+            <a:pPr>
+              <a:lnSpc>
+                <a:spcPts val="2200"/>
+              </a:lnSpc>
+              <a:spcAft>
+                <a:spcPts val="1000"/>
+              </a:spcAft>
+              <a:defRPr sz="2000" b="0">
+                <a:solidFill>
+                  <a:srgbClr val="333333"/>
+                </a:solidFill>
+                <a:latin typeface="Calibri"/>
+              </a:defRPr>
+            </a:pPr>
+            <a:r>
+              <a:t>• Why: Scales when you add dozens of tests.</a:t>
+            </a:r>
+          </a:p>
+        </p:txBody>
+      </p:sp>
+      <p:sp>
+        <p:nvSpPr>
+          <p:cNvPr id="4" name="TextBox 3"/>
+          <p:cNvSpPr txBox="1"/>
+          <p:nvPr/>
+        </p:nvSpPr>
+        <p:spPr>
+          <a:xfrm>
+            <a:off x="548640" y="6355080"/>
+            <a:ext cx="11064240" cy="320040"/>
+          </a:xfrm>
+          <a:prstGeom prst="rect">
+            <a:avLst/>
+          </a:prstGeom>
+          <a:noFill/>
+        </p:spPr>
+        <p:txBody>
+          <a:bodyPr wrap="square">
+            <a:noAutofit/>
+          </a:bodyPr>
+          <a:lstStyle/>
+          <a:p>
+            <a:pPr algn="r">
+              <a:lnSpc>
+                <a:spcPts val="2200"/>
+              </a:lnSpc>
+              <a:defRPr sz="1000" b="0">
+                <a:solidFill>
+                  <a:srgbClr val="666666"/>
+                </a:solidFill>
+                <a:latin typeface="Calibri"/>
+              </a:defRPr>
+            </a:pPr>
+            <a:r>
+              <a:t>learn_uart_spi_i2c / Module 2</a:t>
+            </a:r>
+          </a:p>
+        </p:txBody>
+      </p:sp>
+    </p:spTree>
+  </p:cSld>
+  <p:clrMapOvr>
+    <a:masterClrMapping/>
+  </p:clrMapOvr>
+</p:sld>
+</file>
+
+<file path=ppt/slides/slide44.xml><?xml version="1.0" encoding="utf-8"?>
+<p:sld xmlns:a="http://schemas.openxmlformats.org/drawingml/2006/main" xmlns:p="http://schemas.openxmlformats.org/presentationml/2006/main" xmlns:r="http://schemas.openxmlformats.org/officeDocument/2006/relationships">
+  <p:cSld>
+    <p:spTree>
+      <p:nvGrpSpPr>
+        <p:cNvPr id="1" name=""/>
+        <p:cNvGrpSpPr/>
+        <p:nvPr/>
+      </p:nvGrpSpPr>
+      <p:grpSpPr/>
+      <p:sp>
+        <p:nvSpPr>
+          <p:cNvPr id="2" name="TextBox 1"/>
+          <p:cNvSpPr txBox="1"/>
+          <p:nvPr/>
+        </p:nvSpPr>
+        <p:spPr>
+          <a:xfrm>
+            <a:off x="548640" y="411480"/>
+            <a:ext cx="11064240" cy="777240"/>
+          </a:xfrm>
+          <a:prstGeom prst="rect">
+            <a:avLst/>
+          </a:prstGeom>
+          <a:noFill/>
+        </p:spPr>
+        <p:txBody>
+          <a:bodyPr wrap="square">
+            <a:noAutofit/>
+          </a:bodyPr>
+          <a:lstStyle/>
+          <a:p>
+            <a:pPr>
+              <a:lnSpc>
+                <a:spcPts val="2200"/>
+              </a:lnSpc>
+              <a:defRPr sz="2800" b="1">
+                <a:solidFill>
+                  <a:srgbClr val="1A1A2E"/>
+                </a:solidFill>
+                <a:latin typeface="Calibri"/>
+              </a:defRPr>
+            </a:pPr>
+            <a:r>
+              <a:t>UVM_HOME not set</a:t>
+            </a:r>
+          </a:p>
+        </p:txBody>
+      </p:sp>
+      <p:sp>
+        <p:nvSpPr>
+          <p:cNvPr id="3" name="TextBox 2"/>
+          <p:cNvSpPr txBox="1"/>
+          <p:nvPr/>
+        </p:nvSpPr>
+        <p:spPr>
+          <a:xfrm>
+            <a:off x="548640" y="1234440"/>
+            <a:ext cx="11064240" cy="4937760"/>
+          </a:xfrm>
+          <a:prstGeom prst="rect">
+            <a:avLst/>
+          </a:prstGeom>
+          <a:noFill/>
+        </p:spPr>
+        <p:txBody>
+          <a:bodyPr wrap="square">
+            <a:noAutofit/>
+          </a:bodyPr>
+          <a:lstStyle/>
+          <a:p>
+            <a:pPr>
+              <a:lnSpc>
+                <a:spcPts val="2200"/>
+              </a:lnSpc>
+              <a:spcAft>
+                <a:spcPts val="1000"/>
+              </a:spcAft>
+              <a:defRPr sz="2000" b="0">
+                <a:solidFill>
+                  <a:srgbClr val="333333"/>
+                </a:solidFill>
+                <a:latin typeface="Calibri"/>
+              </a:defRPr>
+            </a:pPr>
+            <a:r>
+              <a:t>• Mistake: Build fails with missing `uvm_pkg.sv`.</a:t>
+            </a:r>
+          </a:p>
+          <a:p>
+            <a:pPr>
+              <a:lnSpc>
+                <a:spcPts val="2200"/>
+              </a:lnSpc>
+              <a:spcAft>
+                <a:spcPts val="1000"/>
+              </a:spcAft>
+              <a:defRPr sz="2000" b="0">
+                <a:solidFill>
+                  <a:srgbClr val="333333"/>
+                </a:solidFill>
+                <a:latin typeface="Calibri"/>
+              </a:defRPr>
+            </a:pPr>
+            <a:r>
+              <a:t>• Correct: Export UVM_HOME or use vendored UVM under</a:t>
+            </a:r>
+          </a:p>
+          <a:p>
+            <a:pPr>
+              <a:lnSpc>
+                <a:spcPts val="2200"/>
+              </a:lnSpc>
+              <a:spcAft>
+                <a:spcPts val="1000"/>
+              </a:spcAft>
+              <a:defRPr sz="2000" b="0">
+                <a:solidFill>
+                  <a:srgbClr val="333333"/>
+                </a:solidFill>
+                <a:latin typeface="Calibri"/>
+              </a:defRPr>
+            </a:pPr>
+            <a:r>
+              <a:t>      `tools/`.</a:t>
+            </a:r>
+          </a:p>
+          <a:p>
+            <a:pPr>
+              <a:lnSpc>
+                <a:spcPts val="2200"/>
+              </a:lnSpc>
+              <a:spcAft>
+                <a:spcPts val="1000"/>
+              </a:spcAft>
+              <a:defRPr sz="2000" b="0">
+                <a:solidFill>
+                  <a:srgbClr val="333333"/>
+                </a:solidFill>
+                <a:latin typeface="Calibri"/>
+              </a:defRPr>
+            </a:pPr>
+            <a:r>
+              <a:t>• Why: Compiler cannot find UVM includes.</a:t>
+            </a:r>
+          </a:p>
+        </p:txBody>
+      </p:sp>
+      <p:sp>
+        <p:nvSpPr>
+          <p:cNvPr id="4" name="TextBox 3"/>
+          <p:cNvSpPr txBox="1"/>
+          <p:nvPr/>
+        </p:nvSpPr>
+        <p:spPr>
+          <a:xfrm>
+            <a:off x="548640" y="6355080"/>
+            <a:ext cx="11064240" cy="320040"/>
+          </a:xfrm>
+          <a:prstGeom prst="rect">
+            <a:avLst/>
+          </a:prstGeom>
+          <a:noFill/>
+        </p:spPr>
+        <p:txBody>
+          <a:bodyPr wrap="square">
+            <a:noAutofit/>
+          </a:bodyPr>
+          <a:lstStyle/>
+          <a:p>
+            <a:pPr algn="r">
+              <a:lnSpc>
+                <a:spcPts val="2200"/>
+              </a:lnSpc>
+              <a:defRPr sz="1000" b="0">
+                <a:solidFill>
+                  <a:srgbClr val="666666"/>
+                </a:solidFill>
+                <a:latin typeface="Calibri"/>
+              </a:defRPr>
+            </a:pPr>
+            <a:r>
+              <a:t>learn_uart_spi_i2c / Module 2</a:t>
+            </a:r>
+          </a:p>
+        </p:txBody>
+      </p:sp>
+    </p:spTree>
+  </p:cSld>
+  <p:clrMapOvr>
+    <a:masterClrMapping/>
+  </p:clrMapOvr>
+</p:sld>
+</file>
+
+<file path=ppt/slides/slide45.xml><?xml version="1.0" encoding="utf-8"?>
+<p:sld xmlns:a="http://schemas.openxmlformats.org/drawingml/2006/main" xmlns:p="http://schemas.openxmlformats.org/presentationml/2006/main" xmlns:r="http://schemas.openxmlformats.org/officeDocument/2006/relationships">
+  <p:cSld>
+    <p:spTree>
+      <p:nvGrpSpPr>
+        <p:cNvPr id="1" name=""/>
+        <p:cNvGrpSpPr/>
+        <p:nvPr/>
+      </p:nvGrpSpPr>
+      <p:grpSpPr/>
+      <p:sp>
+        <p:nvSpPr>
+          <p:cNvPr id="2" name="TextBox 1"/>
+          <p:cNvSpPr txBox="1"/>
+          <p:nvPr/>
+        </p:nvSpPr>
+        <p:spPr>
+          <a:xfrm>
+            <a:off x="548640" y="2743200"/>
+            <a:ext cx="11064240" cy="1371600"/>
+          </a:xfrm>
+          <a:prstGeom prst="rect">
+            <a:avLst/>
+          </a:prstGeom>
+          <a:noFill/>
+        </p:spPr>
+        <p:txBody>
+          <a:bodyPr wrap="square">
+            <a:noAutofit/>
+          </a:bodyPr>
+          <a:lstStyle/>
+          <a:p>
+            <a:pPr algn="ctr">
+              <a:lnSpc>
+                <a:spcPts val="2200"/>
+              </a:lnSpc>
+              <a:defRPr sz="3600" b="1">
+                <a:solidFill>
+                  <a:srgbClr val="1A1A2E"/>
+                </a:solidFill>
+                <a:latin typeface="Calibri"/>
+              </a:defRPr>
+            </a:pPr>
+            <a:r>
+              <a:t>Practice &amp; assessment</a:t>
+            </a:r>
+          </a:p>
+        </p:txBody>
+      </p:sp>
+      <p:sp>
+        <p:nvSpPr>
+          <p:cNvPr id="3" name="TextBox 2"/>
+          <p:cNvSpPr txBox="1"/>
+          <p:nvPr/>
+        </p:nvSpPr>
+        <p:spPr>
+          <a:xfrm>
+            <a:off x="548640" y="6355080"/>
+            <a:ext cx="11064240" cy="320040"/>
+          </a:xfrm>
+          <a:prstGeom prst="rect">
+            <a:avLst/>
+          </a:prstGeom>
+          <a:noFill/>
+        </p:spPr>
+        <p:txBody>
+          <a:bodyPr wrap="square">
+            <a:noAutofit/>
+          </a:bodyPr>
+          <a:lstStyle/>
+          <a:p>
+            <a:pPr algn="r">
+              <a:lnSpc>
+                <a:spcPts val="2200"/>
+              </a:lnSpc>
+              <a:defRPr sz="1000" b="0">
+                <a:solidFill>
+                  <a:srgbClr val="666666"/>
+                </a:solidFill>
+                <a:latin typeface="Calibri"/>
+              </a:defRPr>
+            </a:pPr>
+            <a:r>
+              <a:t>learn_uart_spi_i2c / Module 2</a:t>
+            </a:r>
+          </a:p>
+        </p:txBody>
+      </p:sp>
+    </p:spTree>
+  </p:cSld>
+  <p:clrMapOvr>
+    <a:masterClrMapping/>
+  </p:clrMapOvr>
+</p:sld>
+</file>
+
+<file path=ppt/slides/slide46.xml><?xml version="1.0" encoding="utf-8"?>
+<p:sld xmlns:a="http://schemas.openxmlformats.org/drawingml/2006/main" xmlns:p="http://schemas.openxmlformats.org/presentationml/2006/main" xmlns:r="http://schemas.openxmlformats.org/officeDocument/2006/relationships">
+  <p:cSld>
+    <p:spTree>
+      <p:nvGrpSpPr>
+        <p:cNvPr id="1" name=""/>
+        <p:cNvGrpSpPr/>
+        <p:nvPr/>
+      </p:nvGrpSpPr>
+      <p:grpSpPr/>
+      <p:sp>
+        <p:nvSpPr>
+          <p:cNvPr id="2" name="TextBox 1"/>
+          <p:cNvSpPr txBox="1"/>
+          <p:nvPr/>
+        </p:nvSpPr>
+        <p:spPr>
+          <a:xfrm>
+            <a:off x="548640" y="411480"/>
+            <a:ext cx="11064240" cy="777240"/>
+          </a:xfrm>
+          <a:prstGeom prst="rect">
+            <a:avLst/>
+          </a:prstGeom>
+          <a:noFill/>
+        </p:spPr>
+        <p:txBody>
+          <a:bodyPr wrap="square">
+            <a:noAutofit/>
+          </a:bodyPr>
+          <a:lstStyle/>
+          <a:p>
+            <a:pPr>
+              <a:lnSpc>
+                <a:spcPts val="2200"/>
+              </a:lnSpc>
+              <a:defRPr sz="2800" b="1">
+                <a:solidFill>
+                  <a:srgbClr val="1A1A2E"/>
+                </a:solidFill>
+                <a:latin typeface="Calibri"/>
+              </a:defRPr>
+            </a:pPr>
+            <a:r>
+              <a:t>What you should know</a:t>
+            </a:r>
+          </a:p>
+        </p:txBody>
+      </p:sp>
+      <p:sp>
+        <p:nvSpPr>
+          <p:cNvPr id="3" name="TextBox 2"/>
+          <p:cNvSpPr txBox="1"/>
+          <p:nvPr/>
+        </p:nvSpPr>
+        <p:spPr>
+          <a:xfrm>
+            <a:off x="548640" y="1234440"/>
+            <a:ext cx="11064240" cy="4937760"/>
+          </a:xfrm>
+          <a:prstGeom prst="rect">
+            <a:avLst/>
+          </a:prstGeom>
+          <a:noFill/>
+        </p:spPr>
+        <p:txBody>
+          <a:bodyPr wrap="square">
+            <a:noAutofit/>
+          </a:bodyPr>
+          <a:lstStyle/>
+          <a:p>
+            <a:pPr>
+              <a:lnSpc>
+                <a:spcPts val="2200"/>
+              </a:lnSpc>
+              <a:spcAft>
+                <a:spcPts val="1000"/>
+              </a:spcAft>
+              <a:defRPr sz="2000" b="0">
+                <a:solidFill>
+                  <a:srgbClr val="333333"/>
+                </a:solidFill>
+                <a:latin typeface="Calibri"/>
+              </a:defRPr>
+            </a:pPr>
+            <a:r>
+              <a:t>• Explain basic testbench (directed tests, pin</a:t>
+            </a:r>
+          </a:p>
+          <a:p>
+            <a:pPr>
+              <a:lnSpc>
+                <a:spcPts val="2200"/>
+              </a:lnSpc>
+              <a:spcAft>
+                <a:spcPts val="1000"/>
+              </a:spcAft>
+              <a:defRPr sz="2000" b="0">
+                <a:solidFill>
+                  <a:srgbClr val="333333"/>
+                </a:solidFill>
+                <a:latin typeface="Calibri"/>
+              </a:defRPr>
+            </a:pPr>
+            <a:r>
+              <a:t>      wiggling) and how it evolves into UVM (transaction,</a:t>
+            </a:r>
+          </a:p>
+          <a:p>
+            <a:pPr>
+              <a:lnSpc>
+                <a:spcPts val="2200"/>
+              </a:lnSpc>
+              <a:spcAft>
+                <a:spcPts val="1000"/>
+              </a:spcAft>
+              <a:defRPr sz="2000" b="0">
+                <a:solidFill>
+                  <a:srgbClr val="333333"/>
+                </a:solidFill>
+                <a:latin typeface="Calibri"/>
+              </a:defRPr>
+            </a:pPr>
+            <a:r>
+              <a:t>      se…</a:t>
+            </a:r>
+          </a:p>
+          <a:p>
+            <a:pPr>
+              <a:lnSpc>
+                <a:spcPts val="2200"/>
+              </a:lnSpc>
+              <a:spcAft>
+                <a:spcPts val="1000"/>
+              </a:spcAft>
+              <a:defRPr sz="2000" b="0">
+                <a:solidFill>
+                  <a:srgbClr val="333333"/>
+                </a:solidFill>
+                <a:latin typeface="Calibri"/>
+              </a:defRPr>
+            </a:pPr>
+            <a:r>
+              <a:t>• Describe the role of transaction, sequence, driver,</a:t>
+            </a:r>
+          </a:p>
+          <a:p>
+            <a:pPr>
+              <a:lnSpc>
+                <a:spcPts val="2200"/>
+              </a:lnSpc>
+              <a:spcAft>
+                <a:spcPts val="1000"/>
+              </a:spcAft>
+              <a:defRPr sz="2000" b="0">
+                <a:solidFill>
+                  <a:srgbClr val="333333"/>
+                </a:solidFill>
+                <a:latin typeface="Calibri"/>
+              </a:defRPr>
+            </a:pPr>
+            <a:r>
+              <a:t>      monitor, scoreboard, agent, env, and test in a…</a:t>
+            </a:r>
+          </a:p>
+          <a:p>
+            <a:pPr>
+              <a:lnSpc>
+                <a:spcPts val="2200"/>
+              </a:lnSpc>
+              <a:spcAft>
+                <a:spcPts val="1000"/>
+              </a:spcAft>
+              <a:defRPr sz="2000" b="0">
+                <a:solidFill>
+                  <a:srgbClr val="333333"/>
+                </a:solidFill>
+                <a:latin typeface="Calibri"/>
+              </a:defRPr>
+            </a:pPr>
+            <a:r>
+              <a:t>• Run the uvm_smoke example (make SIM=verilator</a:t>
+            </a:r>
+          </a:p>
+          <a:p>
+            <a:pPr>
+              <a:lnSpc>
+                <a:spcPts val="2200"/>
+              </a:lnSpc>
+              <a:spcAft>
+                <a:spcPts val="1000"/>
+              </a:spcAft>
+              <a:defRPr sz="2000" b="0">
+                <a:solidFill>
+                  <a:srgbClr val="333333"/>
+                </a:solidFill>
+                <a:latin typeface="Calibri"/>
+              </a:defRPr>
+            </a:pPr>
+            <a:r>
+              <a:t>      TEST=test_uvm_smoke) and interpret UVM output.</a:t>
+            </a:r>
+          </a:p>
+          <a:p>
+            <a:pPr>
+              <a:lnSpc>
+                <a:spcPts val="2200"/>
+              </a:lnSpc>
+              <a:spcAft>
+                <a:spcPts val="1000"/>
+              </a:spcAft>
+              <a:defRPr sz="2000" b="0">
+                <a:solidFill>
+                  <a:srgbClr val="333333"/>
+                </a:solidFill>
+                <a:latin typeface="Calibri"/>
+              </a:defRPr>
+            </a:pPr>
+            <a:r>
+              <a:t>• Use the toolchain: Verilator, UVM_HOME, Make; know</a:t>
+            </a:r>
+          </a:p>
+          <a:p>
+            <a:pPr>
+              <a:lnSpc>
+                <a:spcPts val="2200"/>
+              </a:lnSpc>
+              <a:spcAft>
+                <a:spcPts val="1000"/>
+              </a:spcAft>
+              <a:defRPr sz="2000" b="0">
+                <a:solidFill>
+                  <a:srgbClr val="333333"/>
+                </a:solidFill>
+                <a:latin typeface="Calibri"/>
+              </a:defRPr>
+            </a:pPr>
+            <a:r>
+              <a:t>      why `-sv`, `--timing`, and include paths are nee…</a:t>
+            </a:r>
+          </a:p>
+          <a:p>
+            <a:pPr>
+              <a:lnSpc>
+                <a:spcPts val="2200"/>
+              </a:lnSpc>
+              <a:spcAft>
+                <a:spcPts val="1000"/>
+              </a:spcAft>
+              <a:defRPr sz="2000" b="0">
+                <a:solidFill>
+                  <a:srgbClr val="333333"/>
+                </a:solidFill>
+                <a:latin typeface="Calibri"/>
+              </a:defRPr>
+            </a:pPr>
+            <a:r>
+              <a:t>• Be ready for Module 3: UART protocol + RTL + basic</a:t>
+            </a:r>
+          </a:p>
+          <a:p>
+            <a:pPr>
+              <a:lnSpc>
+                <a:spcPts val="2200"/>
+              </a:lnSpc>
+              <a:spcAft>
+                <a:spcPts val="1000"/>
+              </a:spcAft>
+              <a:defRPr sz="2000" b="0">
+                <a:solidFill>
+                  <a:srgbClr val="333333"/>
+                </a:solidFill>
+                <a:latin typeface="Calibri"/>
+              </a:defRPr>
+            </a:pPr>
+            <a:r>
+              <a:t>      (non-UVM) testbench.</a:t>
+            </a:r>
+          </a:p>
+        </p:txBody>
+      </p:sp>
+      <p:sp>
+        <p:nvSpPr>
+          <p:cNvPr id="4" name="TextBox 3"/>
+          <p:cNvSpPr txBox="1"/>
+          <p:nvPr/>
+        </p:nvSpPr>
+        <p:spPr>
+          <a:xfrm>
+            <a:off x="548640" y="6355080"/>
+            <a:ext cx="11064240" cy="320040"/>
+          </a:xfrm>
+          <a:prstGeom prst="rect">
+            <a:avLst/>
+          </a:prstGeom>
+          <a:noFill/>
+        </p:spPr>
+        <p:txBody>
+          <a:bodyPr wrap="square">
+            <a:noAutofit/>
+          </a:bodyPr>
+          <a:lstStyle/>
+          <a:p>
+            <a:pPr algn="r">
+              <a:lnSpc>
+                <a:spcPts val="2200"/>
+              </a:lnSpc>
+              <a:defRPr sz="1000" b="0">
+                <a:solidFill>
+                  <a:srgbClr val="666666"/>
+                </a:solidFill>
+                <a:latin typeface="Calibri"/>
+              </a:defRPr>
+            </a:pPr>
+            <a:r>
+              <a:t>learn_uart_spi_i2c / Module 2</a:t>
+            </a:r>
+          </a:p>
+        </p:txBody>
+      </p:sp>
+    </p:spTree>
+  </p:cSld>
+  <p:clrMapOvr>
+    <a:masterClrMapping/>
+  </p:clrMapOvr>
+</p:sld>
+</file>
+
+<file path=ppt/slides/slide47.xml><?xml version="1.0" encoding="utf-8"?>
+<p:sld xmlns:a="http://schemas.openxmlformats.org/drawingml/2006/main" xmlns:p="http://schemas.openxmlformats.org/presentationml/2006/main" xmlns:r="http://schemas.openxmlformats.org/officeDocument/2006/relationships">
+  <p:cSld>
+    <p:spTree>
+      <p:nvGrpSpPr>
+        <p:cNvPr id="1" name=""/>
+        <p:cNvGrpSpPr/>
+        <p:nvPr/>
+      </p:nvGrpSpPr>
+      <p:grpSpPr/>
+      <p:sp>
+        <p:nvSpPr>
+          <p:cNvPr id="2" name="TextBox 1"/>
+          <p:cNvSpPr txBox="1"/>
+          <p:nvPr/>
+        </p:nvSpPr>
+        <p:spPr>
+          <a:xfrm>
+            <a:off x="548640" y="411480"/>
+            <a:ext cx="11064240" cy="777240"/>
+          </a:xfrm>
+          <a:prstGeom prst="rect">
+            <a:avLst/>
+          </a:prstGeom>
+          <a:noFill/>
+        </p:spPr>
+        <p:txBody>
+          <a:bodyPr wrap="square">
+            <a:noAutofit/>
+          </a:bodyPr>
+          <a:lstStyle/>
+          <a:p>
+            <a:pPr>
+              <a:lnSpc>
+                <a:spcPts val="2200"/>
+              </a:lnSpc>
+              <a:defRPr sz="2800" b="1">
+                <a:solidFill>
+                  <a:srgbClr val="1A1A2E"/>
+                </a:solidFill>
+                <a:latin typeface="Calibri"/>
+              </a:defRPr>
+            </a:pPr>
+            <a:r>
+              <a:t>Exercises</a:t>
+            </a:r>
+          </a:p>
+        </p:txBody>
+      </p:sp>
+      <p:sp>
+        <p:nvSpPr>
+          <p:cNvPr id="3" name="TextBox 2"/>
+          <p:cNvSpPr txBox="1"/>
+          <p:nvPr/>
+        </p:nvSpPr>
+        <p:spPr>
+          <a:xfrm>
+            <a:off x="548640" y="1234440"/>
+            <a:ext cx="11064240" cy="4937760"/>
+          </a:xfrm>
+          <a:prstGeom prst="rect">
+            <a:avLst/>
+          </a:prstGeom>
+          <a:noFill/>
+        </p:spPr>
+        <p:txBody>
+          <a:bodyPr wrap="square">
+            <a:noAutofit/>
+          </a:bodyPr>
+          <a:lstStyle/>
+          <a:p>
+            <a:pPr>
+              <a:lnSpc>
+                <a:spcPts val="2200"/>
+              </a:lnSpc>
+              <a:spcAft>
+                <a:spcPts val="1000"/>
+              </a:spcAft>
+              <a:defRPr sz="2000" b="0">
+                <a:solidFill>
+                  <a:srgbClr val="333333"/>
+                </a:solidFill>
+                <a:latin typeface="Calibri"/>
+              </a:defRPr>
+            </a:pPr>
+            <a:r>
+              <a:t>• Run uvm_smoke</a:t>
+            </a:r>
+          </a:p>
+          <a:p>
+            <a:pPr>
+              <a:lnSpc>
+                <a:spcPts val="2200"/>
+              </a:lnSpc>
+              <a:spcAft>
+                <a:spcPts val="1000"/>
+              </a:spcAft>
+              <a:defRPr sz="2000" b="0">
+                <a:solidFill>
+                  <a:srgbClr val="333333"/>
+                </a:solidFill>
+                <a:latin typeface="Calibri"/>
+              </a:defRPr>
+            </a:pPr>
+            <a:r>
+              <a:t>• Traceability</a:t>
+            </a:r>
+          </a:p>
+          <a:p>
+            <a:pPr>
+              <a:lnSpc>
+                <a:spcPts val="2200"/>
+              </a:lnSpc>
+              <a:spcAft>
+                <a:spcPts val="1000"/>
+              </a:spcAft>
+              <a:defRPr sz="2000" b="0">
+                <a:solidFill>
+                  <a:srgbClr val="333333"/>
+                </a:solidFill>
+                <a:latin typeface="Calibri"/>
+              </a:defRPr>
+            </a:pPr>
+            <a:r>
+              <a:t>• Change the sequence</a:t>
+            </a:r>
+          </a:p>
+          <a:p>
+            <a:pPr>
+              <a:lnSpc>
+                <a:spcPts val="2200"/>
+              </a:lnSpc>
+              <a:spcAft>
+                <a:spcPts val="1000"/>
+              </a:spcAft>
+              <a:defRPr sz="2000" b="0">
+                <a:solidFill>
+                  <a:srgbClr val="333333"/>
+                </a:solidFill>
+                <a:latin typeface="Calibri"/>
+              </a:defRPr>
+            </a:pPr>
+            <a:r>
+              <a:t>• Optional: Waveforms</a:t>
+            </a:r>
+          </a:p>
+        </p:txBody>
+      </p:sp>
+      <p:sp>
+        <p:nvSpPr>
+          <p:cNvPr id="4" name="TextBox 3"/>
+          <p:cNvSpPr txBox="1"/>
+          <p:nvPr/>
+        </p:nvSpPr>
+        <p:spPr>
+          <a:xfrm>
+            <a:off x="548640" y="6355080"/>
+            <a:ext cx="11064240" cy="320040"/>
+          </a:xfrm>
+          <a:prstGeom prst="rect">
+            <a:avLst/>
+          </a:prstGeom>
+          <a:noFill/>
+        </p:spPr>
+        <p:txBody>
+          <a:bodyPr wrap="square">
+            <a:noAutofit/>
+          </a:bodyPr>
+          <a:lstStyle/>
+          <a:p>
+            <a:pPr algn="r">
+              <a:lnSpc>
+                <a:spcPts val="2200"/>
+              </a:lnSpc>
+              <a:defRPr sz="1000" b="0">
+                <a:solidFill>
+                  <a:srgbClr val="666666"/>
+                </a:solidFill>
+                <a:latin typeface="Calibri"/>
+              </a:defRPr>
+            </a:pPr>
+            <a:r>
+              <a:t>learn_uart_spi_i2c / Module 2</a:t>
+            </a:r>
+          </a:p>
+        </p:txBody>
+      </p:sp>
+    </p:spTree>
+  </p:cSld>
+  <p:clrMapOvr>
+    <a:masterClrMapping/>
+  </p:clrMapOvr>
+</p:sld>
+</file>
+
+<file path=ppt/slides/slide48.xml><?xml version="1.0" encoding="utf-8"?>
+<p:sld xmlns:a="http://schemas.openxmlformats.org/drawingml/2006/main" xmlns:p="http://schemas.openxmlformats.org/presentationml/2006/main" xmlns:r="http://schemas.openxmlformats.org/officeDocument/2006/relationships">
+  <p:cSld>
+    <p:spTree>
+      <p:nvGrpSpPr>
+        <p:cNvPr id="1" name=""/>
+        <p:cNvGrpSpPr/>
+        <p:nvPr/>
+      </p:nvGrpSpPr>
+      <p:grpSpPr/>
+      <p:sp>
+        <p:nvSpPr>
+          <p:cNvPr id="2" name="TextBox 1"/>
+          <p:cNvSpPr txBox="1"/>
+          <p:nvPr/>
+        </p:nvSpPr>
+        <p:spPr>
+          <a:xfrm>
+            <a:off x="548640" y="411480"/>
+            <a:ext cx="11064240" cy="777240"/>
+          </a:xfrm>
+          <a:prstGeom prst="rect">
+            <a:avLst/>
+          </a:prstGeom>
+          <a:noFill/>
+        </p:spPr>
+        <p:txBody>
+          <a:bodyPr wrap="square">
+            <a:noAutofit/>
+          </a:bodyPr>
+          <a:lstStyle/>
+          <a:p>
+            <a:pPr>
+              <a:lnSpc>
+                <a:spcPts val="2200"/>
+              </a:lnSpc>
+              <a:defRPr sz="2800" b="1">
+                <a:solidFill>
+                  <a:srgbClr val="1A1A2E"/>
+                </a:solidFill>
+                <a:latin typeface="Calibri"/>
+              </a:defRPr>
+            </a:pPr>
+            <a:r>
+              <a:t>Assessment checklist</a:t>
+            </a:r>
+          </a:p>
+        </p:txBody>
+      </p:sp>
+      <p:sp>
+        <p:nvSpPr>
+          <p:cNvPr id="3" name="TextBox 2"/>
+          <p:cNvSpPr txBox="1"/>
+          <p:nvPr/>
+        </p:nvSpPr>
+        <p:spPr>
+          <a:xfrm>
+            <a:off x="548640" y="1234440"/>
+            <a:ext cx="11064240" cy="4937760"/>
+          </a:xfrm>
+          <a:prstGeom prst="rect">
+            <a:avLst/>
+          </a:prstGeom>
+          <a:noFill/>
+        </p:spPr>
+        <p:txBody>
+          <a:bodyPr wrap="square">
+            <a:noAutofit/>
+          </a:bodyPr>
+          <a:lstStyle/>
+          <a:p>
+            <a:pPr>
+              <a:lnSpc>
+                <a:spcPts val="2200"/>
+              </a:lnSpc>
+              <a:spcAft>
+                <a:spcPts val="1000"/>
+              </a:spcAft>
+              <a:defRPr sz="2000" b="0">
+                <a:solidFill>
+                  <a:srgbClr val="333333"/>
+                </a:solidFill>
+                <a:latin typeface="Calibri"/>
+              </a:defRPr>
+            </a:pPr>
+            <a:r>
+              <a:t>• Can explain basic TB vs UVM (transaction, sequence,</a:t>
+            </a:r>
+          </a:p>
+          <a:p>
+            <a:pPr>
+              <a:lnSpc>
+                <a:spcPts val="2200"/>
+              </a:lnSpc>
+              <a:spcAft>
+                <a:spcPts val="1000"/>
+              </a:spcAft>
+              <a:defRPr sz="2000" b="0">
+                <a:solidFill>
+                  <a:srgbClr val="333333"/>
+                </a:solidFill>
+                <a:latin typeface="Calibri"/>
+              </a:defRPr>
+            </a:pPr>
+            <a:r>
+              <a:t>      driver, monitor, scoreboard).</a:t>
+            </a:r>
+          </a:p>
+          <a:p>
+            <a:pPr>
+              <a:lnSpc>
+                <a:spcPts val="2200"/>
+              </a:lnSpc>
+              <a:spcAft>
+                <a:spcPts val="1000"/>
+              </a:spcAft>
+              <a:defRPr sz="2000" b="0">
+                <a:solidFill>
+                  <a:srgbClr val="333333"/>
+                </a:solidFill>
+                <a:latin typeface="Calibri"/>
+              </a:defRPr>
+            </a:pPr>
+            <a:r>
+              <a:t>• Can describe the role of UVM_HOME, Verilator flags,</a:t>
+            </a:r>
+          </a:p>
+          <a:p>
+            <a:pPr>
+              <a:lnSpc>
+                <a:spcPts val="2200"/>
+              </a:lnSpc>
+              <a:spcAft>
+                <a:spcPts val="1000"/>
+              </a:spcAft>
+              <a:defRPr sz="2000" b="0">
+                <a:solidFill>
+                  <a:srgbClr val="333333"/>
+                </a:solidFill>
+                <a:latin typeface="Calibri"/>
+              </a:defRPr>
+            </a:pPr>
+            <a:r>
+              <a:t>      and Make in building/running a UVM test.</a:t>
+            </a:r>
+          </a:p>
+          <a:p>
+            <a:pPr>
+              <a:lnSpc>
+                <a:spcPts val="2200"/>
+              </a:lnSpc>
+              <a:spcAft>
+                <a:spcPts val="1000"/>
+              </a:spcAft>
+              <a:defRPr sz="2000" b="0">
+                <a:solidFill>
+                  <a:srgbClr val="333333"/>
+                </a:solidFill>
+                <a:latin typeface="Calibri"/>
+              </a:defRPr>
+            </a:pPr>
+            <a:r>
+              <a:t>• Can run uvm_smoke and interpret the output.</a:t>
+            </a:r>
+          </a:p>
+          <a:p>
+            <a:pPr>
+              <a:lnSpc>
+                <a:spcPts val="2200"/>
+              </a:lnSpc>
+              <a:spcAft>
+                <a:spcPts val="1000"/>
+              </a:spcAft>
+              <a:defRPr sz="2000" b="0">
+                <a:solidFill>
+                  <a:srgbClr val="333333"/>
+                </a:solidFill>
+                <a:latin typeface="Calibri"/>
+              </a:defRPr>
+            </a:pPr>
+            <a:r>
+              <a:t>• Ready to move to Module 3 (UART protocol + RTL +</a:t>
+            </a:r>
+          </a:p>
+          <a:p>
+            <a:pPr>
+              <a:lnSpc>
+                <a:spcPts val="2200"/>
+              </a:lnSpc>
+              <a:spcAft>
+                <a:spcPts val="1000"/>
+              </a:spcAft>
+              <a:defRPr sz="2000" b="0">
+                <a:solidFill>
+                  <a:srgbClr val="333333"/>
+                </a:solidFill>
+                <a:latin typeface="Calibri"/>
+              </a:defRPr>
+            </a:pPr>
+            <a:r>
+              <a:t>      basic testbench).</a:t>
+            </a:r>
+          </a:p>
+        </p:txBody>
+      </p:sp>
+      <p:sp>
+        <p:nvSpPr>
+          <p:cNvPr id="4" name="TextBox 3"/>
+          <p:cNvSpPr txBox="1"/>
+          <p:nvPr/>
+        </p:nvSpPr>
+        <p:spPr>
+          <a:xfrm>
+            <a:off x="548640" y="6355080"/>
+            <a:ext cx="11064240" cy="320040"/>
+          </a:xfrm>
+          <a:prstGeom prst="rect">
+            <a:avLst/>
+          </a:prstGeom>
+          <a:noFill/>
+        </p:spPr>
+        <p:txBody>
+          <a:bodyPr wrap="square">
+            <a:noAutofit/>
+          </a:bodyPr>
+          <a:lstStyle/>
+          <a:p>
+            <a:pPr algn="r">
+              <a:lnSpc>
+                <a:spcPts val="2200"/>
+              </a:lnSpc>
+              <a:defRPr sz="1000" b="0">
+                <a:solidFill>
+                  <a:srgbClr val="666666"/>
+                </a:solidFill>
+                <a:latin typeface="Calibri"/>
+              </a:defRPr>
+            </a:pPr>
+            <a:r>
+              <a:t>learn_uart_spi_i2c / Module 2</a:t>
+            </a:r>
+          </a:p>
+        </p:txBody>
+      </p:sp>
+    </p:spTree>
+  </p:cSld>
+  <p:clrMapOvr>
+    <a:masterClrMapping/>
+  </p:clrMapOvr>
+</p:sld>
+</file>
+
+<file path=ppt/slides/slide49.xml><?xml version="1.0" encoding="utf-8"?>
+<p:sld xmlns:a="http://schemas.openxmlformats.org/drawingml/2006/main" xmlns:p="http://schemas.openxmlformats.org/presentationml/2006/main" xmlns:r="http://schemas.openxmlformats.org/officeDocument/2006/relationships">
+  <p:cSld>
+    <p:spTree>
+      <p:nvGrpSpPr>
+        <p:cNvPr id="1" name=""/>
+        <p:cNvGrpSpPr/>
+        <p:nvPr/>
+      </p:nvGrpSpPr>
+      <p:grpSpPr/>
+      <p:sp>
+        <p:nvSpPr>
+          <p:cNvPr id="2" name="TextBox 1"/>
+          <p:cNvSpPr txBox="1"/>
+          <p:nvPr/>
+        </p:nvSpPr>
+        <p:spPr>
+          <a:xfrm>
+            <a:off x="548640" y="411480"/>
+            <a:ext cx="11064240" cy="777240"/>
+          </a:xfrm>
+          <a:prstGeom prst="rect">
+            <a:avLst/>
+          </a:prstGeom>
+          <a:noFill/>
+        </p:spPr>
+        <p:txBody>
+          <a:bodyPr wrap="square">
+            <a:noAutofit/>
+          </a:bodyPr>
+          <a:lstStyle/>
+          <a:p>
+            <a:pPr>
+              <a:lnSpc>
+                <a:spcPts val="2200"/>
+              </a:lnSpc>
+              <a:defRPr sz="2800" b="1">
+                <a:solidFill>
+                  <a:srgbClr val="1A1A2E"/>
+                </a:solidFill>
+                <a:latin typeface="Calibri"/>
+              </a:defRPr>
+            </a:pPr>
+            <a:r>
+              <a:t>Summary &amp; next steps</a:t>
+            </a:r>
+          </a:p>
+        </p:txBody>
+      </p:sp>
+      <p:sp>
+        <p:nvSpPr>
+          <p:cNvPr id="3" name="TextBox 2"/>
+          <p:cNvSpPr txBox="1"/>
+          <p:nvPr/>
+        </p:nvSpPr>
+        <p:spPr>
+          <a:xfrm>
+            <a:off x="548640" y="1234440"/>
+            <a:ext cx="11064240" cy="4937760"/>
+          </a:xfrm>
+          <a:prstGeom prst="rect">
+            <a:avLst/>
+          </a:prstGeom>
+          <a:noFill/>
+        </p:spPr>
+        <p:txBody>
+          <a:bodyPr wrap="square">
+            <a:noAutofit/>
+          </a:bodyPr>
+          <a:lstStyle/>
+          <a:p>
+            <a:pPr>
+              <a:lnSpc>
+                <a:spcPts val="2200"/>
+              </a:lnSpc>
+              <a:spcAft>
+                <a:spcPts val="1000"/>
+              </a:spcAft>
+              <a:defRPr sz="2000" b="0">
+                <a:solidFill>
+                  <a:srgbClr val="333333"/>
+                </a:solidFill>
+                <a:latin typeface="Calibri"/>
+              </a:defRPr>
+            </a:pPr>
+            <a:r>
+              <a:t>• Understand basic testbench patterns (directed tests,</a:t>
+            </a:r>
+          </a:p>
+          <a:p>
+            <a:pPr>
+              <a:lnSpc>
+                <a:spcPts val="2200"/>
+              </a:lnSpc>
+              <a:spcAft>
+                <a:spcPts val="1000"/>
+              </a:spcAft>
+              <a:defRPr sz="2000" b="0">
+                <a:solidFill>
+                  <a:srgbClr val="333333"/>
+                </a:solidFill>
+                <a:latin typeface="Calibri"/>
+              </a:defRPr>
+            </a:pPr>
+            <a:r>
+              <a:t>      pin wiggling), the evolution to a UVM+SV testb…</a:t>
+            </a:r>
+          </a:p>
+          <a:p>
+            <a:pPr>
+              <a:lnSpc>
+                <a:spcPts val="2200"/>
+              </a:lnSpc>
+              <a:spcAft>
+                <a:spcPts val="1000"/>
+              </a:spcAft>
+              <a:defRPr sz="2000" b="0">
+                <a:solidFill>
+                  <a:srgbClr val="333333"/>
+                </a:solidFill>
+                <a:latin typeface="Calibri"/>
+              </a:defRPr>
+            </a:pPr>
+            <a:r>
+              <a:t>• Complete module2/CHECKLIST.md</a:t>
+            </a:r>
+          </a:p>
+          <a:p>
+            <a:pPr>
+              <a:lnSpc>
+                <a:spcPts val="2200"/>
+              </a:lnSpc>
+              <a:spcAft>
+                <a:spcPts val="1000"/>
+              </a:spcAft>
+              <a:defRPr sz="2000" b="0">
+                <a:solidFill>
+                  <a:srgbClr val="333333"/>
+                </a:solidFill>
+                <a:latin typeface="Calibri"/>
+              </a:defRPr>
+            </a:pPr>
+            <a:r>
+              <a:t>• Review module2/EXAMPLES.md and run each lab</a:t>
+            </a:r>
+          </a:p>
+          <a:p>
+            <a:pPr>
+              <a:lnSpc>
+                <a:spcPts val="2200"/>
+              </a:lnSpc>
+              <a:spcAft>
+                <a:spcPts val="1000"/>
+              </a:spcAft>
+              <a:defRPr sz="2000" b="0">
+                <a:solidFill>
+                  <a:srgbClr val="333333"/>
+                </a:solidFill>
+                <a:latin typeface="Calibri"/>
+              </a:defRPr>
+            </a:pPr>
+            <a:r>
+              <a:t>• Next: UART</a:t>
+            </a:r>
+          </a:p>
+        </p:txBody>
+      </p:sp>
+      <p:sp>
+        <p:nvSpPr>
+          <p:cNvPr id="4" name="TextBox 3"/>
+          <p:cNvSpPr txBox="1"/>
+          <p:nvPr/>
+        </p:nvSpPr>
+        <p:spPr>
+          <a:xfrm>
+            <a:off x="548640" y="6355080"/>
+            <a:ext cx="11064240" cy="320040"/>
+          </a:xfrm>
+          <a:prstGeom prst="rect">
+            <a:avLst/>
+          </a:prstGeom>
+          <a:noFill/>
+        </p:spPr>
+        <p:txBody>
+          <a:bodyPr wrap="square">
+            <a:noAutofit/>
+          </a:bodyPr>
+          <a:lstStyle/>
+          <a:p>
+            <a:pPr algn="r">
+              <a:lnSpc>
+                <a:spcPts val="2200"/>
+              </a:lnSpc>
+              <a:defRPr sz="1000" b="0">
+                <a:solidFill>
+                  <a:srgbClr val="666666"/>
+                </a:solidFill>
+                <a:latin typeface="Calibri"/>
+              </a:defRPr>
+            </a:pPr>
+            <a:r>
+              <a:t>learn_uart_spi_i2c / Module 2</a:t>
+            </a:r>
+          </a:p>
+        </p:txBody>
+      </p:sp>
+    </p:spTree>
+  </p:cSld>
+  <p:clrMapOvr>
+    <a:masterClrMapping/>
+  </p:clrMapOvr>
+</p:sld>
+</file>
+
 <file path=ppt/slides/slide5.xml><?xml version="1.0" encoding="utf-8"?>
 <p:sld xmlns:a="http://schemas.openxmlformats.org/drawingml/2006/main" xmlns:p="http://schemas.openxmlformats.org/presentationml/2006/main" xmlns:r="http://schemas.openxmlformats.org/officeDocument/2006/relationships">
   <p:cSld>
@@ -10945,14 +14898,170 @@
               </a:defRPr>
             </a:pPr>
             <a:r>
-              <a:t>RTL / block architecture</a:t>
+              <a:t>1. DUT and interface</a:t>
+            </a:r>
+          </a:p>
+        </p:txBody>
+      </p:sp>
+      <p:sp>
+        <p:nvSpPr>
+          <p:cNvPr id="3" name="TextBox 2"/>
+          <p:cNvSpPr txBox="1"/>
+          <p:nvPr/>
+        </p:nvSpPr>
+        <p:spPr>
+          <a:xfrm>
+            <a:off x="548640" y="1234440"/>
+            <a:ext cx="5303520" cy="4754880"/>
+          </a:xfrm>
+          <a:prstGeom prst="rect">
+            <a:avLst/>
+          </a:prstGeom>
+          <a:noFill/>
+        </p:spPr>
+        <p:txBody>
+          <a:bodyPr wrap="square">
+            <a:noAutofit/>
+          </a:bodyPr>
+          <a:lstStyle/>
+          <a:p>
+            <a:pPr>
+              <a:lnSpc>
+                <a:spcPts val="2200"/>
+              </a:lnSpc>
+              <a:spcAft>
+                <a:spcPts val="1000"/>
+              </a:spcAft>
+              <a:defRPr sz="2000" b="0">
+                <a:solidFill>
+                  <a:srgbClr val="333333"/>
+                </a:solidFill>
+                <a:latin typeface="Calibri"/>
+              </a:defRPr>
+            </a:pPr>
+            <a:r>
+              <a:t>• simple_register.v: `enable`,</a:t>
+            </a:r>
+          </a:p>
+          <a:p>
+            <a:pPr>
+              <a:lnSpc>
+                <a:spcPts val="2200"/>
+              </a:lnSpc>
+              <a:spcAft>
+                <a:spcPts val="1000"/>
+              </a:spcAft>
+              <a:defRPr sz="2000" b="0">
+                <a:solidFill>
+                  <a:srgbClr val="333333"/>
+                </a:solidFill>
+                <a:latin typeface="Calibri"/>
+              </a:defRPr>
+            </a:pPr>
+            <a:r>
+              <a:t>      `d`, `q` — minimal storage for</a:t>
+            </a:r>
+          </a:p>
+          <a:p>
+            <a:pPr>
+              <a:lnSpc>
+                <a:spcPts val="2200"/>
+              </a:lnSpc>
+              <a:spcAft>
+                <a:spcPts val="1000"/>
+              </a:spcAft>
+              <a:defRPr sz="2000" b="0">
+                <a:solidFill>
+                  <a:srgbClr val="333333"/>
+                </a:solidFill>
+                <a:latin typeface="Calibri"/>
+              </a:defRPr>
+            </a:pPr>
+            <a:r>
+              <a:t>      learning UVM data flow.</a:t>
+            </a:r>
+          </a:p>
+          <a:p>
+            <a:pPr>
+              <a:lnSpc>
+                <a:spcPts val="2200"/>
+              </a:lnSpc>
+              <a:spcAft>
+                <a:spcPts val="1000"/>
+              </a:spcAft>
+              <a:defRPr sz="2000" b="0">
+                <a:solidFill>
+                  <a:srgbClr val="333333"/>
+                </a:solidFill>
+                <a:latin typeface="Calibri"/>
+              </a:defRPr>
+            </a:pPr>
+            <a:r>
+              <a:t>• reg_if: virtual interface</a:t>
+            </a:r>
+          </a:p>
+          <a:p>
+            <a:pPr>
+              <a:lnSpc>
+                <a:spcPts val="2200"/>
+              </a:lnSpc>
+              <a:spcAft>
+                <a:spcPts val="1000"/>
+              </a:spcAft>
+              <a:defRPr sz="2000" b="0">
+                <a:solidFill>
+                  <a:srgbClr val="333333"/>
+                </a:solidFill>
+                <a:latin typeface="Calibri"/>
+              </a:defRPr>
+            </a:pPr>
+            <a:r>
+              <a:t>      bundling `clk`, `rst_n`,</a:t>
+            </a:r>
+          </a:p>
+          <a:p>
+            <a:pPr>
+              <a:lnSpc>
+                <a:spcPts val="2200"/>
+              </a:lnSpc>
+              <a:spcAft>
+                <a:spcPts val="1000"/>
+              </a:spcAft>
+              <a:defRPr sz="2000" b="0">
+                <a:solidFill>
+                  <a:srgbClr val="333333"/>
+                </a:solidFill>
+                <a:latin typeface="Calibri"/>
+              </a:defRPr>
+            </a:pPr>
+            <a:r>
+              <a:t>      `enable`, `d`, `q` for the</a:t>
+            </a:r>
+          </a:p>
+          <a:p>
+            <a:pPr>
+              <a:lnSpc>
+                <a:spcPts val="2200"/>
+              </a:lnSpc>
+              <a:spcAft>
+                <a:spcPts val="1000"/>
+              </a:spcAft>
+              <a:defRPr sz="2000" b="0">
+                <a:solidFill>
+                  <a:srgbClr val="333333"/>
+                </a:solidFill>
+                <a:latin typeface="Calibri"/>
+              </a:defRPr>
+            </a:pPr>
+            <a:r>
+              <a:t>      agent.</a:t>
             </a:r>
           </a:p>
         </p:txBody>
       </p:sp>
       <p:pic>
         <p:nvPicPr>
-          <p:cNvPr id="3" name="Picture 2" descr="rtl_architecture.png"/>
+          <p:cNvPr id="4" name="Picture 3" descr="rtl_architecture.png"/>
           <p:cNvPicPr>
             <a:picLocks noChangeAspect="1"/>
           </p:cNvPicPr>
@@ -10966,53 +15075,14 @@
         </p:blipFill>
         <p:spPr>
           <a:xfrm>
-            <a:off x="548640" y="1143000"/>
-            <a:ext cx="8128000" cy="4572000"/>
+            <a:off x="6172200" y="2094547"/>
+            <a:ext cx="5394960" cy="3034665"/>
           </a:xfrm>
           <a:prstGeom prst="rect">
             <a:avLst/>
           </a:prstGeom>
         </p:spPr>
       </p:pic>
-      <p:sp>
-        <p:nvSpPr>
-          <p:cNvPr id="4" name="TextBox 3"/>
-          <p:cNvSpPr txBox="1"/>
-          <p:nvPr/>
-        </p:nvSpPr>
-        <p:spPr>
-          <a:xfrm>
-            <a:off x="548640" y="5897880"/>
-            <a:ext cx="11064240" cy="411480"/>
-          </a:xfrm>
-          <a:prstGeom prst="rect">
-            <a:avLst/>
-          </a:prstGeom>
-          <a:noFill/>
-        </p:spPr>
-        <p:txBody>
-          <a:bodyPr wrap="square">
-            <a:noAutofit/>
-          </a:bodyPr>
-          <a:lstStyle/>
-          <a:p>
-            <a:pPr>
-              <a:lnSpc>
-                <a:spcPts val="2200"/>
-              </a:lnSpc>
-              <a:defRPr sz="1200" b="0">
-                <a:solidFill>
-                  <a:srgbClr val="333333"/>
-                </a:solidFill>
-                <a:latin typeface="Calibri"/>
-              </a:defRPr>
-            </a:pPr>
-            <a:r>
-              <a:t>Module 2: DUT / block hierarchy (see module2/examples/).</a:t>
-            </a:r>
-          </a:p>
-        </p:txBody>
-      </p:sp>
       <p:sp>
         <p:nvSpPr>
           <p:cNvPr id="5" name="TextBox 4"/>
